--- a/workshop-slides.pptx
+++ b/workshop-slides.pptx
@@ -35,9 +35,10 @@
     <p:sldId id="283" r:id="rId29"/>
     <p:sldId id="284" r:id="rId30"/>
     <p:sldId id="285" r:id="rId31"/>
+    <p:sldId id="286" r:id="rId32"/>
   </p:sldIdLst>
   <p:notesMasterIdLst>
-    <p:notesMasterId r:id="rId32"/>
+    <p:notesMasterId r:id="rId33"/>
   </p:notesMasterIdLst>
   <p:sldSz cx="9144000" cy="5143500"/>
   <p:notesSz cx="5143500" cy="9144000"/>
@@ -795,7 +796,7 @@
           <a:p>
             <a:r>
               <a:rPr lang="en-US" dirty="0"/>
-              <a:t>Now let's overlay two more dimensions: Exposure and Frequency. Think of Exposure as a veto. If your data is sensitive—if you're working with customer PII, or financial records, or anything regulated—it doesn't go into a cloud AI tool without legal and security sign-off. And I want to be clear: this isn't about whether ChatGPT or Claude is secure. It's about whose data it is. If you're handling customer information, that customer has a right to know where their data is going. Frequency is the ROI lever. If you do a task every single day, even saving 15 minutes a day compounds to 60 hours a year. That's worth setting up an automation for. If you do a task once a quarter, the ROI is lower, but if that task is painful or error-prone, it might still be worth it. Here's what I want you to take away: SAFE gives you four lenses. You don't have to score perfectly on all of them. But Exposure is a hard veto. And Frequency and Stability together tell you where the value is.</a:t>
+              <a:t>Now let's overlay two more dimensions: Exposure and Frequency. Think of Exposure as a veto. If your data is sensitive—if you're working with customer PII, or financial records, or anything regulated—it doesn't go into a cloud AI tool without legal and security sign-off. And I want to be clear: this isn't about whether ChatGPT or Claude is secure. It's about whose data it is. If you're handling customer information, that customer has a right to know where their data is going. Frequency is the ROI lever. If you do a task every single day, even saving 15 minutes a day compounds to 60 hours a year. That's worth setting up an automation for. If you do a task once a quarter, the ROI is lower, but if that task is painful or error-prone, it might still be worth it. Here's what I want you to take away: SAFE gives you four lenses. You don't have to score perfectly on all of them. But Exposure is a hard veto. And Frequency and Stability together tell you where the value is. And let me be transparent about something. I get a lot of questions in trainings about security and data handling. Those are fair questions, but I'm not a security or compliance decision-maker for your organization. My role is to teach you how these tools work. What's allowed depends on your company's policies. The best approach is to learn what tools can do here in this workshop, then validate with your IT and security teams.</a:t>
             </a:r>
             <a:endParaRPr lang="en-US" dirty="0"/>
           </a:p>
@@ -971,7 +972,7 @@
           <a:p>
             <a:r>
               <a:rPr lang="en-US" dirty="0"/>
-              <a:t>The IA-AI Framework is about figuring out what deployment model fits your task. This framework comes from Tobias Zwingmann's book, The Profitable AI Advantage, published by Wiley. It's an excellent read if you want to go deeper on AI deployment strategy. I want to be upfront that I'm teaching his model here with attribution — it's the best framework I've found for answering the question of what kind of AI to use. The framework has two axes. Integration: Does the AI work inside your existing tools, or is it separate? Think of it this way. ChatGPT lives in a separate tab. You open it, you type a question, you get an answer. That's low integration. Excel Copilot, on the other hand, sits inside Excel. You click a button and it works on your data right there in your spreadsheet. That's high integration. Automation: How much is the AI running on its own versus waiting for you to ask? Low automation is you asking questions. High automation is the AI doing work on a schedule or trigger without you having to ask each time. You combine these two axes to get four different deployment types, and we'll go through each one in a minute.</a:t>
+              <a:t>The IA-AI Framework is about figuring out what deployment model fits your task. This framework comes from Tobias Zwingmann's book, The Profitable AI Advantage, published by Packt. It's an excellent read if you want to go deeper on AI deployment strategy. I want to be upfront that I'm teaching his model here with attribution — it's the best framework I've found for answering the question of what kind of AI to use. The framework has two axes. Integration: Does the AI work inside your existing tools, or is it separate? Think of it this way. ChatGPT lives in a separate tab. You open it, you type a question, you get an answer. That's low integration. Excel Copilot, on the other hand, sits inside Excel. You click a button and it works on your data right there in your spreadsheet. That's high integration. Automation: How much is the AI running on its own versus waiting for you to ask? Low automation is you asking questions. High automation is the AI doing work on a schedule or trigger without you having to ask each time. You combine these two axes to get four different deployment types, and we'll go through each one in a minute.</a:t>
             </a:r>
             <a:endParaRPr lang="en-US" dirty="0"/>
           </a:p>
@@ -1059,7 +1060,7 @@
           <a:p>
             <a:r>
               <a:rPr lang="en-US" dirty="0"/>
-              <a:t>Here's the IA-AI matrix. On the vertical axis is Integration, from low at the bottom to high at the top. On the horizontal axis is Automation, from low on the left to high on the right. Bottom left is Assistants: low integration, low automation. That's ChatGPT, Claude, Gemini. You open them in a separate browser tab, you ask a question, you get an answer. You're in control at every step. No Copilot license required, most are free or cheap. Top left is Copilots: high integration, low automation. These work inside your tools—Excel, Word, GitHub. You click a button and the AI works on your data right there. You stay in control. Bottom right is Autopilots: low integration, high automation. Think Zapier or Make or a scheduled Python script. These run on a trigger or schedule without you having to ask. They're separate from your tools but they automate work. Top right is Agents: high integration, high automation. These are advanced. The AI is sitting inside your tools and running workflows automatically. Most teams aren't there yet. Most of you will start in Assistants, which is fine. That covers maybe 80 percent of use cases. And the good news is, you probably already have free access to at least one Assistant tool.</a:t>
+              <a:t>Here's the IA-AI matrix. On the vertical axis is Integration, from low at the bottom to high at the top. On the horizontal axis is Automation, from low on the left to high on the right. Bottom left is Assistants: low integration, low automation. That's ChatGPT, Claude, Gemini. You open them in a separate browser tab, you ask a question, you get an answer. You're in control at every step. These are available in free and paid tiers, but check with your organization about which tools are approved for use with your data. Top left is Copilots: high integration, low automation. These work inside your tools—Excel, Word, GitHub. You click a button and the AI works on your data right there. You stay in control. Bottom right is Autopilots: low integration, high automation. Think Zapier or Make or a scheduled Python script. These run on a trigger or schedule without you having to ask. They're separate from your tools but they automate work. Top right is Agents: high integration, high automation. These are advanced. The AI is sitting inside your tools and running workflows automatically. Most teams aren't there yet. Most of you will start in Assistants, which is fine. That covers maybe 80 percent of use cases. Check with your IT team about which assistant tools your organization has approved. Many companies now have enterprise agreements.</a:t>
             </a:r>
             <a:endParaRPr lang="en-US" dirty="0"/>
           </a:p>
@@ -1147,7 +1148,7 @@
           <a:p>
             <a:r>
               <a:rPr lang="en-US" dirty="0"/>
-              <a:t>Here's the thing that most people don't realize: the Assistant quadrant covers about eighty percent of real use cases. You don't need an expensive Copilot license to get started. You can use ChatGPT free, Claude free, or Gemini. All of them are available in a browser. The Assistant tools are really good at certain things. They're great for drafting—emails, summaries, documents, whole sections of content. They can write code and SQL formulas, or fix code you give them. They can explain concepts, help you think through problems. They're good at brainstorming—you can say, here's what I'm trying to do, give me some approaches. They can transform data from one format to another. Here's my honest take: if you're starting with AI, start with an Assistant tool. Try it. Build a muscle for what prompts work, how to frame your questions, how to get useful output. Then, if you find yourself doing the same thing repeatedly, you can move to a Copilot or Autopilot. But most people find that Assistants get them 80 percent of the way there and the ROI is immediate because they're free.</a:t>
+              <a:t>The Assistant quadrant is where most people start. These are standalone tools you use in a browser—ChatGPT, Claude, Gemini. They handle a wide range of tasks. Now, an important caveat. I'm going to show you what these tools can do, but I'm not your IT or security team. Whether you can use these tools—and which ones—depends on your organization's policies. Think of me like a personal trainer. I can teach you the exercises, but I'm not the one approving your medical treatment plan. Before you use any AI tool on real work data, check with your IT and compliance team. Many organizations now have approved tool lists or enterprise agreements with specific vendors. Start there. What I CAN tell you is what these tools are capable of, so you know what to ask your IT team about. The Assistant tools are really good at certain things. They're great for drafting—emails, summaries, documents, whole sections of content. They can write code and SQL formulas, or fix code you give them. They can explain concepts, help you think through problems. They're good at brainstorming—you can say, here's what I'm trying to do, give me some approaches. They can transform data from one format to another.</a:t>
             </a:r>
             <a:endParaRPr lang="en-US" dirty="0"/>
           </a:p>
@@ -1235,7 +1236,7 @@
           <a:p>
             <a:r>
               <a:rPr lang="en-US" dirty="0"/>
-              <a:t>Copilots are where integration starts to matter. The main difference from Assistants is that Copilots work inside the tools you already use. In Excel, you click a button and the Copilot analyzes your data right there. In Word, you can ask it to draft a section without leaving the document. In Outlook, you can ask it to draft an email right in the compose box. This eliminates context-switching—you don't have to open a new tab, copy your data, paste it in, and then copy the answer back. Copilots also have some context about what you're working on, so they can give more specific help. For example, Excel Copilot can see your data and your formulas, so it can suggest better ways to do calculations. The trade-off is that Copilots usually require a license. Excel Copilot requires a Copilot Pro subscription or a Microsoft 365 Copilot license if your company has it. It's not free. So when should you use a Copilot versus an Assistant? If you're doing a one-off task, an Assistant is great. If you're already in Excel and you do this task regularly, a Copilot saves you time because you stay in the tool. But remember: an Assistant is free and covers most use cases. Don't pay for a Copilot until you know you need it.</a:t>
+              <a:t>Copilots are where integration starts to matter. The main difference from Assistants is that Copilots work inside the tools you already use. In Excel, you click a button and the Copilot analyzes your data right there. In Word, you can ask it to draft a section without leaving the document. In Outlook, you can ask it to draft an email right in the compose box. This eliminates context-switching—you don't have to open a new tab, copy your data, paste it in, and then copy the answer back. Copilots also have some context about what you're working on, so they can give more specific help. For example, Excel Copilot can see your data and your formulas, so it can suggest better ways to do calculations. The key difference is integration. Whether you use an Assistant or a Copilot depends on your workflow needs AND what your organization has approved. Some companies have M365 Copilot licenses. Some don't but have approved other tools. The framework helps you know what to ask for.</a:t>
             </a:r>
             <a:endParaRPr lang="en-US" dirty="0"/>
           </a:p>
@@ -1323,7 +1324,7 @@
           <a:p>
             <a:r>
               <a:rPr lang="en-US" dirty="0"/>
-              <a:t>So here's how the two frameworks work together. First, you score your task with SAFE. Stability, Ambiguity, Frequency, Exposure. That tells you whether AI is even a good fit. If it's high exposure and you haven't gotten security clearance, stop. If it's in the Judgment Zone and changes constantly, AI can help but won't automate it. Second, you place it on the Stability by Ambiguity matrix. That tells you whether AI should automate the task or assist you with it. If you're in the Sweet Spot, automation is possible. If you're in Rules Must Hold, AI assists but humans verify. Third, you think about Exposure and Frequency. Exposure is a hard veto. Frequency tells you whether the ROI is worth the setup. Fourth, you pick a deployment type. Start with a free Assistant tool. If that works and you do it regularly, maybe move to a Copilot. Most of you will stop there. Fifth, you start small. Don't try to automate your entire job. Pick one task, try it for two weeks, see what you learn. That's the system.</a:t>
+              <a:t>So here's how the two frameworks work together. First, you score your task with SAFE. Stability, Ambiguity, Frequency, Exposure. That tells you whether AI is even a good fit. If it's high exposure and you haven't gotten security clearance, stop. If it's in the Judgment Zone and changes constantly, AI can help but won't automate it. Second, you place it on the Stability by Ambiguity matrix. That tells you whether AI should automate the task or assist you with it. If you're in the Sweet Spot, automation is possible. If you're in Rules Must Hold, AI assists but humans verify. Third, you think about Exposure and Frequency. Exposure is a hard veto. Frequency tells you whether the ROI is worth the setup. Fourth, you pick a deployment type. Start with whatever tool your organization has approved—whether that's an enterprise ChatGPT account, Claude through your company, or M365 Copilot. If that works and you do it regularly, maybe move to another option. Most of you will stop there. Fifth, you start small. Don't try to automate your entire job. Pick one task, try it for two weeks, see what you learn. That's the system.</a:t>
             </a:r>
             <a:endParaRPr lang="en-US" dirty="0"/>
           </a:p>
@@ -1587,7 +1588,7 @@
           <a:p>
             <a:r>
               <a:rPr lang="en-US" dirty="0"/>
-              <a:t>Open your workbooks to the activity page. Here's what we're doing for the next twenty minutes. First, pick three tasks you're actually doing right now. Don't pick theoretical tasks or things you wish you were doing—pick the work that's sitting on your desk. Second, score each one with SAFE. Stability: does the process change? Ambiguity: is there a clear right answer? Frequency: how often do you do it? Exposure: how sensitive is the data? Third, plot each task on the Stability by Ambiguity matrix. Where does it land? Sweet Spot, Rules Must Hold, Convenience Zone, Judgment Zone? Fourth, for the tasks that landed somewhere AI-ready, choose which deployment type makes sense. Would you use a free Assistant like ChatGPT? Would you need Excel Copilot? Would you use Zapier to automate it? I'm going to be walking around the room. If you get stuck, raise your hand. If you're not sure what task to pick or how to score something, that's what I'm here for. Let's go.</a:t>
+              <a:t>Open your workbooks to the activity page. Here's what we're doing for the next twenty minutes. First, pick three tasks you're actually doing right now. Don't pick theoretical tasks or things you wish you were doing—pick the work that's sitting on your desk. Second, score each one with SAFE. Stability: does the process change? Ambiguity: is there a clear right answer? Frequency: how often do you do it? Exposure: how sensitive is the data? Third, plot each task on the Stability by Ambiguity matrix. Where does it land? Sweet Spot, Rules Must Hold, Convenience Zone, Judgment Zone? Fourth, for the tasks that landed somewhere AI-ready, choose which deployment type makes sense. Would you use an Assistant like ChatGPT or Claude? Would you need Excel Copilot? Would you use Zapier to automate it? I'm going to be walking around the room. If you get stuck, raise your hand. If you're not sure what task to pick or how to score something, that's what I'm here for. Let's go.</a:t>
             </a:r>
             <a:endParaRPr lang="en-US" dirty="0"/>
           </a:p>
@@ -1675,7 +1676,7 @@
           <a:p>
             <a:r>
               <a:rPr lang="en-US" dirty="0"/>
-              <a:t>While you're working, I'm going to be moving around the room. Here are some common things I hear and how to think through them. If you're not sure if something is high or low ambiguity, ask yourself: does this need human judgment? If multiple people could reasonably do it differently and that's okay, that's high ambiguity. If there's one right answer, that's low. If your task scores high on everything and seems like it can't be AI-ready, that's telling you something. Maybe the process changes too much. Maybe it needs judgment. That's not a failure—it's information. You can still use AI to help, but you probably won't fully automate it. Don't get stuck on picking the perfect tool. Start with a free tool. Try it for a couple of weeks. If it works, great. If you need something more integrated or more automated, you can upgrade. And remember, tasks are messy. They don't fit neatly into boxes. If a task is close to the Sweet Spot but not quite, put it there and move forward. Don't let perfect be the enemy of good.</a:t>
+              <a:t>While you're working, I'm going to be moving around the room. Here are some common things I hear and how to think through them. If you're not sure if something is high or low ambiguity, ask yourself: does this need human judgment? If multiple people could reasonably do it differently and that's okay, that's high ambiguity. If there's one right answer, that's low. If your task scores high on everything and seems like it can't be AI-ready, that's telling you something. Maybe the process changes too much. Maybe it needs judgment. That's not a failure—it's information. You can still use AI to help, but you probably won't fully automate it. Don't get stuck on picking the perfect tool. Start with an approved tool. Try it for a couple of weeks. If it works, great. If you need something more integrated or more automated, you can upgrade. And remember, tasks are messy. They don't fit neatly into boxes. If a task is close to the Sweet Spot but not quite, put it there and move forward. Don't let perfect be the enemy of good.</a:t>
             </a:r>
             <a:endParaRPr lang="en-US" dirty="0"/>
           </a:p>
@@ -1763,7 +1764,7 @@
           <a:p>
             <a:r>
               <a:rPr lang="en-US" dirty="0"/>
-              <a:t>Great work on the activity. Now let's hear from each other about what we discovered. This is where you learn from everyone else's thinking too.</a:t>
+              <a:t>If you don't have a work example you can use for the activity, here are some alternatives. You can pick a personal workflow—maybe you're planning a trip, organizing your finances, or doing a job search. Those have the same kind of structure as work tasks. Or we have some sample scenarios you can use. A monthly budget report for a fifty-person marketing team. Weekly client status emails across twelve accounts. Quarterly compliance documentation. These are realistic examples that show how the frameworks work. Or you can pair up with someone who has a work example and observe their thinking. Watch how they score their task, where it lands on the matrix, what tool they'd pick. The frameworks work the same way regardless of which example you pick. Pick what feels most comfortable and gives you good thinking practice.</a:t>
             </a:r>
             <a:endParaRPr lang="en-US" dirty="0"/>
           </a:p>
@@ -1851,7 +1852,7 @@
           <a:p>
             <a:r>
               <a:rPr lang="en-US" dirty="0"/>
-              <a:t>Let's go around the room and hear from three or four of you. I want to hear what surprised you, what you learned, and what you're thinking about trying. I'm going to call on you, so think about one interesting discovery from your three tasks. If something you thought was perfect for AI turned out to have complications—maybe it's in the Judgment Zone, or the data is sensitive—that's a great thing to share. We all learn from each other's thinking. Who wants to go first? Tell us one of your three tasks and where it landed.</a:t>
+              <a:t>Great work on the activity. Now let's hear from each other about what we discovered. This is where you learn from everyone else's thinking too.</a:t>
             </a:r>
             <a:endParaRPr lang="en-US" dirty="0"/>
           </a:p>
@@ -1939,7 +1940,7 @@
           <a:p>
             <a:r>
               <a:rPr lang="en-US" dirty="0"/>
-              <a:t>Okay, so we've figured out which tasks are good for AI. Now let's talk about the actual money. What are you saving?</a:t>
+              <a:t>Let's go around the room and hear from three or four of you. I want to hear what surprised you, what you learned, and what you're thinking about trying. I'm going to call on you, so think about one interesting discovery from your three tasks. If something you thought was perfect for AI turned out to have complications—maybe it's in the Judgment Zone, or the data is sensitive—that's a great thing to share. We all learn from each other's thinking. Who wants to go first? Tell us one of your three tasks and where it landed.</a:t>
             </a:r>
             <a:endParaRPr lang="en-US" dirty="0"/>
           </a:p>
@@ -2027,7 +2028,7 @@
           <a:p>
             <a:r>
               <a:rPr lang="en-US" dirty="0"/>
-              <a:t>Here's a simple formula to calculate what this is actually worth. Time saved per task, times how many times you do it per year, times your hourly rate. That's your annual value. Let me do an example. Say you have a task that takes thirty minutes. You do it about fifty times a year—that's roughly once a week. You make seventy-five dollars an hour. Thirty minutes saved times fifty times per year is twenty-five hours. Twenty-five hours times seventy-five is eighteen hundred seventy-five dollars per year saved on just one task. Now, does it cost you anything to save that money? If you use ChatGPT free or Claude free, it costs you nothing. That's pure ROI. This is why even a small task in the Sweet Spot is worth doing. You're not just saving time, you're freeing up your attention for higher-value work.</a:t>
+              <a:t>Okay, so we've figured out which tasks are good for AI. Now let's talk about the actual money. What are you saving?</a:t>
             </a:r>
             <a:endParaRPr lang="en-US" dirty="0"/>
           </a:p>
@@ -2115,7 +2116,7 @@
           <a:p>
             <a:r>
               <a:rPr lang="en-US" dirty="0"/>
-              <a:t>Now it's your turn to do this math for yourself. Open your workbook to the Value Calculator page. Look at the AI Sweet Spot task you identified earlier. Think about how much time you'd save per instance. Maybe it's thirty minutes, maybe it's five minutes. Times it by how often you do it per year. If you're not sure, estimate. Think about your hourly rate or your company's loaded cost for an employee hour. Put all that into the formula. You've got three or four minutes. Work on your numbers.</a:t>
+              <a:t>Here's a simple formula to calculate what this is actually worth. Time saved per task, times how many times you do it per year, times your hourly rate. That's your annual value. Let me do an example. Say you have a task that takes thirty minutes. You do it about fifty times a year—that's roughly once a week. You make seventy-five dollars an hour. Thirty minutes saved times fifty times per year is twenty-five hours. Twenty-five hours times seventy-five is eighteen hundred seventy-five dollars per year saved on just one task. Now, does it cost you anything to save that money? Many organizations have AI tools available already. Check what's available to you through enterprise agreements or approved tools. The point is, even modest time savings on a frequent task add up fast. This is why even a small task in the Sweet Spot is worth doing. You're not just saving time, you're freeing up your attention for higher-value work.</a:t>
             </a:r>
             <a:endParaRPr lang="en-US" dirty="0"/>
           </a:p>
@@ -2203,7 +2204,7 @@
           <a:p>
             <a:r>
               <a:rPr lang="en-US" dirty="0"/>
-              <a:t>Okay, you know which tasks are good for AI. You know what you'll save. Now the last piece: what's the one thing you're actually going to do this week?</a:t>
+              <a:t>Now it's your turn to do this math for yourself. Open your workbook to the Value Calculator page. Look at the AI Sweet Spot task you identified earlier. Think about how much time you'd save per instance. Maybe it's thirty minutes, maybe it's five minutes. Times it by how often you do it per year. If you're not sure, estimate. Think about your hourly rate or your company's loaded cost for an employee hour. Put all that into the formula. You've got three or four minutes. Work on your numbers.</a:t>
             </a:r>
             <a:endParaRPr lang="en-US" dirty="0"/>
           </a:p>
@@ -2291,7 +2292,7 @@
           <a:p>
             <a:r>
               <a:rPr lang="en-US" dirty="0"/>
-              <a:t>Okay, last thing. I want you to commit to one task. Just one. Don't try to automate your whole job starting today. Pick one task that's in the Sweet Spot. Write it down in your workbook. Then write down which tool you'll use. If you're not sure, start with ChatGPT or Claude free. Write down when you'll try it. This week, or next week at the latest. And write down what success looks like. Maybe success is just: I tried it and it gave me something useful. Maybe it's: I saved thirty minutes. Write it down so you have something to measure against. I'm going to follow up with you in two weeks. I want to hear if you did it, what happened, what you learned. You don't have to be perfect. You don't have to automate it completely on day one. You just have to try.</a:t>
+              <a:t>Okay, you know which tasks are good for AI. You know what you'll save. Now the last piece: what's the one thing you're actually going to do this week?</a:t>
             </a:r>
             <a:endParaRPr lang="en-US" dirty="0"/>
           </a:p>
@@ -2379,7 +2380,7 @@
           <a:p>
             <a:r>
               <a:rPr lang="en-US" dirty="0"/>
-              <a:t>Thank you all for spending ninety minutes with me today. You've learned a repeatable system. It's SAFE to figure out if AI should touch a task. The 2×2 matrix and overlay dimensions to figure out how. IA-AI to pick the tool. Then you commit to one task and try it. Ninety minutes from now, you walked in wondering if AI was right for your work. You're walking out with a framework and a commitment. I'm going to send a follow-up email with a starter kit of free tools, some templates for the frameworks, and a link to our community. I want to hear how your one task goes. Reach out in two weeks and tell me what happened. And I want to give a shout-out to Tobias Zwingmann and his book The Profitable AI Advantage — the IA-AI framework we used today comes directly from that book. It's a great resource if you want to go deeper. Thank you.</a:t>
+              <a:t>Okay, last thing. I want you to commit to one task. Just one. Don't try to automate your whole job starting today. Pick one task that's in the Sweet Spot. Write it down in your workbook. Then write down which tool you'll use. Check with your IT team about what's approved. Write down when you'll try it. This week, or next week at the latest. And write down what success looks like. Maybe success is just: I tried it and it gave me something useful. Maybe it's: I saved thirty minutes. Write it down so you have something to measure against. I'm going to follow up with you in two weeks. I want to hear if you did it, what happened, what you learned. You don't have to be perfect. You don't have to automate it completely on day one. You just have to try.</a:t>
             </a:r>
             <a:endParaRPr lang="en-US" dirty="0"/>
           </a:p>
@@ -2555,7 +2556,7 @@
           <a:p>
             <a:r>
               <a:rPr lang="en-US" dirty="0"/>
-              <a:t>Here are the resources I mentioned. These are all the tools we talked about today. All of them have free options or free trials. You've got everything you need to get started. I have time for questions if anyone has them. Anything you want to ask about the frameworks, or how to get started with a tool, or whether something is a good fit for your task? Otherwise, thanks again for being here. I can't wait to hear what you try this week.</a:t>
+              <a:t>Thank you all for spending ninety minutes with me today. You've learned a repeatable system. It's SAFE to figure out if AI should touch a task. The 2×2 matrix and overlay dimensions to figure out how. IA-AI to pick the tool. Then you commit to one task and try it. Ninety minutes from now, you walked in wondering if AI was right for your work. You're walking out with a framework and a commitment. I'm going to send a follow-up email with a starter kit of free tools, some templates for the frameworks, and a link to our community. I want to hear how your one task goes. Reach out in two weeks and tell me what happened. And I want to give a shout-out to Tobias Zwingmann and his book The Profitable AI Advantage — the IA-AI framework we used today comes directly from that book. It's a great resource if you want to go deeper. The SAFE framework and 2×2 matrix are original Stringfest Analytics frameworks — you can read the full writeup on our blog. Thank you.</a:t>
             </a:r>
             <a:endParaRPr lang="en-US" dirty="0"/>
           </a:p>
@@ -2579,6 +2580,94 @@
             <a:fld id="{F7021451-1387-4CA6-816F-3879F97B5CBC}" type="slidenum">
               <a:rPr lang="en-US"/>
               <a:t>30</a:t>
+            </a:fld>
+            <a:endParaRPr lang="en-US"/>
+          </a:p>
+        </p:txBody>
+      </p:sp>
+    </p:spTree>
+    <p:extLst>
+      <p:ext uri="{BB962C8B-B14F-4D97-AF65-F5344CB8AC3E}">
+        <p14:creationId xmlns:p14="http://schemas.microsoft.com/office/powerpoint/2010/main" val="1024086991"/>
+      </p:ext>
+    </p:extLst>
+  </p:cSld>
+  <p:clrMapOvr>
+    <a:masterClrMapping/>
+  </p:clrMapOvr>
+</p:notes>
+</file>
+
+<file path=ppt/notesSlides/notesSlide31.xml><?xml version="1.0" encoding="utf-8"?>
+<p:notes xmlns:a="http://schemas.openxmlformats.org/drawingml/2006/main" xmlns:r="http://schemas.openxmlformats.org/officeDocument/2006/relationships" xmlns:p="http://schemas.openxmlformats.org/presentationml/2006/main">
+  <p:cSld>
+    <p:spTree>
+      <p:nvGrpSpPr>
+        <p:cNvPr id="1" name=""/>
+        <p:cNvGrpSpPr/>
+        <p:nvPr/>
+      </p:nvGrpSpPr>
+      <p:grpSpPr>
+        <a:xfrm>
+          <a:off x="0" y="0"/>
+          <a:ext cx="0" cy="0"/>
+          <a:chOff x="0" y="0"/>
+          <a:chExt cx="0" cy="0"/>
+        </a:xfrm>
+      </p:grpSpPr>
+      <p:sp>
+        <p:nvSpPr>
+          <p:cNvPr id="2" name="Slide Image Placeholder 1"/>
+          <p:cNvSpPr>
+            <a:spLocks noGrp="1" noRot="1" noChangeAspect="1"/>
+          </p:cNvSpPr>
+          <p:nvPr>
+            <p:ph type="sldImg"/>
+          </p:nvPr>
+        </p:nvSpPr>
+        <p:spPr/>
+      </p:sp>
+      <p:sp>
+        <p:nvSpPr>
+          <p:cNvPr id="3" name="Notes Placeholder 2"/>
+          <p:cNvSpPr>
+            <a:spLocks noGrp="1"/>
+          </p:cNvSpPr>
+          <p:nvPr>
+            <p:ph type="body" idx="1"/>
+          </p:nvPr>
+        </p:nvSpPr>
+        <p:spPr/>
+        <p:txBody>
+          <a:bodyPr/>
+          <a:lstStyle/>
+          <a:p>
+            <a:r>
+              <a:rPr lang="en-US" dirty="0"/>
+              <a:t>Here are the resources I mentioned. These are all the tools we talked about today. Before you use any of them with work data, check with your IT and security teams about what's approved in your organization. I have time for questions if anyone has them. Anything you want to ask about the frameworks, or how to get started with a tool, or whether something is a good fit for your task? Otherwise, thanks again for being here. I can't wait to hear what you try this week.</a:t>
+            </a:r>
+            <a:endParaRPr lang="en-US" dirty="0"/>
+          </a:p>
+        </p:txBody>
+      </p:sp>
+      <p:sp>
+        <p:nvSpPr>
+          <p:cNvPr id="4" name="Slide Number Placeholder 3"/>
+          <p:cNvSpPr>
+            <a:spLocks noGrp="1"/>
+          </p:cNvSpPr>
+          <p:nvPr>
+            <p:ph type="sldNum" sz="quarter" idx="10"/>
+          </p:nvPr>
+        </p:nvSpPr>
+        <p:spPr/>
+        <p:txBody>
+          <a:bodyPr/>
+          <a:lstStyle/>
+          <a:p>
+            <a:fld id="{F7021451-1387-4CA6-816F-3879F97B5CBC}" type="slidenum">
+              <a:rPr lang="en-US"/>
+              <a:t>31</a:t>
             </a:fld>
             <a:endParaRPr lang="en-US"/>
           </a:p>
@@ -2643,7 +2732,7 @@
           <a:p>
             <a:r>
               <a:rPr lang="en-US" dirty="0"/>
-              <a:t>All of the work we're doing today boils down to two questions. First: Should AI touch this task at all? That's where the SAFE Framework comes in. SAFE helps you score your task across four dimensions and figure out if it's even worth trying to use AI on. The second question is: If yes, what kind of AI should I use? Maybe you just need a free ChatGPT account. Maybe you need something integrated into your tools like Excel or Word. Maybe you need something fully automated like Zapier. That's where the IA-AI Framework helps. By the time you leave here today, you're going to know exactly how to answer both questions, and you're going to have a system you can use for any task that comes your way.</a:t>
+              <a:t>All of the work we're doing today boils down to two questions. First: Should AI touch this task at all? That's where the SAFE Framework comes in. SAFE helps you score your task across four dimensions and figure out if it's even worth trying to use AI on. The second question is: If yes, what kind of AI should I use? Maybe you just need a standalone assistant like ChatGPT or Claude. Maybe you need something integrated into your tools like Excel or Word. Maybe you need something fully automated like Zapier. That's where the IA-AI Framework helps. By the time you leave here today, you're going to know exactly how to answer both questions, and you're going to have a system you can use for any task that comes your way.</a:t>
             </a:r>
             <a:endParaRPr lang="en-US" dirty="0"/>
           </a:p>
@@ -3539,8 +3628,8 @@
         </p:nvSpPr>
         <p:spPr>
           <a:xfrm>
-            <a:off x="8046720" y="4389120"/>
-            <a:ext cx="274320" cy="274320"/>
+            <a:off x="8503920" y="4572000"/>
+            <a:ext cx="182880" cy="182880"/>
           </a:xfrm>
           <a:prstGeom prst="triangle">
             <a:avLst/>
@@ -3559,8 +3648,8 @@
         </p:nvSpPr>
         <p:spPr>
           <a:xfrm>
-            <a:off x="8275320" y="4617720"/>
-            <a:ext cx="274320" cy="274320"/>
+            <a:off x="8668512" y="4736592"/>
+            <a:ext cx="182880" cy="182880"/>
           </a:xfrm>
           <a:prstGeom prst="triangle">
             <a:avLst/>
@@ -3579,8 +3668,8 @@
         </p:nvSpPr>
         <p:spPr>
           <a:xfrm>
-            <a:off x="8503920" y="4846320"/>
-            <a:ext cx="274320" cy="274320"/>
+            <a:off x="8833104" y="4901184"/>
+            <a:ext cx="182880" cy="182880"/>
           </a:xfrm>
           <a:prstGeom prst="triangle">
             <a:avLst/>
@@ -4341,74 +4430,32 @@
           <p:nvPr/>
         </p:nvSpPr>
         <p:spPr>
-          <a:xfrm>
-            <a:off x="594360" y="2103120"/>
-            <a:ext cx="457200" cy="914400"/>
-          </a:xfrm>
-          <a:prstGeom prst="rect">
-            <a:avLst/>
-          </a:prstGeom>
-          <a:noFill/>
-          <a:ln/>
-        </p:spPr>
-        <p:txBody>
-          <a:bodyPr wrap="square" rtlCol="0" anchor="ctr"/>
-          <a:lstStyle/>
-          <a:p>
-            <a:pPr algn="ctr" indent="0" marL="0">
-              <a:buNone/>
-            </a:pPr>
-            <a:r>
-              <a:rPr lang="en-US" sz="1000" b="1" dirty="0">
+          <a:xfrm rot="16200000">
+            <a:off x="731520" y="2240280"/>
+            <a:ext cx="1097280" cy="457200"/>
+          </a:xfrm>
+          <a:prstGeom prst="rect">
+            <a:avLst/>
+          </a:prstGeom>
+          <a:noFill/>
+          <a:ln/>
+        </p:spPr>
+        <p:txBody>
+          <a:bodyPr wrap="square" rtlCol="0" anchor="ctr"/>
+          <a:lstStyle/>
+          <a:p>
+            <a:pPr indent="0" marL="0">
+              <a:buNone/>
+            </a:pPr>
+            <a:r>
+              <a:rPr lang="en-US" sz="1100" b="1" dirty="0">
                 <a:solidFill>
                   <a:srgbClr val="1F2120"/>
                 </a:solidFill>
               </a:rPr>
-              <a:t>St</a:t>
-            </a:r>
-            <a:endParaRPr lang="en-US" sz="1000" dirty="0"/>
-          </a:p>
-          <a:p>
-            <a:pPr algn="ctr" indent="0" marL="0">
-              <a:buNone/>
-            </a:pPr>
-            <a:r>
-              <a:rPr lang="en-US" sz="1000" b="1" dirty="0">
-                <a:solidFill>
-                  <a:srgbClr val="1F2120"/>
-                </a:solidFill>
-              </a:rPr>
-              <a:t>abl</a:t>
-            </a:r>
-            <a:endParaRPr lang="en-US" sz="1000" dirty="0"/>
-          </a:p>
-          <a:p>
-            <a:pPr algn="ctr" indent="0" marL="0">
-              <a:buNone/>
-            </a:pPr>
-            <a:r>
-              <a:rPr lang="en-US" sz="1000" b="1" dirty="0">
-                <a:solidFill>
-                  <a:srgbClr val="1F2120"/>
-                </a:solidFill>
-              </a:rPr>
-              <a:t>lit</a:t>
-            </a:r>
-            <a:endParaRPr lang="en-US" sz="1000" dirty="0"/>
-          </a:p>
-          <a:p>
-            <a:pPr algn="ctr" indent="0" marL="0">
-              <a:buNone/>
-            </a:pPr>
-            <a:r>
-              <a:rPr lang="en-US" sz="1000" b="1" dirty="0">
-                <a:solidFill>
-                  <a:srgbClr val="1F2120"/>
-                </a:solidFill>
-              </a:rPr>
-              <a:t>y</a:t>
-            </a:r>
-            <a:endParaRPr lang="en-US" sz="1000" dirty="0"/>
+              <a:t>Stability</a:t>
+            </a:r>
+            <a:endParaRPr lang="en-US" sz="1100" dirty="0"/>
           </a:p>
         </p:txBody>
       </p:sp>
@@ -4456,8 +4503,8 @@
         </p:nvSpPr>
         <p:spPr>
           <a:xfrm>
-            <a:off x="8046720" y="4389120"/>
-            <a:ext cx="274320" cy="274320"/>
+            <a:off x="8503920" y="4572000"/>
+            <a:ext cx="182880" cy="182880"/>
           </a:xfrm>
           <a:prstGeom prst="triangle">
             <a:avLst/>
@@ -4476,8 +4523,8 @@
         </p:nvSpPr>
         <p:spPr>
           <a:xfrm>
-            <a:off x="8275320" y="4617720"/>
-            <a:ext cx="274320" cy="274320"/>
+            <a:off x="8668512" y="4736592"/>
+            <a:ext cx="182880" cy="182880"/>
           </a:xfrm>
           <a:prstGeom prst="triangle">
             <a:avLst/>
@@ -4496,8 +4543,8 @@
         </p:nvSpPr>
         <p:spPr>
           <a:xfrm>
-            <a:off x="8503920" y="4846320"/>
-            <a:ext cx="274320" cy="274320"/>
+            <a:off x="8833104" y="4901184"/>
+            <a:ext cx="182880" cy="182880"/>
           </a:xfrm>
           <a:prstGeom prst="triangle">
             <a:avLst/>
@@ -5075,8 +5122,8 @@
         </p:nvSpPr>
         <p:spPr>
           <a:xfrm>
-            <a:off x="8046720" y="4389120"/>
-            <a:ext cx="274320" cy="274320"/>
+            <a:off x="8503920" y="4572000"/>
+            <a:ext cx="182880" cy="182880"/>
           </a:xfrm>
           <a:prstGeom prst="triangle">
             <a:avLst/>
@@ -5095,8 +5142,8 @@
         </p:nvSpPr>
         <p:spPr>
           <a:xfrm>
-            <a:off x="8275320" y="4617720"/>
-            <a:ext cx="274320" cy="274320"/>
+            <a:off x="8668512" y="4736592"/>
+            <a:ext cx="182880" cy="182880"/>
           </a:xfrm>
           <a:prstGeom prst="triangle">
             <a:avLst/>
@@ -5115,8 +5162,8 @@
         </p:nvSpPr>
         <p:spPr>
           <a:xfrm>
-            <a:off x="8503920" y="4846320"/>
-            <a:ext cx="274320" cy="274320"/>
+            <a:off x="8833104" y="4901184"/>
+            <a:ext cx="182880" cy="182880"/>
           </a:xfrm>
           <a:prstGeom prst="triangle">
             <a:avLst/>
@@ -5456,8 +5503,8 @@
         </p:nvSpPr>
         <p:spPr>
           <a:xfrm>
-            <a:off x="8046720" y="4389120"/>
-            <a:ext cx="274320" cy="274320"/>
+            <a:off x="8503920" y="4572000"/>
+            <a:ext cx="182880" cy="182880"/>
           </a:xfrm>
           <a:prstGeom prst="triangle">
             <a:avLst/>
@@ -5476,8 +5523,8 @@
         </p:nvSpPr>
         <p:spPr>
           <a:xfrm>
-            <a:off x="8275320" y="4617720"/>
-            <a:ext cx="274320" cy="274320"/>
+            <a:off x="8668512" y="4736592"/>
+            <a:ext cx="182880" cy="182880"/>
           </a:xfrm>
           <a:prstGeom prst="triangle">
             <a:avLst/>
@@ -5496,8 +5543,8 @@
         </p:nvSpPr>
         <p:spPr>
           <a:xfrm>
-            <a:off x="8503920" y="4846320"/>
-            <a:ext cx="274320" cy="274320"/>
+            <a:off x="8833104" y="4901184"/>
+            <a:ext cx="182880" cy="182880"/>
           </a:xfrm>
           <a:prstGeom prst="triangle">
             <a:avLst/>
@@ -5700,7 +5747,7 @@
                   <a:srgbClr val="707070"/>
                 </a:solidFill>
               </a:rPr>
-              <a:t>Framework from Tobias Zwingmann, The Profitable AI Advantage (Wiley, 2025). Used with attribution.</a:t>
+              <a:t>Framework from Tobias Zwingmann, The Profitable AI Advantage (Packt, 2025). Used with attribution.</a:t>
             </a:r>
             <a:endParaRPr lang="en-US" sz="1100" dirty="0"/>
           </a:p>
@@ -5993,8 +6040,8 @@
         </p:nvSpPr>
         <p:spPr>
           <a:xfrm>
-            <a:off x="8046720" y="4389120"/>
-            <a:ext cx="274320" cy="274320"/>
+            <a:off x="8503920" y="4572000"/>
+            <a:ext cx="182880" cy="182880"/>
           </a:xfrm>
           <a:prstGeom prst="triangle">
             <a:avLst/>
@@ -6013,8 +6060,8 @@
         </p:nvSpPr>
         <p:spPr>
           <a:xfrm>
-            <a:off x="8275320" y="4617720"/>
-            <a:ext cx="274320" cy="274320"/>
+            <a:off x="8668512" y="4736592"/>
+            <a:ext cx="182880" cy="182880"/>
           </a:xfrm>
           <a:prstGeom prst="triangle">
             <a:avLst/>
@@ -6033,8 +6080,8 @@
         </p:nvSpPr>
         <p:spPr>
           <a:xfrm>
-            <a:off x="8503920" y="4846320"/>
-            <a:ext cx="274320" cy="274320"/>
+            <a:off x="8833104" y="4901184"/>
+            <a:ext cx="182880" cy="182880"/>
           </a:xfrm>
           <a:prstGeom prst="triangle">
             <a:avLst/>
@@ -6815,102 +6862,32 @@
           <p:nvPr/>
         </p:nvSpPr>
         <p:spPr>
-          <a:xfrm>
-            <a:off x="-45720" y="2194560"/>
-            <a:ext cx="457200" cy="914400"/>
-          </a:xfrm>
-          <a:prstGeom prst="rect">
-            <a:avLst/>
-          </a:prstGeom>
-          <a:noFill/>
-          <a:ln/>
-        </p:spPr>
-        <p:txBody>
-          <a:bodyPr wrap="square" rtlCol="0" anchor="ctr"/>
-          <a:lstStyle/>
-          <a:p>
-            <a:pPr algn="ctr" indent="0" marL="0">
-              <a:buNone/>
-            </a:pPr>
-            <a:r>
-              <a:rPr lang="en-US" sz="1000" b="1" dirty="0">
+          <a:xfrm rot="16200000">
+            <a:off x="91440" y="2331720"/>
+            <a:ext cx="1097280" cy="457200"/>
+          </a:xfrm>
+          <a:prstGeom prst="rect">
+            <a:avLst/>
+          </a:prstGeom>
+          <a:noFill/>
+          <a:ln/>
+        </p:spPr>
+        <p:txBody>
+          <a:bodyPr wrap="square" rtlCol="0" anchor="ctr"/>
+          <a:lstStyle/>
+          <a:p>
+            <a:pPr indent="0" marL="0">
+              <a:buNone/>
+            </a:pPr>
+            <a:r>
+              <a:rPr lang="en-US" sz="1100" b="1" dirty="0">
                 <a:solidFill>
                   <a:srgbClr val="1F2120"/>
                 </a:solidFill>
               </a:rPr>
-              <a:t>Int</a:t>
-            </a:r>
-            <a:endParaRPr lang="en-US" sz="1000" dirty="0"/>
-          </a:p>
-          <a:p>
-            <a:pPr algn="ctr" indent="0" marL="0">
-              <a:buNone/>
-            </a:pPr>
-            <a:r>
-              <a:rPr lang="en-US" sz="1000" b="1" dirty="0">
-                <a:solidFill>
-                  <a:srgbClr val="1F2120"/>
-                </a:solidFill>
-              </a:rPr>
-              <a:t>e</a:t>
-            </a:r>
-            <a:endParaRPr lang="en-US" sz="1000" dirty="0"/>
-          </a:p>
-          <a:p>
-            <a:pPr algn="ctr" indent="0" marL="0">
-              <a:buNone/>
-            </a:pPr>
-            <a:r>
-              <a:rPr lang="en-US" sz="1000" b="1" dirty="0">
-                <a:solidFill>
-                  <a:srgbClr val="1F2120"/>
-                </a:solidFill>
-              </a:rPr>
-              <a:t>gr</a:t>
-            </a:r>
-            <a:endParaRPr lang="en-US" sz="1000" dirty="0"/>
-          </a:p>
-          <a:p>
-            <a:pPr algn="ctr" indent="0" marL="0">
-              <a:buNone/>
-            </a:pPr>
-            <a:r>
-              <a:rPr lang="en-US" sz="1000" b="1" dirty="0">
-                <a:solidFill>
-                  <a:srgbClr val="1F2120"/>
-                </a:solidFill>
-              </a:rPr>
-              <a:t>at</a:t>
-            </a:r>
-            <a:endParaRPr lang="en-US" sz="1000" dirty="0"/>
-          </a:p>
-          <a:p>
-            <a:pPr algn="ctr" indent="0" marL="0">
-              <a:buNone/>
-            </a:pPr>
-            <a:r>
-              <a:rPr lang="en-US" sz="1000" b="1" dirty="0">
-                <a:solidFill>
-                  <a:srgbClr val="1F2120"/>
-                </a:solidFill>
-              </a:rPr>
-              <a:t>io</a:t>
-            </a:r>
-            <a:endParaRPr lang="en-US" sz="1000" dirty="0"/>
-          </a:p>
-          <a:p>
-            <a:pPr algn="ctr" indent="0" marL="0">
-              <a:buNone/>
-            </a:pPr>
-            <a:r>
-              <a:rPr lang="en-US" sz="1000" b="1" dirty="0">
-                <a:solidFill>
-                  <a:srgbClr val="1F2120"/>
-                </a:solidFill>
-              </a:rPr>
-              <a:t>n</a:t>
-            </a:r>
-            <a:endParaRPr lang="en-US" sz="1000" dirty="0"/>
+              <a:t>Integration</a:t>
+            </a:r>
+            <a:endParaRPr lang="en-US" sz="1100" dirty="0"/>
           </a:p>
         </p:txBody>
       </p:sp>
@@ -6958,8 +6935,8 @@
         </p:nvSpPr>
         <p:spPr>
           <a:xfrm>
-            <a:off x="8046720" y="4389120"/>
-            <a:ext cx="274320" cy="274320"/>
+            <a:off x="8503920" y="4572000"/>
+            <a:ext cx="182880" cy="182880"/>
           </a:xfrm>
           <a:prstGeom prst="triangle">
             <a:avLst/>
@@ -6978,8 +6955,8 @@
         </p:nvSpPr>
         <p:spPr>
           <a:xfrm>
-            <a:off x="8275320" y="4617720"/>
-            <a:ext cx="274320" cy="274320"/>
+            <a:off x="8668512" y="4736592"/>
+            <a:ext cx="182880" cy="182880"/>
           </a:xfrm>
           <a:prstGeom prst="triangle">
             <a:avLst/>
@@ -6998,8 +6975,8 @@
         </p:nvSpPr>
         <p:spPr>
           <a:xfrm>
-            <a:off x="8503920" y="4846320"/>
-            <a:ext cx="274320" cy="274320"/>
+            <a:off x="8833104" y="4901184"/>
+            <a:ext cx="182880" cy="182880"/>
           </a:xfrm>
           <a:prstGeom prst="triangle">
             <a:avLst/>
@@ -7095,7 +7072,7 @@
                 <a:ea typeface="Arial Black" pitchFamily="34" charset="-122"/>
                 <a:cs typeface="Arial Black" pitchFamily="34" charset="-120"/>
               </a:rPr>
-              <a:t>Assistants: You Don't Need Copilot</a:t>
+              <a:t>Assistants: The Starting Point</a:t>
             </a:r>
             <a:endParaRPr lang="en-US" sz="2800" dirty="0"/>
           </a:p>
@@ -7134,7 +7111,7 @@
                 <a:ea typeface="Arial Black" pitchFamily="34" charset="-122"/>
                 <a:cs typeface="Arial Black" pitchFamily="34" charset="-120"/>
               </a:rPr>
-              <a:t>Free Options:</a:t>
+              <a:t>Examples of Assistant Tools:</a:t>
             </a:r>
             <a:endParaRPr lang="en-US" sz="1400" dirty="0"/>
           </a:p>
@@ -7190,7 +7167,7 @@
                   <a:srgbClr val="1F2120"/>
                 </a:solidFill>
               </a:rPr>
-              <a:t>ChatGPT free tier (openai.com)</a:t>
+              <a:t>ChatGPT (openai.com)</a:t>
             </a:r>
             <a:endParaRPr lang="en-US" sz="1200" dirty="0"/>
           </a:p>
@@ -7246,7 +7223,7 @@
                   <a:srgbClr val="1F2120"/>
                 </a:solidFill>
               </a:rPr>
-              <a:t>Claude free tier (claude.ai)</a:t>
+              <a:t>Claude (claude.ai)</a:t>
             </a:r>
             <a:endParaRPr lang="en-US" sz="1200" dirty="0"/>
           </a:p>
@@ -7635,8 +7612,8 @@
         </p:nvSpPr>
         <p:spPr>
           <a:xfrm>
-            <a:off x="8046720" y="4389120"/>
-            <a:ext cx="274320" cy="274320"/>
+            <a:off x="8503920" y="4572000"/>
+            <a:ext cx="182880" cy="182880"/>
           </a:xfrm>
           <a:prstGeom prst="triangle">
             <a:avLst/>
@@ -7655,8 +7632,8 @@
         </p:nvSpPr>
         <p:spPr>
           <a:xfrm>
-            <a:off x="8275320" y="4617720"/>
-            <a:ext cx="274320" cy="274320"/>
+            <a:off x="8668512" y="4736592"/>
+            <a:ext cx="182880" cy="182880"/>
           </a:xfrm>
           <a:prstGeom prst="triangle">
             <a:avLst/>
@@ -7675,8 +7652,8 @@
         </p:nvSpPr>
         <p:spPr>
           <a:xfrm>
-            <a:off x="8503920" y="4846320"/>
-            <a:ext cx="274320" cy="274320"/>
+            <a:off x="8833104" y="4901184"/>
+            <a:ext cx="182880" cy="182880"/>
           </a:xfrm>
           <a:prstGeom prst="triangle">
             <a:avLst/>
@@ -8196,8 +8173,8 @@
         </p:nvSpPr>
         <p:spPr>
           <a:xfrm>
-            <a:off x="8046720" y="4389120"/>
-            <a:ext cx="274320" cy="274320"/>
+            <a:off x="8503920" y="4572000"/>
+            <a:ext cx="182880" cy="182880"/>
           </a:xfrm>
           <a:prstGeom prst="triangle">
             <a:avLst/>
@@ -8216,8 +8193,8 @@
         </p:nvSpPr>
         <p:spPr>
           <a:xfrm>
-            <a:off x="8275320" y="4617720"/>
-            <a:ext cx="274320" cy="274320"/>
+            <a:off x="8668512" y="4736592"/>
+            <a:ext cx="182880" cy="182880"/>
           </a:xfrm>
           <a:prstGeom prst="triangle">
             <a:avLst/>
@@ -8236,8 +8213,8 @@
         </p:nvSpPr>
         <p:spPr>
           <a:xfrm>
-            <a:off x="8503920" y="4846320"/>
-            <a:ext cx="274320" cy="274320"/>
+            <a:off x="8833104" y="4901184"/>
+            <a:ext cx="182880" cy="182880"/>
           </a:xfrm>
           <a:prstGeom prst="triangle">
             <a:avLst/>
@@ -8832,7 +8809,7 @@
                   <a:srgbClr val="1F2120"/>
                 </a:solidFill>
               </a:rPr>
-              <a:t>Start small, measure, scale → Try one task with free tools first.</a:t>
+              <a:t>Start small, measure, scale → Try one task. Start with what your org approves.</a:t>
             </a:r>
             <a:endParaRPr lang="en-US" sz="1100" dirty="0"/>
           </a:p>
@@ -8846,8 +8823,8 @@
         </p:nvSpPr>
         <p:spPr>
           <a:xfrm>
-            <a:off x="8046720" y="4389120"/>
-            <a:ext cx="274320" cy="274320"/>
+            <a:off x="8503920" y="4572000"/>
+            <a:ext cx="182880" cy="182880"/>
           </a:xfrm>
           <a:prstGeom prst="triangle">
             <a:avLst/>
@@ -8866,8 +8843,8 @@
         </p:nvSpPr>
         <p:spPr>
           <a:xfrm>
-            <a:off x="8275320" y="4617720"/>
-            <a:ext cx="274320" cy="274320"/>
+            <a:off x="8668512" y="4736592"/>
+            <a:ext cx="182880" cy="182880"/>
           </a:xfrm>
           <a:prstGeom prst="triangle">
             <a:avLst/>
@@ -8886,8 +8863,8 @@
         </p:nvSpPr>
         <p:spPr>
           <a:xfrm>
-            <a:off x="8503920" y="4846320"/>
-            <a:ext cx="274320" cy="274320"/>
+            <a:off x="8833104" y="4901184"/>
+            <a:ext cx="182880" cy="182880"/>
           </a:xfrm>
           <a:prstGeom prst="triangle">
             <a:avLst/>
@@ -10219,8 +10196,8 @@
         </p:nvSpPr>
         <p:spPr>
           <a:xfrm>
-            <a:off x="8046720" y="4389120"/>
-            <a:ext cx="274320" cy="274320"/>
+            <a:off x="8503920" y="4572000"/>
+            <a:ext cx="182880" cy="182880"/>
           </a:xfrm>
           <a:prstGeom prst="triangle">
             <a:avLst/>
@@ -10239,8 +10216,8 @@
         </p:nvSpPr>
         <p:spPr>
           <a:xfrm>
-            <a:off x="8275320" y="4617720"/>
-            <a:ext cx="274320" cy="274320"/>
+            <a:off x="8668512" y="4736592"/>
+            <a:ext cx="182880" cy="182880"/>
           </a:xfrm>
           <a:prstGeom prst="triangle">
             <a:avLst/>
@@ -10259,8 +10236,8 @@
         </p:nvSpPr>
         <p:spPr>
           <a:xfrm>
-            <a:off x="8503920" y="4846320"/>
-            <a:ext cx="274320" cy="274320"/>
+            <a:off x="8833104" y="4901184"/>
+            <a:ext cx="182880" cy="182880"/>
           </a:xfrm>
           <a:prstGeom prst="triangle">
             <a:avLst/>
@@ -10503,7 +10480,7 @@
                   <a:srgbClr val="1F2120"/>
                 </a:solidFill>
               </a:rPr>
-              <a:t>"I don't know which tool to pick." → Start with ChatGPT or Claude free. See if it works. You can always upgrade later.</a:t>
+              <a:t>"I don't know which tool to pick." → Start with whatever AI tool your organization has approved. If unsure, ask your IT team.</a:t>
             </a:r>
             <a:endParaRPr lang="en-US" sz="1000" dirty="0"/>
           </a:p>
@@ -10553,8 +10530,8 @@
         </p:nvSpPr>
         <p:spPr>
           <a:xfrm>
-            <a:off x="8046720" y="4389120"/>
-            <a:ext cx="274320" cy="274320"/>
+            <a:off x="8503920" y="4572000"/>
+            <a:ext cx="182880" cy="182880"/>
           </a:xfrm>
           <a:prstGeom prst="triangle">
             <a:avLst/>
@@ -10573,8 +10550,8 @@
         </p:nvSpPr>
         <p:spPr>
           <a:xfrm>
-            <a:off x="8275320" y="4617720"/>
-            <a:ext cx="274320" cy="274320"/>
+            <a:off x="8668512" y="4736592"/>
+            <a:ext cx="182880" cy="182880"/>
           </a:xfrm>
           <a:prstGeom prst="triangle">
             <a:avLst/>
@@ -10593,8 +10570,8 @@
         </p:nvSpPr>
         <p:spPr>
           <a:xfrm>
-            <a:off x="8503920" y="4846320"/>
-            <a:ext cx="274320" cy="274320"/>
+            <a:off x="8833104" y="4901184"/>
+            <a:ext cx="182880" cy="182880"/>
           </a:xfrm>
           <a:prstGeom prst="triangle">
             <a:avLst/>
@@ -10616,6 +10593,509 @@
 <file path=ppt/slides/slide22.xml><?xml version="1.0" encoding="utf-8"?>
 <p:sld xmlns:a="http://schemas.openxmlformats.org/drawingml/2006/main" xmlns:r="http://schemas.openxmlformats.org/officeDocument/2006/relationships" xmlns:p="http://schemas.openxmlformats.org/presentationml/2006/main">
   <p:cSld name="Slide 22">
+    <p:bg>
+      <p:bgPr>
+        <a:solidFill>
+          <a:srgbClr val="EEECE1"/>
+        </a:solidFill>
+      </p:bgPr>
+    </p:bg>
+    <p:spTree>
+      <p:nvGrpSpPr>
+        <p:cNvPr id="1" name=""/>
+        <p:cNvGrpSpPr/>
+        <p:nvPr/>
+      </p:nvGrpSpPr>
+      <p:grpSpPr>
+        <a:xfrm>
+          <a:off x="0" y="0"/>
+          <a:ext cx="0" cy="0"/>
+          <a:chOff x="0" y="0"/>
+          <a:chExt cx="0" cy="0"/>
+        </a:xfrm>
+      </p:grpSpPr>
+      <p:sp>
+        <p:nvSpPr>
+          <p:cNvPr id="2" name="Shape 0"/>
+          <p:cNvSpPr/>
+          <p:nvPr/>
+        </p:nvSpPr>
+        <p:spPr>
+          <a:xfrm>
+            <a:off x="0" y="0"/>
+            <a:ext cx="9144000" cy="685800"/>
+          </a:xfrm>
+          <a:prstGeom prst="rect">
+            <a:avLst/>
+          </a:prstGeom>
+          <a:solidFill>
+            <a:srgbClr val="CF3338"/>
+          </a:solidFill>
+          <a:ln/>
+        </p:spPr>
+      </p:sp>
+      <p:sp>
+        <p:nvSpPr>
+          <p:cNvPr id="3" name="Text 1"/>
+          <p:cNvSpPr/>
+          <p:nvPr/>
+        </p:nvSpPr>
+        <p:spPr>
+          <a:xfrm>
+            <a:off x="457200" y="109728"/>
+            <a:ext cx="8229600" cy="457200"/>
+          </a:xfrm>
+          <a:prstGeom prst="rect">
+            <a:avLst/>
+          </a:prstGeom>
+          <a:noFill/>
+          <a:ln/>
+        </p:spPr>
+        <p:txBody>
+          <a:bodyPr wrap="square" rtlCol="0" anchor="ctr"/>
+          <a:lstStyle/>
+          <a:p>
+            <a:pPr indent="0" marL="0">
+              <a:buNone/>
+            </a:pPr>
+            <a:r>
+              <a:rPr lang="en-US" sz="2800" b="1" dirty="0">
+                <a:solidFill>
+                  <a:srgbClr val="FFFFFF"/>
+                </a:solidFill>
+                <a:latin typeface="Arial Black" pitchFamily="34" charset="0"/>
+                <a:ea typeface="Arial Black" pitchFamily="34" charset="-122"/>
+                <a:cs typeface="Arial Black" pitchFamily="34" charset="-120"/>
+              </a:rPr>
+              <a:t>Don't Have a Work Example?</a:t>
+            </a:r>
+            <a:endParaRPr lang="en-US" sz="2800" dirty="0"/>
+          </a:p>
+        </p:txBody>
+      </p:sp>
+      <p:sp>
+        <p:nvSpPr>
+          <p:cNvPr id="4" name="Text 2"/>
+          <p:cNvSpPr/>
+          <p:nvPr/>
+        </p:nvSpPr>
+        <p:spPr>
+          <a:xfrm>
+            <a:off x="457200" y="960120"/>
+            <a:ext cx="8229600" cy="274320"/>
+          </a:xfrm>
+          <a:prstGeom prst="rect">
+            <a:avLst/>
+          </a:prstGeom>
+          <a:noFill/>
+          <a:ln/>
+        </p:spPr>
+        <p:txBody>
+          <a:bodyPr wrap="square" rtlCol="0" anchor="ctr"/>
+          <a:lstStyle/>
+          <a:p>
+            <a:pPr indent="0" marL="0">
+              <a:buNone/>
+            </a:pPr>
+            <a:r>
+              <a:rPr lang="en-US" sz="1200" dirty="0">
+                <a:solidFill>
+                  <a:srgbClr val="1F2120"/>
+                </a:solidFill>
+              </a:rPr>
+              <a:t>No problem. Try one of these instead:</a:t>
+            </a:r>
+            <a:endParaRPr lang="en-US" sz="1200" dirty="0"/>
+          </a:p>
+        </p:txBody>
+      </p:sp>
+      <p:sp>
+        <p:nvSpPr>
+          <p:cNvPr id="5" name="Shape 3"/>
+          <p:cNvSpPr/>
+          <p:nvPr/>
+        </p:nvSpPr>
+        <p:spPr>
+          <a:xfrm>
+            <a:off x="640080" y="1444752"/>
+            <a:ext cx="91440" cy="91440"/>
+          </a:xfrm>
+          <a:prstGeom prst="ellipse">
+            <a:avLst/>
+          </a:prstGeom>
+          <a:solidFill>
+            <a:srgbClr val="CF3338"/>
+          </a:solidFill>
+          <a:ln/>
+        </p:spPr>
+      </p:sp>
+      <p:sp>
+        <p:nvSpPr>
+          <p:cNvPr id="6" name="Text 4"/>
+          <p:cNvSpPr/>
+          <p:nvPr/>
+        </p:nvSpPr>
+        <p:spPr>
+          <a:xfrm>
+            <a:off x="1005840" y="1371600"/>
+            <a:ext cx="7680960" cy="320040"/>
+          </a:xfrm>
+          <a:prstGeom prst="rect">
+            <a:avLst/>
+          </a:prstGeom>
+          <a:noFill/>
+          <a:ln/>
+        </p:spPr>
+        <p:txBody>
+          <a:bodyPr wrap="square" rtlCol="0" anchor="ctr"/>
+          <a:lstStyle/>
+          <a:p>
+            <a:pPr indent="0" marL="0">
+              <a:buNone/>
+            </a:pPr>
+            <a:r>
+              <a:rPr lang="en-US" sz="1100" dirty="0">
+                <a:solidFill>
+                  <a:srgbClr val="1F2120"/>
+                </a:solidFill>
+              </a:rPr>
+              <a:t>Use a personal workflow: planning a trip, organizing finances, job searching</a:t>
+            </a:r>
+            <a:endParaRPr lang="en-US" sz="1100" dirty="0"/>
+          </a:p>
+        </p:txBody>
+      </p:sp>
+      <p:sp>
+        <p:nvSpPr>
+          <p:cNvPr id="7" name="Shape 5"/>
+          <p:cNvSpPr/>
+          <p:nvPr/>
+        </p:nvSpPr>
+        <p:spPr>
+          <a:xfrm>
+            <a:off x="640080" y="1856232"/>
+            <a:ext cx="91440" cy="91440"/>
+          </a:xfrm>
+          <a:prstGeom prst="ellipse">
+            <a:avLst/>
+          </a:prstGeom>
+          <a:solidFill>
+            <a:srgbClr val="CF3338"/>
+          </a:solidFill>
+          <a:ln/>
+        </p:spPr>
+      </p:sp>
+      <p:sp>
+        <p:nvSpPr>
+          <p:cNvPr id="8" name="Text 6"/>
+          <p:cNvSpPr/>
+          <p:nvPr/>
+        </p:nvSpPr>
+        <p:spPr>
+          <a:xfrm>
+            <a:off x="1005840" y="1783080"/>
+            <a:ext cx="7680960" cy="320040"/>
+          </a:xfrm>
+          <a:prstGeom prst="rect">
+            <a:avLst/>
+          </a:prstGeom>
+          <a:noFill/>
+          <a:ln/>
+        </p:spPr>
+        <p:txBody>
+          <a:bodyPr wrap="square" rtlCol="0" anchor="ctr"/>
+          <a:lstStyle/>
+          <a:p>
+            <a:pPr indent="0" marL="0">
+              <a:buNone/>
+            </a:pPr>
+            <a:r>
+              <a:rPr lang="en-US" sz="1100" dirty="0">
+                <a:solidFill>
+                  <a:srgbClr val="1F2120"/>
+                </a:solidFill>
+              </a:rPr>
+              <a:t>Try a sample scenario: Monthly budget report for a 50-person marketing team</a:t>
+            </a:r>
+            <a:endParaRPr lang="en-US" sz="1100" dirty="0"/>
+          </a:p>
+        </p:txBody>
+      </p:sp>
+      <p:sp>
+        <p:nvSpPr>
+          <p:cNvPr id="9" name="Shape 7"/>
+          <p:cNvSpPr/>
+          <p:nvPr/>
+        </p:nvSpPr>
+        <p:spPr>
+          <a:xfrm>
+            <a:off x="640080" y="2267712"/>
+            <a:ext cx="91440" cy="91440"/>
+          </a:xfrm>
+          <a:prstGeom prst="ellipse">
+            <a:avLst/>
+          </a:prstGeom>
+          <a:solidFill>
+            <a:srgbClr val="CF3338"/>
+          </a:solidFill>
+          <a:ln/>
+        </p:spPr>
+      </p:sp>
+      <p:sp>
+        <p:nvSpPr>
+          <p:cNvPr id="10" name="Text 8"/>
+          <p:cNvSpPr/>
+          <p:nvPr/>
+        </p:nvSpPr>
+        <p:spPr>
+          <a:xfrm>
+            <a:off x="1005840" y="2194560"/>
+            <a:ext cx="7680960" cy="320040"/>
+          </a:xfrm>
+          <a:prstGeom prst="rect">
+            <a:avLst/>
+          </a:prstGeom>
+          <a:noFill/>
+          <a:ln/>
+        </p:spPr>
+        <p:txBody>
+          <a:bodyPr wrap="square" rtlCol="0" anchor="ctr"/>
+          <a:lstStyle/>
+          <a:p>
+            <a:pPr indent="0" marL="0">
+              <a:buNone/>
+            </a:pPr>
+            <a:r>
+              <a:rPr lang="en-US" sz="1100" dirty="0">
+                <a:solidFill>
+                  <a:srgbClr val="1F2120"/>
+                </a:solidFill>
+              </a:rPr>
+              <a:t>Try a sample scenario: Weekly client status emails across 12 accounts</a:t>
+            </a:r>
+            <a:endParaRPr lang="en-US" sz="1100" dirty="0"/>
+          </a:p>
+        </p:txBody>
+      </p:sp>
+      <p:sp>
+        <p:nvSpPr>
+          <p:cNvPr id="11" name="Shape 9"/>
+          <p:cNvSpPr/>
+          <p:nvPr/>
+        </p:nvSpPr>
+        <p:spPr>
+          <a:xfrm>
+            <a:off x="640080" y="2679192"/>
+            <a:ext cx="91440" cy="91440"/>
+          </a:xfrm>
+          <a:prstGeom prst="ellipse">
+            <a:avLst/>
+          </a:prstGeom>
+          <a:solidFill>
+            <a:srgbClr val="CF3338"/>
+          </a:solidFill>
+          <a:ln/>
+        </p:spPr>
+      </p:sp>
+      <p:sp>
+        <p:nvSpPr>
+          <p:cNvPr id="12" name="Text 10"/>
+          <p:cNvSpPr/>
+          <p:nvPr/>
+        </p:nvSpPr>
+        <p:spPr>
+          <a:xfrm>
+            <a:off x="1005840" y="2606040"/>
+            <a:ext cx="7680960" cy="320040"/>
+          </a:xfrm>
+          <a:prstGeom prst="rect">
+            <a:avLst/>
+          </a:prstGeom>
+          <a:noFill/>
+          <a:ln/>
+        </p:spPr>
+        <p:txBody>
+          <a:bodyPr wrap="square" rtlCol="0" anchor="ctr"/>
+          <a:lstStyle/>
+          <a:p>
+            <a:pPr indent="0" marL="0">
+              <a:buNone/>
+            </a:pPr>
+            <a:r>
+              <a:rPr lang="en-US" sz="1100" dirty="0">
+                <a:solidFill>
+                  <a:srgbClr val="1F2120"/>
+                </a:solidFill>
+              </a:rPr>
+              <a:t>Try a sample scenario: Quarterly compliance documentation review</a:t>
+            </a:r>
+            <a:endParaRPr lang="en-US" sz="1100" dirty="0"/>
+          </a:p>
+        </p:txBody>
+      </p:sp>
+      <p:sp>
+        <p:nvSpPr>
+          <p:cNvPr id="13" name="Shape 11"/>
+          <p:cNvSpPr/>
+          <p:nvPr/>
+        </p:nvSpPr>
+        <p:spPr>
+          <a:xfrm>
+            <a:off x="640080" y="3090672"/>
+            <a:ext cx="91440" cy="91440"/>
+          </a:xfrm>
+          <a:prstGeom prst="ellipse">
+            <a:avLst/>
+          </a:prstGeom>
+          <a:solidFill>
+            <a:srgbClr val="CF3338"/>
+          </a:solidFill>
+          <a:ln/>
+        </p:spPr>
+      </p:sp>
+      <p:sp>
+        <p:nvSpPr>
+          <p:cNvPr id="14" name="Text 12"/>
+          <p:cNvSpPr/>
+          <p:nvPr/>
+        </p:nvSpPr>
+        <p:spPr>
+          <a:xfrm>
+            <a:off x="1005840" y="3017520"/>
+            <a:ext cx="7680960" cy="320040"/>
+          </a:xfrm>
+          <a:prstGeom prst="rect">
+            <a:avLst/>
+          </a:prstGeom>
+          <a:noFill/>
+          <a:ln/>
+        </p:spPr>
+        <p:txBody>
+          <a:bodyPr wrap="square" rtlCol="0" anchor="ctr"/>
+          <a:lstStyle/>
+          <a:p>
+            <a:pPr indent="0" marL="0">
+              <a:buNone/>
+            </a:pPr>
+            <a:r>
+              <a:rPr lang="en-US" sz="1100" dirty="0">
+                <a:solidFill>
+                  <a:srgbClr val="1F2120"/>
+                </a:solidFill>
+              </a:rPr>
+              <a:t>Pair with someone who has a work example and observe their process</a:t>
+            </a:r>
+            <a:endParaRPr lang="en-US" sz="1100" dirty="0"/>
+          </a:p>
+        </p:txBody>
+      </p:sp>
+      <p:sp>
+        <p:nvSpPr>
+          <p:cNvPr id="15" name="Text 13"/>
+          <p:cNvSpPr/>
+          <p:nvPr/>
+        </p:nvSpPr>
+        <p:spPr>
+          <a:xfrm>
+            <a:off x="457200" y="4480560"/>
+            <a:ext cx="8229600" cy="457200"/>
+          </a:xfrm>
+          <a:prstGeom prst="rect">
+            <a:avLst/>
+          </a:prstGeom>
+          <a:noFill/>
+          <a:ln/>
+        </p:spPr>
+        <p:txBody>
+          <a:bodyPr wrap="square" rtlCol="0" anchor="ctr"/>
+          <a:lstStyle/>
+          <a:p>
+            <a:pPr algn="ctr" indent="0" marL="0">
+              <a:buNone/>
+            </a:pPr>
+            <a:r>
+              <a:rPr lang="en-US" sz="1000" i="1" dirty="0">
+                <a:solidFill>
+                  <a:srgbClr val="707070"/>
+                </a:solidFill>
+              </a:rPr>
+              <a:t>The frameworks work the same way regardless of the example — pick what's comfortable for you.</a:t>
+            </a:r>
+            <a:endParaRPr lang="en-US" sz="1000" dirty="0"/>
+          </a:p>
+        </p:txBody>
+      </p:sp>
+      <p:sp>
+        <p:nvSpPr>
+          <p:cNvPr id="16" name="Shape 14"/>
+          <p:cNvSpPr/>
+          <p:nvPr/>
+        </p:nvSpPr>
+        <p:spPr>
+          <a:xfrm>
+            <a:off x="8503920" y="4572000"/>
+            <a:ext cx="182880" cy="182880"/>
+          </a:xfrm>
+          <a:prstGeom prst="triangle">
+            <a:avLst/>
+          </a:prstGeom>
+          <a:solidFill>
+            <a:srgbClr val="CF3338"/>
+          </a:solidFill>
+          <a:ln/>
+        </p:spPr>
+      </p:sp>
+      <p:sp>
+        <p:nvSpPr>
+          <p:cNvPr id="17" name="Shape 15"/>
+          <p:cNvSpPr/>
+          <p:nvPr/>
+        </p:nvSpPr>
+        <p:spPr>
+          <a:xfrm>
+            <a:off x="8668512" y="4736592"/>
+            <a:ext cx="182880" cy="182880"/>
+          </a:xfrm>
+          <a:prstGeom prst="triangle">
+            <a:avLst/>
+          </a:prstGeom>
+          <a:solidFill>
+            <a:srgbClr val="CF3338"/>
+          </a:solidFill>
+          <a:ln/>
+        </p:spPr>
+      </p:sp>
+      <p:sp>
+        <p:nvSpPr>
+          <p:cNvPr id="18" name="Shape 16"/>
+          <p:cNvSpPr/>
+          <p:nvPr/>
+        </p:nvSpPr>
+        <p:spPr>
+          <a:xfrm>
+            <a:off x="8833104" y="4901184"/>
+            <a:ext cx="182880" cy="182880"/>
+          </a:xfrm>
+          <a:prstGeom prst="triangle">
+            <a:avLst/>
+          </a:prstGeom>
+          <a:solidFill>
+            <a:srgbClr val="CF3338"/>
+          </a:solidFill>
+          <a:ln/>
+        </p:spPr>
+      </p:sp>
+    </p:spTree>
+  </p:cSld>
+  <p:clrMapOvr>
+    <a:masterClrMapping/>
+  </p:clrMapOvr>
+</p:sld>
+</file>
+
+<file path=ppt/slides/slide23.xml><?xml version="1.0" encoding="utf-8"?>
+<p:sld xmlns:a="http://schemas.openxmlformats.org/drawingml/2006/main" xmlns:r="http://schemas.openxmlformats.org/officeDocument/2006/relationships" xmlns:p="http://schemas.openxmlformats.org/presentationml/2006/main">
+  <p:cSld name="Slide 23">
     <p:bg>
       <p:bgPr>
         <a:solidFill>
@@ -10684,9 +11164,9 @@
 </p:sld>
 </file>
 
-<file path=ppt/slides/slide23.xml><?xml version="1.0" encoding="utf-8"?>
+<file path=ppt/slides/slide24.xml><?xml version="1.0" encoding="utf-8"?>
 <p:sld xmlns:a="http://schemas.openxmlformats.org/drawingml/2006/main" xmlns:r="http://schemas.openxmlformats.org/officeDocument/2006/relationships" xmlns:p="http://schemas.openxmlformats.org/presentationml/2006/main">
-  <p:cSld name="Slide 23">
+  <p:cSld name="Slide 24">
     <p:bg>
       <p:bgPr>
         <a:solidFill>
@@ -11063,8 +11543,8 @@
         </p:nvSpPr>
         <p:spPr>
           <a:xfrm>
-            <a:off x="8046720" y="4389120"/>
-            <a:ext cx="274320" cy="274320"/>
+            <a:off x="8503920" y="4572000"/>
+            <a:ext cx="182880" cy="182880"/>
           </a:xfrm>
           <a:prstGeom prst="triangle">
             <a:avLst/>
@@ -11083,8 +11563,8 @@
         </p:nvSpPr>
         <p:spPr>
           <a:xfrm>
-            <a:off x="8275320" y="4617720"/>
-            <a:ext cx="274320" cy="274320"/>
+            <a:off x="8668512" y="4736592"/>
+            <a:ext cx="182880" cy="182880"/>
           </a:xfrm>
           <a:prstGeom prst="triangle">
             <a:avLst/>
@@ -11103,8 +11583,8 @@
         </p:nvSpPr>
         <p:spPr>
           <a:xfrm>
-            <a:off x="8503920" y="4846320"/>
-            <a:ext cx="274320" cy="274320"/>
+            <a:off x="8833104" y="4901184"/>
+            <a:ext cx="182880" cy="182880"/>
           </a:xfrm>
           <a:prstGeom prst="triangle">
             <a:avLst/>
@@ -11123,9 +11603,9 @@
 </p:sld>
 </file>
 
-<file path=ppt/slides/slide24.xml><?xml version="1.0" encoding="utf-8"?>
+<file path=ppt/slides/slide25.xml><?xml version="1.0" encoding="utf-8"?>
 <p:sld xmlns:a="http://schemas.openxmlformats.org/drawingml/2006/main" xmlns:r="http://schemas.openxmlformats.org/officeDocument/2006/relationships" xmlns:p="http://schemas.openxmlformats.org/presentationml/2006/main">
-  <p:cSld name="Slide 24">
+  <p:cSld name="Slide 25">
     <p:bg>
       <p:bgPr>
         <a:solidFill>
@@ -11185,439 +11665,6 @@
             <a:endParaRPr lang="en-US" sz="4000" dirty="0"/>
           </a:p>
         </p:txBody>
-      </p:sp>
-    </p:spTree>
-  </p:cSld>
-  <p:clrMapOvr>
-    <a:masterClrMapping/>
-  </p:clrMapOvr>
-</p:sld>
-</file>
-
-<file path=ppt/slides/slide25.xml><?xml version="1.0" encoding="utf-8"?>
-<p:sld xmlns:a="http://schemas.openxmlformats.org/drawingml/2006/main" xmlns:r="http://schemas.openxmlformats.org/officeDocument/2006/relationships" xmlns:p="http://schemas.openxmlformats.org/presentationml/2006/main">
-  <p:cSld name="Slide 25">
-    <p:bg>
-      <p:bgPr>
-        <a:solidFill>
-          <a:srgbClr val="EEECE1"/>
-        </a:solidFill>
-      </p:bgPr>
-    </p:bg>
-    <p:spTree>
-      <p:nvGrpSpPr>
-        <p:cNvPr id="1" name=""/>
-        <p:cNvGrpSpPr/>
-        <p:nvPr/>
-      </p:nvGrpSpPr>
-      <p:grpSpPr>
-        <a:xfrm>
-          <a:off x="0" y="0"/>
-          <a:ext cx="0" cy="0"/>
-          <a:chOff x="0" y="0"/>
-          <a:chExt cx="0" cy="0"/>
-        </a:xfrm>
-      </p:grpSpPr>
-      <p:sp>
-        <p:nvSpPr>
-          <p:cNvPr id="2" name="Shape 0"/>
-          <p:cNvSpPr/>
-          <p:nvPr/>
-        </p:nvSpPr>
-        <p:spPr>
-          <a:xfrm>
-            <a:off x="0" y="0"/>
-            <a:ext cx="9144000" cy="685800"/>
-          </a:xfrm>
-          <a:prstGeom prst="rect">
-            <a:avLst/>
-          </a:prstGeom>
-          <a:solidFill>
-            <a:srgbClr val="CF3338"/>
-          </a:solidFill>
-          <a:ln/>
-        </p:spPr>
-      </p:sp>
-      <p:sp>
-        <p:nvSpPr>
-          <p:cNvPr id="3" name="Text 1"/>
-          <p:cNvSpPr/>
-          <p:nvPr/>
-        </p:nvSpPr>
-        <p:spPr>
-          <a:xfrm>
-            <a:off x="457200" y="109728"/>
-            <a:ext cx="8229600" cy="457200"/>
-          </a:xfrm>
-          <a:prstGeom prst="rect">
-            <a:avLst/>
-          </a:prstGeom>
-          <a:noFill/>
-          <a:ln/>
-        </p:spPr>
-        <p:txBody>
-          <a:bodyPr wrap="square" rtlCol="0" anchor="ctr"/>
-          <a:lstStyle/>
-          <a:p>
-            <a:pPr indent="0" marL="0">
-              <a:buNone/>
-            </a:pPr>
-            <a:r>
-              <a:rPr lang="en-US" sz="2800" b="1" dirty="0">
-                <a:solidFill>
-                  <a:srgbClr val="FFFFFF"/>
-                </a:solidFill>
-                <a:latin typeface="Arial Black" pitchFamily="34" charset="0"/>
-                <a:ea typeface="Arial Black" pitchFamily="34" charset="-122"/>
-                <a:cs typeface="Arial Black" pitchFamily="34" charset="-120"/>
-              </a:rPr>
-              <a:t>Value Threshold Calculator</a:t>
-            </a:r>
-            <a:endParaRPr lang="en-US" sz="2800" dirty="0"/>
-          </a:p>
-        </p:txBody>
-      </p:sp>
-      <p:sp>
-        <p:nvSpPr>
-          <p:cNvPr id="4" name="Text 2"/>
-          <p:cNvSpPr/>
-          <p:nvPr/>
-        </p:nvSpPr>
-        <p:spPr>
-          <a:xfrm>
-            <a:off x="457200" y="960120"/>
-            <a:ext cx="8229600" cy="274320"/>
-          </a:xfrm>
-          <a:prstGeom prst="rect">
-            <a:avLst/>
-          </a:prstGeom>
-          <a:noFill/>
-          <a:ln/>
-        </p:spPr>
-        <p:txBody>
-          <a:bodyPr wrap="square" rtlCol="0" anchor="ctr"/>
-          <a:lstStyle/>
-          <a:p>
-            <a:pPr indent="0" marL="0">
-              <a:buNone/>
-            </a:pPr>
-            <a:r>
-              <a:rPr lang="en-US" sz="1200" b="1" dirty="0">
-                <a:solidFill>
-                  <a:srgbClr val="CF3338"/>
-                </a:solidFill>
-                <a:latin typeface="Arial Black" pitchFamily="34" charset="0"/>
-                <a:ea typeface="Arial Black" pitchFamily="34" charset="-122"/>
-                <a:cs typeface="Arial Black" pitchFamily="34" charset="-120"/>
-              </a:rPr>
-              <a:t>The simple formula:</a:t>
-            </a:r>
-            <a:endParaRPr lang="en-US" sz="1200" dirty="0"/>
-          </a:p>
-        </p:txBody>
-      </p:sp>
-      <p:sp>
-        <p:nvSpPr>
-          <p:cNvPr id="5" name="Shape 3"/>
-          <p:cNvSpPr/>
-          <p:nvPr/>
-        </p:nvSpPr>
-        <p:spPr>
-          <a:xfrm>
-            <a:off x="1371600" y="1325880"/>
-            <a:ext cx="6400800" cy="868680"/>
-          </a:xfrm>
-          <a:prstGeom prst="rect">
-            <a:avLst/>
-          </a:prstGeom>
-          <a:solidFill>
-            <a:srgbClr val="CF3338"/>
-          </a:solidFill>
-          <a:ln/>
-        </p:spPr>
-      </p:sp>
-      <p:sp>
-        <p:nvSpPr>
-          <p:cNvPr id="6" name="Text 4"/>
-          <p:cNvSpPr/>
-          <p:nvPr/>
-        </p:nvSpPr>
-        <p:spPr>
-          <a:xfrm>
-            <a:off x="1554480" y="1463040"/>
-            <a:ext cx="6035040" cy="594360"/>
-          </a:xfrm>
-          <a:prstGeom prst="rect">
-            <a:avLst/>
-          </a:prstGeom>
-          <a:noFill/>
-          <a:ln/>
-        </p:spPr>
-        <p:txBody>
-          <a:bodyPr wrap="square" rtlCol="0" anchor="ctr"/>
-          <a:lstStyle/>
-          <a:p>
-            <a:pPr algn="ctr" indent="0" marL="0">
-              <a:buNone/>
-            </a:pPr>
-            <a:r>
-              <a:rPr lang="en-US" sz="1300" b="1" dirty="0">
-                <a:solidFill>
-                  <a:srgbClr val="FFFFFF"/>
-                </a:solidFill>
-              </a:rPr>
-              <a:t>(Time saved per task × Times per year) × Your hourly rate = Annual value</a:t>
-            </a:r>
-            <a:endParaRPr lang="en-US" sz="1300" dirty="0"/>
-          </a:p>
-        </p:txBody>
-      </p:sp>
-      <p:sp>
-        <p:nvSpPr>
-          <p:cNvPr id="7" name="Text 5"/>
-          <p:cNvSpPr/>
-          <p:nvPr/>
-        </p:nvSpPr>
-        <p:spPr>
-          <a:xfrm>
-            <a:off x="457200" y="2423160"/>
-            <a:ext cx="8229600" cy="274320"/>
-          </a:xfrm>
-          <a:prstGeom prst="rect">
-            <a:avLst/>
-          </a:prstGeom>
-          <a:noFill/>
-          <a:ln/>
-        </p:spPr>
-        <p:txBody>
-          <a:bodyPr wrap="square" rtlCol="0" anchor="ctr"/>
-          <a:lstStyle/>
-          <a:p>
-            <a:pPr indent="0" marL="0">
-              <a:buNone/>
-            </a:pPr>
-            <a:r>
-              <a:rPr lang="en-US" sz="1200" b="1" dirty="0">
-                <a:solidFill>
-                  <a:srgbClr val="CF3338"/>
-                </a:solidFill>
-                <a:latin typeface="Arial Black" pitchFamily="34" charset="0"/>
-                <a:ea typeface="Arial Black" pitchFamily="34" charset="-122"/>
-                <a:cs typeface="Arial Black" pitchFamily="34" charset="-120"/>
-              </a:rPr>
-              <a:t>Example:</a:t>
-            </a:r>
-            <a:endParaRPr lang="en-US" sz="1200" dirty="0"/>
-          </a:p>
-        </p:txBody>
-      </p:sp>
-      <p:sp>
-        <p:nvSpPr>
-          <p:cNvPr id="8" name="Shape 6"/>
-          <p:cNvSpPr/>
-          <p:nvPr/>
-        </p:nvSpPr>
-        <p:spPr>
-          <a:xfrm>
-            <a:off x="640080" y="2816352"/>
-            <a:ext cx="91440" cy="91440"/>
-          </a:xfrm>
-          <a:prstGeom prst="ellipse">
-            <a:avLst/>
-          </a:prstGeom>
-          <a:solidFill>
-            <a:srgbClr val="CF3338"/>
-          </a:solidFill>
-          <a:ln/>
-        </p:spPr>
-      </p:sp>
-      <p:sp>
-        <p:nvSpPr>
-          <p:cNvPr id="9" name="Text 7"/>
-          <p:cNvSpPr/>
-          <p:nvPr/>
-        </p:nvSpPr>
-        <p:spPr>
-          <a:xfrm>
-            <a:off x="1005840" y="2743200"/>
-            <a:ext cx="7680960" cy="274320"/>
-          </a:xfrm>
-          <a:prstGeom prst="rect">
-            <a:avLst/>
-          </a:prstGeom>
-          <a:noFill/>
-          <a:ln/>
-        </p:spPr>
-        <p:txBody>
-          <a:bodyPr wrap="square" rtlCol="0" anchor="ctr"/>
-          <a:lstStyle/>
-          <a:p>
-            <a:pPr indent="0" marL="0">
-              <a:buNone/>
-            </a:pPr>
-            <a:r>
-              <a:rPr lang="en-US" sz="1200" dirty="0">
-                <a:solidFill>
-                  <a:srgbClr val="1F2120"/>
-                </a:solidFill>
-              </a:rPr>
-              <a:t>30 minutes saved per task × 50 times per year = 25 hours saved</a:t>
-            </a:r>
-            <a:endParaRPr lang="en-US" sz="1200" dirty="0"/>
-          </a:p>
-        </p:txBody>
-      </p:sp>
-      <p:sp>
-        <p:nvSpPr>
-          <p:cNvPr id="10" name="Shape 8"/>
-          <p:cNvSpPr/>
-          <p:nvPr/>
-        </p:nvSpPr>
-        <p:spPr>
-          <a:xfrm>
-            <a:off x="640080" y="3227832"/>
-            <a:ext cx="91440" cy="91440"/>
-          </a:xfrm>
-          <a:prstGeom prst="ellipse">
-            <a:avLst/>
-          </a:prstGeom>
-          <a:solidFill>
-            <a:srgbClr val="CF3338"/>
-          </a:solidFill>
-          <a:ln/>
-        </p:spPr>
-      </p:sp>
-      <p:sp>
-        <p:nvSpPr>
-          <p:cNvPr id="11" name="Text 9"/>
-          <p:cNvSpPr/>
-          <p:nvPr/>
-        </p:nvSpPr>
-        <p:spPr>
-          <a:xfrm>
-            <a:off x="1005840" y="3154680"/>
-            <a:ext cx="7680960" cy="274320"/>
-          </a:xfrm>
-          <a:prstGeom prst="rect">
-            <a:avLst/>
-          </a:prstGeom>
-          <a:noFill/>
-          <a:ln/>
-        </p:spPr>
-        <p:txBody>
-          <a:bodyPr wrap="square" rtlCol="0" anchor="ctr"/>
-          <a:lstStyle/>
-          <a:p>
-            <a:pPr indent="0" marL="0">
-              <a:buNone/>
-            </a:pPr>
-            <a:r>
-              <a:rPr lang="en-US" sz="1200" dirty="0">
-                <a:solidFill>
-                  <a:srgbClr val="1F2120"/>
-                </a:solidFill>
-              </a:rPr>
-              <a:t>25 hours × $75/hour = $1,875 per year saved on just ONE task</a:t>
-            </a:r>
-            <a:endParaRPr lang="en-US" sz="1200" dirty="0"/>
-          </a:p>
-        </p:txBody>
-      </p:sp>
-      <p:sp>
-        <p:nvSpPr>
-          <p:cNvPr id="12" name="Text 10"/>
-          <p:cNvSpPr/>
-          <p:nvPr/>
-        </p:nvSpPr>
-        <p:spPr>
-          <a:xfrm>
-            <a:off x="457200" y="3611880"/>
-            <a:ext cx="8229600" cy="548640"/>
-          </a:xfrm>
-          <a:prstGeom prst="rect">
-            <a:avLst/>
-          </a:prstGeom>
-          <a:noFill/>
-          <a:ln/>
-        </p:spPr>
-        <p:txBody>
-          <a:bodyPr wrap="square" rtlCol="0" anchor="ctr"/>
-          <a:lstStyle/>
-          <a:p>
-            <a:pPr indent="0" marL="0">
-              <a:buNone/>
-            </a:pPr>
-            <a:r>
-              <a:rPr lang="en-US" sz="1100" i="1" dirty="0">
-                <a:solidFill>
-                  <a:srgbClr val="1F2120"/>
-                </a:solidFill>
-              </a:rPr>
-              <a:t>That's the baseline before implementation cost. And if you use a free tool, there's no cost. That's pure ROI.</a:t>
-            </a:r>
-            <a:endParaRPr lang="en-US" sz="1100" dirty="0"/>
-          </a:p>
-        </p:txBody>
-      </p:sp>
-      <p:sp>
-        <p:nvSpPr>
-          <p:cNvPr id="13" name="Shape 11"/>
-          <p:cNvSpPr/>
-          <p:nvPr/>
-        </p:nvSpPr>
-        <p:spPr>
-          <a:xfrm>
-            <a:off x="8046720" y="4389120"/>
-            <a:ext cx="274320" cy="274320"/>
-          </a:xfrm>
-          <a:prstGeom prst="triangle">
-            <a:avLst/>
-          </a:prstGeom>
-          <a:solidFill>
-            <a:srgbClr val="CF3338"/>
-          </a:solidFill>
-          <a:ln/>
-        </p:spPr>
-      </p:sp>
-      <p:sp>
-        <p:nvSpPr>
-          <p:cNvPr id="14" name="Shape 12"/>
-          <p:cNvSpPr/>
-          <p:nvPr/>
-        </p:nvSpPr>
-        <p:spPr>
-          <a:xfrm>
-            <a:off x="8275320" y="4617720"/>
-            <a:ext cx="274320" cy="274320"/>
-          </a:xfrm>
-          <a:prstGeom prst="triangle">
-            <a:avLst/>
-          </a:prstGeom>
-          <a:solidFill>
-            <a:srgbClr val="CF3338"/>
-          </a:solidFill>
-          <a:ln/>
-        </p:spPr>
-      </p:sp>
-      <p:sp>
-        <p:nvSpPr>
-          <p:cNvPr id="15" name="Shape 13"/>
-          <p:cNvSpPr/>
-          <p:nvPr/>
-        </p:nvSpPr>
-        <p:spPr>
-          <a:xfrm>
-            <a:off x="8503920" y="4846320"/>
-            <a:ext cx="274320" cy="274320"/>
-          </a:xfrm>
-          <a:prstGeom prst="triangle">
-            <a:avLst/>
-          </a:prstGeom>
-          <a:solidFill>
-            <a:srgbClr val="CF3338"/>
-          </a:solidFill>
-          <a:ln/>
-        </p:spPr>
       </p:sp>
     </p:spTree>
   </p:cSld>
@@ -11704,7 +11751,7 @@
                 <a:ea typeface="Arial Black" pitchFamily="34" charset="-122"/>
                 <a:cs typeface="Arial Black" pitchFamily="34" charset="-120"/>
               </a:rPr>
-              <a:t>Now: Calculate YOUR Number</a:t>
+              <a:t>Value Threshold Calculator</a:t>
             </a:r>
             <a:endParaRPr lang="en-US" sz="2800" dirty="0"/>
           </a:p>
@@ -11719,7 +11766,161 @@
         <p:spPr>
           <a:xfrm>
             <a:off x="457200" y="960120"/>
-            <a:ext cx="8229600" cy="365760"/>
+            <a:ext cx="8229600" cy="274320"/>
+          </a:xfrm>
+          <a:prstGeom prst="rect">
+            <a:avLst/>
+          </a:prstGeom>
+          <a:noFill/>
+          <a:ln/>
+        </p:spPr>
+        <p:txBody>
+          <a:bodyPr wrap="square" rtlCol="0" anchor="ctr"/>
+          <a:lstStyle/>
+          <a:p>
+            <a:pPr indent="0" marL="0">
+              <a:buNone/>
+            </a:pPr>
+            <a:r>
+              <a:rPr lang="en-US" sz="1200" b="1" dirty="0">
+                <a:solidFill>
+                  <a:srgbClr val="CF3338"/>
+                </a:solidFill>
+                <a:latin typeface="Arial Black" pitchFamily="34" charset="0"/>
+                <a:ea typeface="Arial Black" pitchFamily="34" charset="-122"/>
+                <a:cs typeface="Arial Black" pitchFamily="34" charset="-120"/>
+              </a:rPr>
+              <a:t>The simple formula:</a:t>
+            </a:r>
+            <a:endParaRPr lang="en-US" sz="1200" dirty="0"/>
+          </a:p>
+        </p:txBody>
+      </p:sp>
+      <p:sp>
+        <p:nvSpPr>
+          <p:cNvPr id="5" name="Shape 3"/>
+          <p:cNvSpPr/>
+          <p:nvPr/>
+        </p:nvSpPr>
+        <p:spPr>
+          <a:xfrm>
+            <a:off x="1371600" y="1325880"/>
+            <a:ext cx="6400800" cy="868680"/>
+          </a:xfrm>
+          <a:prstGeom prst="rect">
+            <a:avLst/>
+          </a:prstGeom>
+          <a:solidFill>
+            <a:srgbClr val="CF3338"/>
+          </a:solidFill>
+          <a:ln/>
+        </p:spPr>
+      </p:sp>
+      <p:sp>
+        <p:nvSpPr>
+          <p:cNvPr id="6" name="Text 4"/>
+          <p:cNvSpPr/>
+          <p:nvPr/>
+        </p:nvSpPr>
+        <p:spPr>
+          <a:xfrm>
+            <a:off x="1554480" y="1463040"/>
+            <a:ext cx="6035040" cy="594360"/>
+          </a:xfrm>
+          <a:prstGeom prst="rect">
+            <a:avLst/>
+          </a:prstGeom>
+          <a:noFill/>
+          <a:ln/>
+        </p:spPr>
+        <p:txBody>
+          <a:bodyPr wrap="square" rtlCol="0" anchor="ctr"/>
+          <a:lstStyle/>
+          <a:p>
+            <a:pPr algn="ctr" indent="0" marL="0">
+              <a:buNone/>
+            </a:pPr>
+            <a:r>
+              <a:rPr lang="en-US" sz="1300" b="1" dirty="0">
+                <a:solidFill>
+                  <a:srgbClr val="FFFFFF"/>
+                </a:solidFill>
+              </a:rPr>
+              <a:t>(Time saved per task × Times per year) × Your hourly rate = Annual value</a:t>
+            </a:r>
+            <a:endParaRPr lang="en-US" sz="1300" dirty="0"/>
+          </a:p>
+        </p:txBody>
+      </p:sp>
+      <p:sp>
+        <p:nvSpPr>
+          <p:cNvPr id="7" name="Text 5"/>
+          <p:cNvSpPr/>
+          <p:nvPr/>
+        </p:nvSpPr>
+        <p:spPr>
+          <a:xfrm>
+            <a:off x="457200" y="2423160"/>
+            <a:ext cx="8229600" cy="274320"/>
+          </a:xfrm>
+          <a:prstGeom prst="rect">
+            <a:avLst/>
+          </a:prstGeom>
+          <a:noFill/>
+          <a:ln/>
+        </p:spPr>
+        <p:txBody>
+          <a:bodyPr wrap="square" rtlCol="0" anchor="ctr"/>
+          <a:lstStyle/>
+          <a:p>
+            <a:pPr indent="0" marL="0">
+              <a:buNone/>
+            </a:pPr>
+            <a:r>
+              <a:rPr lang="en-US" sz="1200" b="1" dirty="0">
+                <a:solidFill>
+                  <a:srgbClr val="CF3338"/>
+                </a:solidFill>
+                <a:latin typeface="Arial Black" pitchFamily="34" charset="0"/>
+                <a:ea typeface="Arial Black" pitchFamily="34" charset="-122"/>
+                <a:cs typeface="Arial Black" pitchFamily="34" charset="-120"/>
+              </a:rPr>
+              <a:t>Example:</a:t>
+            </a:r>
+            <a:endParaRPr lang="en-US" sz="1200" dirty="0"/>
+          </a:p>
+        </p:txBody>
+      </p:sp>
+      <p:sp>
+        <p:nvSpPr>
+          <p:cNvPr id="8" name="Shape 6"/>
+          <p:cNvSpPr/>
+          <p:nvPr/>
+        </p:nvSpPr>
+        <p:spPr>
+          <a:xfrm>
+            <a:off x="640080" y="2816352"/>
+            <a:ext cx="91440" cy="91440"/>
+          </a:xfrm>
+          <a:prstGeom prst="ellipse">
+            <a:avLst/>
+          </a:prstGeom>
+          <a:solidFill>
+            <a:srgbClr val="CF3338"/>
+          </a:solidFill>
+          <a:ln/>
+        </p:spPr>
+      </p:sp>
+      <p:sp>
+        <p:nvSpPr>
+          <p:cNvPr id="9" name="Text 7"/>
+          <p:cNvSpPr/>
+          <p:nvPr/>
+        </p:nvSpPr>
+        <p:spPr>
+          <a:xfrm>
+            <a:off x="1005840" y="2743200"/>
+            <a:ext cx="7680960" cy="274320"/>
           </a:xfrm>
           <a:prstGeom prst="rect">
             <a:avLst/>
@@ -11740,7 +11941,7 @@
                   <a:srgbClr val="1F2120"/>
                 </a:solidFill>
               </a:rPr>
-              <a:t>Open your workbook to the Value Calculator page. Pick your top AI Sweet Spot task and fill in the blanks:</a:t>
+              <a:t>30 minutes saved per task × 50 times per year = 25 hours saved</a:t>
             </a:r>
             <a:endParaRPr lang="en-US" sz="1200" dirty="0"/>
           </a:p>
@@ -11748,14 +11949,34 @@
       </p:sp>
       <p:sp>
         <p:nvSpPr>
-          <p:cNvPr id="5" name="Text 3"/>
-          <p:cNvSpPr/>
-          <p:nvPr/>
-        </p:nvSpPr>
-        <p:spPr>
-          <a:xfrm>
-            <a:off x="1371600" y="1508760"/>
-            <a:ext cx="6400800" cy="365760"/>
+          <p:cNvPr id="10" name="Shape 8"/>
+          <p:cNvSpPr/>
+          <p:nvPr/>
+        </p:nvSpPr>
+        <p:spPr>
+          <a:xfrm>
+            <a:off x="640080" y="3227832"/>
+            <a:ext cx="91440" cy="91440"/>
+          </a:xfrm>
+          <a:prstGeom prst="ellipse">
+            <a:avLst/>
+          </a:prstGeom>
+          <a:solidFill>
+            <a:srgbClr val="CF3338"/>
+          </a:solidFill>
+          <a:ln/>
+        </p:spPr>
+      </p:sp>
+      <p:sp>
+        <p:nvSpPr>
+          <p:cNvPr id="11" name="Text 9"/>
+          <p:cNvSpPr/>
+          <p:nvPr/>
+        </p:nvSpPr>
+        <p:spPr>
+          <a:xfrm>
+            <a:off x="1005840" y="3154680"/>
+            <a:ext cx="7680960" cy="274320"/>
           </a:xfrm>
           <a:prstGeom prst="rect">
             <a:avLst/>
@@ -11775,11 +11996,8 @@
                 <a:solidFill>
                   <a:srgbClr val="1F2120"/>
                 </a:solidFill>
-                <a:latin typeface="Arial" pitchFamily="34" charset="0"/>
-                <a:ea typeface="Arial" pitchFamily="34" charset="-122"/>
-                <a:cs typeface="Arial" pitchFamily="34" charset="-120"/>
-              </a:rPr>
-              <a:t>Minutes saved per task: ___</a:t>
+              </a:rPr>
+              <a:t>25 hours × $75/hour = $1,875 per year saved on just ONE task</a:t>
             </a:r>
             <a:endParaRPr lang="en-US" sz="1200" dirty="0"/>
           </a:p>
@@ -11787,167 +12005,86 @@
       </p:sp>
       <p:sp>
         <p:nvSpPr>
-          <p:cNvPr id="6" name="Text 4"/>
-          <p:cNvSpPr/>
-          <p:nvPr/>
-        </p:nvSpPr>
-        <p:spPr>
-          <a:xfrm>
-            <a:off x="1371600" y="1965960"/>
-            <a:ext cx="6400800" cy="365760"/>
-          </a:xfrm>
-          <a:prstGeom prst="rect">
-            <a:avLst/>
-          </a:prstGeom>
-          <a:noFill/>
-          <a:ln/>
-        </p:spPr>
-        <p:txBody>
-          <a:bodyPr wrap="square" rtlCol="0" anchor="ctr"/>
-          <a:lstStyle/>
-          <a:p>
-            <a:pPr indent="0" marL="0">
-              <a:buNone/>
-            </a:pPr>
-            <a:r>
-              <a:rPr lang="en-US" sz="1200" dirty="0">
+          <p:cNvPr id="12" name="Text 10"/>
+          <p:cNvSpPr/>
+          <p:nvPr/>
+        </p:nvSpPr>
+        <p:spPr>
+          <a:xfrm>
+            <a:off x="457200" y="3611880"/>
+            <a:ext cx="8229600" cy="548640"/>
+          </a:xfrm>
+          <a:prstGeom prst="rect">
+            <a:avLst/>
+          </a:prstGeom>
+          <a:noFill/>
+          <a:ln/>
+        </p:spPr>
+        <p:txBody>
+          <a:bodyPr wrap="square" rtlCol="0" anchor="ctr"/>
+          <a:lstStyle/>
+          <a:p>
+            <a:pPr indent="0" marL="0">
+              <a:buNone/>
+            </a:pPr>
+            <a:r>
+              <a:rPr lang="en-US" sz="1100" i="1" dirty="0">
                 <a:solidFill>
                   <a:srgbClr val="1F2120"/>
                 </a:solidFill>
-                <a:latin typeface="Arial" pitchFamily="34" charset="0"/>
-                <a:ea typeface="Arial" pitchFamily="34" charset="-122"/>
-                <a:cs typeface="Arial" pitchFamily="34" charset="-120"/>
-              </a:rPr>
-              <a:t>Times per year: ___</a:t>
-            </a:r>
-            <a:endParaRPr lang="en-US" sz="1200" dirty="0"/>
-          </a:p>
-        </p:txBody>
-      </p:sp>
-      <p:sp>
-        <p:nvSpPr>
-          <p:cNvPr id="7" name="Text 5"/>
-          <p:cNvSpPr/>
-          <p:nvPr/>
-        </p:nvSpPr>
-        <p:spPr>
-          <a:xfrm>
-            <a:off x="1371600" y="2423160"/>
-            <a:ext cx="6400800" cy="365760"/>
-          </a:xfrm>
-          <a:prstGeom prst="rect">
-            <a:avLst/>
-          </a:prstGeom>
-          <a:noFill/>
-          <a:ln/>
-        </p:spPr>
-        <p:txBody>
-          <a:bodyPr wrap="square" rtlCol="0" anchor="ctr"/>
-          <a:lstStyle/>
-          <a:p>
-            <a:pPr indent="0" marL="0">
-              <a:buNone/>
-            </a:pPr>
-            <a:r>
-              <a:rPr lang="en-US" sz="1200" dirty="0">
-                <a:solidFill>
-                  <a:srgbClr val="1F2120"/>
-                </a:solidFill>
-                <a:latin typeface="Arial" pitchFamily="34" charset="0"/>
-                <a:ea typeface="Arial" pitchFamily="34" charset="-122"/>
-                <a:cs typeface="Arial" pitchFamily="34" charset="-120"/>
-              </a:rPr>
-              <a:t>Your hourly rate: $___</a:t>
-            </a:r>
-            <a:endParaRPr lang="en-US" sz="1200" dirty="0"/>
-          </a:p>
-        </p:txBody>
-      </p:sp>
-      <p:sp>
-        <p:nvSpPr>
-          <p:cNvPr id="8" name="Text 6"/>
-          <p:cNvSpPr/>
-          <p:nvPr/>
-        </p:nvSpPr>
-        <p:spPr>
-          <a:xfrm>
-            <a:off x="1371600" y="2880360"/>
-            <a:ext cx="6400800" cy="365760"/>
-          </a:xfrm>
-          <a:prstGeom prst="rect">
-            <a:avLst/>
-          </a:prstGeom>
-          <a:noFill/>
-          <a:ln/>
-        </p:spPr>
-        <p:txBody>
-          <a:bodyPr wrap="square" rtlCol="0" anchor="ctr"/>
-          <a:lstStyle/>
-          <a:p>
-            <a:pPr indent="0" marL="0">
-              <a:buNone/>
-            </a:pPr>
-            <a:r>
-              <a:rPr lang="en-US" sz="1200" dirty="0">
-                <a:solidFill>
-                  <a:srgbClr val="1F2120"/>
-                </a:solidFill>
-                <a:latin typeface="Arial" pitchFamily="34" charset="0"/>
-                <a:ea typeface="Arial" pitchFamily="34" charset="-122"/>
-                <a:cs typeface="Arial" pitchFamily="34" charset="-120"/>
-              </a:rPr>
-              <a:t>Annual value: (___) × (___) × ($___) = $_____</a:t>
-            </a:r>
-            <a:endParaRPr lang="en-US" sz="1200" dirty="0"/>
-          </a:p>
-        </p:txBody>
-      </p:sp>
-      <p:sp>
-        <p:nvSpPr>
-          <p:cNvPr id="9" name="Text 7"/>
-          <p:cNvSpPr/>
-          <p:nvPr/>
-        </p:nvSpPr>
-        <p:spPr>
-          <a:xfrm>
-            <a:off x="457200" y="4114800"/>
-            <a:ext cx="8229600" cy="457200"/>
-          </a:xfrm>
-          <a:prstGeom prst="rect">
-            <a:avLst/>
-          </a:prstGeom>
-          <a:noFill/>
-          <a:ln/>
-        </p:spPr>
-        <p:txBody>
-          <a:bodyPr wrap="square" rtlCol="0" anchor="ctr"/>
-          <a:lstStyle/>
-          <a:p>
-            <a:pPr algn="ctr" indent="0" marL="0">
-              <a:buNone/>
-            </a:pPr>
-            <a:r>
-              <a:rPr lang="en-US" sz="1100" i="1" dirty="0">
+              </a:rPr>
+              <a:t>That's the baseline before implementation cost. And many organizations already have AI tools available—whether through enterprise licenses or approved free tiers. Check what's available to you. The point is: even modest time savings on a frequent task add up fast.</a:t>
+            </a:r>
+            <a:endParaRPr lang="en-US" sz="1100" dirty="0"/>
+          </a:p>
+        </p:txBody>
+      </p:sp>
+      <p:sp>
+        <p:nvSpPr>
+          <p:cNvPr id="13" name="Text 11"/>
+          <p:cNvSpPr/>
+          <p:nvPr/>
+        </p:nvSpPr>
+        <p:spPr>
+          <a:xfrm>
+            <a:off x="457200" y="4617720"/>
+            <a:ext cx="8229600" cy="320040"/>
+          </a:xfrm>
+          <a:prstGeom prst="rect">
+            <a:avLst/>
+          </a:prstGeom>
+          <a:noFill/>
+          <a:ln/>
+        </p:spPr>
+        <p:txBody>
+          <a:bodyPr wrap="square" rtlCol="0" anchor="ctr"/>
+          <a:lstStyle/>
+          <a:p>
+            <a:pPr indent="0" marL="0">
+              <a:buNone/>
+            </a:pPr>
+            <a:r>
+              <a:rPr lang="en-US" sz="900" i="1" dirty="0">
                 <a:solidFill>
                   <a:srgbClr val="707070"/>
                 </a:solidFill>
               </a:rPr>
-              <a:t>You have 3-4 minutes. I'll wait, then we'll talk through what you found.</a:t>
-            </a:r>
-            <a:endParaRPr lang="en-US" sz="1100" dirty="0"/>
-          </a:p>
-        </p:txBody>
-      </p:sp>
-      <p:sp>
-        <p:nvSpPr>
-          <p:cNvPr id="10" name="Shape 8"/>
-          <p:cNvSpPr/>
-          <p:nvPr/>
-        </p:nvSpPr>
-        <p:spPr>
-          <a:xfrm>
-            <a:off x="8046720" y="4389120"/>
-            <a:ext cx="274320" cy="274320"/>
+              <a:t>Adapted from the value threshold concept in Tobias Zwingmann, The Profitable AI Advantage (Packt, 2025)</a:t>
+            </a:r>
+            <a:endParaRPr lang="en-US" sz="900" dirty="0"/>
+          </a:p>
+        </p:txBody>
+      </p:sp>
+      <p:sp>
+        <p:nvSpPr>
+          <p:cNvPr id="14" name="Shape 12"/>
+          <p:cNvSpPr/>
+          <p:nvPr/>
+        </p:nvSpPr>
+        <p:spPr>
+          <a:xfrm>
+            <a:off x="8503920" y="4572000"/>
+            <a:ext cx="182880" cy="182880"/>
           </a:xfrm>
           <a:prstGeom prst="triangle">
             <a:avLst/>
@@ -11960,14 +12097,14 @@
       </p:sp>
       <p:sp>
         <p:nvSpPr>
-          <p:cNvPr id="11" name="Shape 9"/>
-          <p:cNvSpPr/>
-          <p:nvPr/>
-        </p:nvSpPr>
-        <p:spPr>
-          <a:xfrm>
-            <a:off x="8275320" y="4617720"/>
-            <a:ext cx="274320" cy="274320"/>
+          <p:cNvPr id="15" name="Shape 13"/>
+          <p:cNvSpPr/>
+          <p:nvPr/>
+        </p:nvSpPr>
+        <p:spPr>
+          <a:xfrm>
+            <a:off x="8668512" y="4736592"/>
+            <a:ext cx="182880" cy="182880"/>
           </a:xfrm>
           <a:prstGeom prst="triangle">
             <a:avLst/>
@@ -11980,14 +12117,14 @@
       </p:sp>
       <p:sp>
         <p:nvSpPr>
-          <p:cNvPr id="12" name="Shape 10"/>
-          <p:cNvSpPr/>
-          <p:nvPr/>
-        </p:nvSpPr>
-        <p:spPr>
-          <a:xfrm>
-            <a:off x="8503920" y="4846320"/>
-            <a:ext cx="274320" cy="274320"/>
+          <p:cNvPr id="16" name="Shape 14"/>
+          <p:cNvSpPr/>
+          <p:nvPr/>
+        </p:nvSpPr>
+        <p:spPr>
+          <a:xfrm>
+            <a:off x="8833104" y="4901184"/>
+            <a:ext cx="182880" cy="182880"/>
           </a:xfrm>
           <a:prstGeom prst="triangle">
             <a:avLst/>
@@ -12009,6 +12146,421 @@
 <file path=ppt/slides/slide27.xml><?xml version="1.0" encoding="utf-8"?>
 <p:sld xmlns:a="http://schemas.openxmlformats.org/drawingml/2006/main" xmlns:r="http://schemas.openxmlformats.org/officeDocument/2006/relationships" xmlns:p="http://schemas.openxmlformats.org/presentationml/2006/main">
   <p:cSld name="Slide 27">
+    <p:bg>
+      <p:bgPr>
+        <a:solidFill>
+          <a:srgbClr val="EEECE1"/>
+        </a:solidFill>
+      </p:bgPr>
+    </p:bg>
+    <p:spTree>
+      <p:nvGrpSpPr>
+        <p:cNvPr id="1" name=""/>
+        <p:cNvGrpSpPr/>
+        <p:nvPr/>
+      </p:nvGrpSpPr>
+      <p:grpSpPr>
+        <a:xfrm>
+          <a:off x="0" y="0"/>
+          <a:ext cx="0" cy="0"/>
+          <a:chOff x="0" y="0"/>
+          <a:chExt cx="0" cy="0"/>
+        </a:xfrm>
+      </p:grpSpPr>
+      <p:sp>
+        <p:nvSpPr>
+          <p:cNvPr id="2" name="Shape 0"/>
+          <p:cNvSpPr/>
+          <p:nvPr/>
+        </p:nvSpPr>
+        <p:spPr>
+          <a:xfrm>
+            <a:off x="0" y="0"/>
+            <a:ext cx="9144000" cy="685800"/>
+          </a:xfrm>
+          <a:prstGeom prst="rect">
+            <a:avLst/>
+          </a:prstGeom>
+          <a:solidFill>
+            <a:srgbClr val="CF3338"/>
+          </a:solidFill>
+          <a:ln/>
+        </p:spPr>
+      </p:sp>
+      <p:sp>
+        <p:nvSpPr>
+          <p:cNvPr id="3" name="Text 1"/>
+          <p:cNvSpPr/>
+          <p:nvPr/>
+        </p:nvSpPr>
+        <p:spPr>
+          <a:xfrm>
+            <a:off x="457200" y="109728"/>
+            <a:ext cx="8229600" cy="457200"/>
+          </a:xfrm>
+          <a:prstGeom prst="rect">
+            <a:avLst/>
+          </a:prstGeom>
+          <a:noFill/>
+          <a:ln/>
+        </p:spPr>
+        <p:txBody>
+          <a:bodyPr wrap="square" rtlCol="0" anchor="ctr"/>
+          <a:lstStyle/>
+          <a:p>
+            <a:pPr indent="0" marL="0">
+              <a:buNone/>
+            </a:pPr>
+            <a:r>
+              <a:rPr lang="en-US" sz="2800" b="1" dirty="0">
+                <a:solidFill>
+                  <a:srgbClr val="FFFFFF"/>
+                </a:solidFill>
+                <a:latin typeface="Arial Black" pitchFamily="34" charset="0"/>
+                <a:ea typeface="Arial Black" pitchFamily="34" charset="-122"/>
+                <a:cs typeface="Arial Black" pitchFamily="34" charset="-120"/>
+              </a:rPr>
+              <a:t>Now: Calculate YOUR Number</a:t>
+            </a:r>
+            <a:endParaRPr lang="en-US" sz="2800" dirty="0"/>
+          </a:p>
+        </p:txBody>
+      </p:sp>
+      <p:sp>
+        <p:nvSpPr>
+          <p:cNvPr id="4" name="Text 2"/>
+          <p:cNvSpPr/>
+          <p:nvPr/>
+        </p:nvSpPr>
+        <p:spPr>
+          <a:xfrm>
+            <a:off x="457200" y="960120"/>
+            <a:ext cx="8229600" cy="365760"/>
+          </a:xfrm>
+          <a:prstGeom prst="rect">
+            <a:avLst/>
+          </a:prstGeom>
+          <a:noFill/>
+          <a:ln/>
+        </p:spPr>
+        <p:txBody>
+          <a:bodyPr wrap="square" rtlCol="0" anchor="ctr"/>
+          <a:lstStyle/>
+          <a:p>
+            <a:pPr indent="0" marL="0">
+              <a:buNone/>
+            </a:pPr>
+            <a:r>
+              <a:rPr lang="en-US" sz="1200" dirty="0">
+                <a:solidFill>
+                  <a:srgbClr val="1F2120"/>
+                </a:solidFill>
+              </a:rPr>
+              <a:t>Open your workbook to the Value Calculator page. Pick your top AI Sweet Spot task and fill in the blanks:</a:t>
+            </a:r>
+            <a:endParaRPr lang="en-US" sz="1200" dirty="0"/>
+          </a:p>
+        </p:txBody>
+      </p:sp>
+      <p:sp>
+        <p:nvSpPr>
+          <p:cNvPr id="5" name="Text 3"/>
+          <p:cNvSpPr/>
+          <p:nvPr/>
+        </p:nvSpPr>
+        <p:spPr>
+          <a:xfrm>
+            <a:off x="1371600" y="1508760"/>
+            <a:ext cx="6400800" cy="365760"/>
+          </a:xfrm>
+          <a:prstGeom prst="rect">
+            <a:avLst/>
+          </a:prstGeom>
+          <a:noFill/>
+          <a:ln/>
+        </p:spPr>
+        <p:txBody>
+          <a:bodyPr wrap="square" rtlCol="0" anchor="ctr"/>
+          <a:lstStyle/>
+          <a:p>
+            <a:pPr indent="0" marL="0">
+              <a:buNone/>
+            </a:pPr>
+            <a:r>
+              <a:rPr lang="en-US" sz="1200" dirty="0">
+                <a:solidFill>
+                  <a:srgbClr val="1F2120"/>
+                </a:solidFill>
+                <a:latin typeface="Arial" pitchFamily="34" charset="0"/>
+                <a:ea typeface="Arial" pitchFamily="34" charset="-122"/>
+                <a:cs typeface="Arial" pitchFamily="34" charset="-120"/>
+              </a:rPr>
+              <a:t>Minutes saved per task: ___</a:t>
+            </a:r>
+            <a:endParaRPr lang="en-US" sz="1200" dirty="0"/>
+          </a:p>
+        </p:txBody>
+      </p:sp>
+      <p:sp>
+        <p:nvSpPr>
+          <p:cNvPr id="6" name="Text 4"/>
+          <p:cNvSpPr/>
+          <p:nvPr/>
+        </p:nvSpPr>
+        <p:spPr>
+          <a:xfrm>
+            <a:off x="1371600" y="1965960"/>
+            <a:ext cx="6400800" cy="365760"/>
+          </a:xfrm>
+          <a:prstGeom prst="rect">
+            <a:avLst/>
+          </a:prstGeom>
+          <a:noFill/>
+          <a:ln/>
+        </p:spPr>
+        <p:txBody>
+          <a:bodyPr wrap="square" rtlCol="0" anchor="ctr"/>
+          <a:lstStyle/>
+          <a:p>
+            <a:pPr indent="0" marL="0">
+              <a:buNone/>
+            </a:pPr>
+            <a:r>
+              <a:rPr lang="en-US" sz="1200" dirty="0">
+                <a:solidFill>
+                  <a:srgbClr val="1F2120"/>
+                </a:solidFill>
+                <a:latin typeface="Arial" pitchFamily="34" charset="0"/>
+                <a:ea typeface="Arial" pitchFamily="34" charset="-122"/>
+                <a:cs typeface="Arial" pitchFamily="34" charset="-120"/>
+              </a:rPr>
+              <a:t>Times per year: ___</a:t>
+            </a:r>
+            <a:endParaRPr lang="en-US" sz="1200" dirty="0"/>
+          </a:p>
+        </p:txBody>
+      </p:sp>
+      <p:sp>
+        <p:nvSpPr>
+          <p:cNvPr id="7" name="Text 5"/>
+          <p:cNvSpPr/>
+          <p:nvPr/>
+        </p:nvSpPr>
+        <p:spPr>
+          <a:xfrm>
+            <a:off x="1371600" y="2423160"/>
+            <a:ext cx="6400800" cy="365760"/>
+          </a:xfrm>
+          <a:prstGeom prst="rect">
+            <a:avLst/>
+          </a:prstGeom>
+          <a:noFill/>
+          <a:ln/>
+        </p:spPr>
+        <p:txBody>
+          <a:bodyPr wrap="square" rtlCol="0" anchor="ctr"/>
+          <a:lstStyle/>
+          <a:p>
+            <a:pPr indent="0" marL="0">
+              <a:buNone/>
+            </a:pPr>
+            <a:r>
+              <a:rPr lang="en-US" sz="1200" dirty="0">
+                <a:solidFill>
+                  <a:srgbClr val="1F2120"/>
+                </a:solidFill>
+                <a:latin typeface="Arial" pitchFamily="34" charset="0"/>
+                <a:ea typeface="Arial" pitchFamily="34" charset="-122"/>
+                <a:cs typeface="Arial" pitchFamily="34" charset="-120"/>
+              </a:rPr>
+              <a:t>Your hourly rate: $___</a:t>
+            </a:r>
+            <a:endParaRPr lang="en-US" sz="1200" dirty="0"/>
+          </a:p>
+        </p:txBody>
+      </p:sp>
+      <p:sp>
+        <p:nvSpPr>
+          <p:cNvPr id="8" name="Text 6"/>
+          <p:cNvSpPr/>
+          <p:nvPr/>
+        </p:nvSpPr>
+        <p:spPr>
+          <a:xfrm>
+            <a:off x="1371600" y="2880360"/>
+            <a:ext cx="6400800" cy="365760"/>
+          </a:xfrm>
+          <a:prstGeom prst="rect">
+            <a:avLst/>
+          </a:prstGeom>
+          <a:noFill/>
+          <a:ln/>
+        </p:spPr>
+        <p:txBody>
+          <a:bodyPr wrap="square" rtlCol="0" anchor="ctr"/>
+          <a:lstStyle/>
+          <a:p>
+            <a:pPr indent="0" marL="0">
+              <a:buNone/>
+            </a:pPr>
+            <a:r>
+              <a:rPr lang="en-US" sz="1200" dirty="0">
+                <a:solidFill>
+                  <a:srgbClr val="1F2120"/>
+                </a:solidFill>
+                <a:latin typeface="Arial" pitchFamily="34" charset="0"/>
+                <a:ea typeface="Arial" pitchFamily="34" charset="-122"/>
+                <a:cs typeface="Arial" pitchFamily="34" charset="-120"/>
+              </a:rPr>
+              <a:t>Annual value: (___) × (___) × ($___) = $_____</a:t>
+            </a:r>
+            <a:endParaRPr lang="en-US" sz="1200" dirty="0"/>
+          </a:p>
+        </p:txBody>
+      </p:sp>
+      <p:sp>
+        <p:nvSpPr>
+          <p:cNvPr id="9" name="Text 7"/>
+          <p:cNvSpPr/>
+          <p:nvPr/>
+        </p:nvSpPr>
+        <p:spPr>
+          <a:xfrm>
+            <a:off x="457200" y="4114800"/>
+            <a:ext cx="8229600" cy="457200"/>
+          </a:xfrm>
+          <a:prstGeom prst="rect">
+            <a:avLst/>
+          </a:prstGeom>
+          <a:noFill/>
+          <a:ln/>
+        </p:spPr>
+        <p:txBody>
+          <a:bodyPr wrap="square" rtlCol="0" anchor="ctr"/>
+          <a:lstStyle/>
+          <a:p>
+            <a:pPr algn="ctr" indent="0" marL="0">
+              <a:buNone/>
+            </a:pPr>
+            <a:r>
+              <a:rPr lang="en-US" sz="1100" i="1" dirty="0">
+                <a:solidFill>
+                  <a:srgbClr val="707070"/>
+                </a:solidFill>
+              </a:rPr>
+              <a:t>You have 3-4 minutes. I'll wait, then we'll talk through what you found.</a:t>
+            </a:r>
+            <a:endParaRPr lang="en-US" sz="1100" dirty="0"/>
+          </a:p>
+        </p:txBody>
+      </p:sp>
+      <p:sp>
+        <p:nvSpPr>
+          <p:cNvPr id="10" name="Text 8"/>
+          <p:cNvSpPr/>
+          <p:nvPr/>
+        </p:nvSpPr>
+        <p:spPr>
+          <a:xfrm>
+            <a:off x="457200" y="4617720"/>
+            <a:ext cx="8229600" cy="320040"/>
+          </a:xfrm>
+          <a:prstGeom prst="rect">
+            <a:avLst/>
+          </a:prstGeom>
+          <a:noFill/>
+          <a:ln/>
+        </p:spPr>
+        <p:txBody>
+          <a:bodyPr wrap="square" rtlCol="0" anchor="ctr"/>
+          <a:lstStyle/>
+          <a:p>
+            <a:pPr indent="0" marL="0">
+              <a:buNone/>
+            </a:pPr>
+            <a:r>
+              <a:rPr lang="en-US" sz="900" i="1" dirty="0">
+                <a:solidFill>
+                  <a:srgbClr val="707070"/>
+                </a:solidFill>
+              </a:rPr>
+              <a:t>Adapted from the value threshold concept in Tobias Zwingmann, The Profitable AI Advantage (Packt, 2025)</a:t>
+            </a:r>
+            <a:endParaRPr lang="en-US" sz="900" dirty="0"/>
+          </a:p>
+        </p:txBody>
+      </p:sp>
+      <p:sp>
+        <p:nvSpPr>
+          <p:cNvPr id="11" name="Shape 9"/>
+          <p:cNvSpPr/>
+          <p:nvPr/>
+        </p:nvSpPr>
+        <p:spPr>
+          <a:xfrm>
+            <a:off x="8503920" y="4572000"/>
+            <a:ext cx="182880" cy="182880"/>
+          </a:xfrm>
+          <a:prstGeom prst="triangle">
+            <a:avLst/>
+          </a:prstGeom>
+          <a:solidFill>
+            <a:srgbClr val="CF3338"/>
+          </a:solidFill>
+          <a:ln/>
+        </p:spPr>
+      </p:sp>
+      <p:sp>
+        <p:nvSpPr>
+          <p:cNvPr id="12" name="Shape 10"/>
+          <p:cNvSpPr/>
+          <p:nvPr/>
+        </p:nvSpPr>
+        <p:spPr>
+          <a:xfrm>
+            <a:off x="8668512" y="4736592"/>
+            <a:ext cx="182880" cy="182880"/>
+          </a:xfrm>
+          <a:prstGeom prst="triangle">
+            <a:avLst/>
+          </a:prstGeom>
+          <a:solidFill>
+            <a:srgbClr val="CF3338"/>
+          </a:solidFill>
+          <a:ln/>
+        </p:spPr>
+      </p:sp>
+      <p:sp>
+        <p:nvSpPr>
+          <p:cNvPr id="13" name="Shape 11"/>
+          <p:cNvSpPr/>
+          <p:nvPr/>
+        </p:nvSpPr>
+        <p:spPr>
+          <a:xfrm>
+            <a:off x="8833104" y="4901184"/>
+            <a:ext cx="182880" cy="182880"/>
+          </a:xfrm>
+          <a:prstGeom prst="triangle">
+            <a:avLst/>
+          </a:prstGeom>
+          <a:solidFill>
+            <a:srgbClr val="CF3338"/>
+          </a:solidFill>
+          <a:ln/>
+        </p:spPr>
+      </p:sp>
+    </p:spTree>
+  </p:cSld>
+  <p:clrMapOvr>
+    <a:masterClrMapping/>
+  </p:clrMapOvr>
+</p:sld>
+</file>
+
+<file path=ppt/slides/slide28.xml><?xml version="1.0" encoding="utf-8"?>
+<p:sld xmlns:a="http://schemas.openxmlformats.org/drawingml/2006/main" xmlns:r="http://schemas.openxmlformats.org/officeDocument/2006/relationships" xmlns:p="http://schemas.openxmlformats.org/presentationml/2006/main">
+  <p:cSld name="Slide 28">
     <p:bg>
       <p:bgPr>
         <a:solidFill>
@@ -12068,424 +12620,6 @@
             <a:endParaRPr lang="en-US" sz="4000" dirty="0"/>
           </a:p>
         </p:txBody>
-      </p:sp>
-    </p:spTree>
-  </p:cSld>
-  <p:clrMapOvr>
-    <a:masterClrMapping/>
-  </p:clrMapOvr>
-</p:sld>
-</file>
-
-<file path=ppt/slides/slide28.xml><?xml version="1.0" encoding="utf-8"?>
-<p:sld xmlns:a="http://schemas.openxmlformats.org/drawingml/2006/main" xmlns:r="http://schemas.openxmlformats.org/officeDocument/2006/relationships" xmlns:p="http://schemas.openxmlformats.org/presentationml/2006/main">
-  <p:cSld name="Slide 28">
-    <p:bg>
-      <p:bgPr>
-        <a:solidFill>
-          <a:srgbClr val="EEECE1"/>
-        </a:solidFill>
-      </p:bgPr>
-    </p:bg>
-    <p:spTree>
-      <p:nvGrpSpPr>
-        <p:cNvPr id="1" name=""/>
-        <p:cNvGrpSpPr/>
-        <p:nvPr/>
-      </p:nvGrpSpPr>
-      <p:grpSpPr>
-        <a:xfrm>
-          <a:off x="0" y="0"/>
-          <a:ext cx="0" cy="0"/>
-          <a:chOff x="0" y="0"/>
-          <a:chExt cx="0" cy="0"/>
-        </a:xfrm>
-      </p:grpSpPr>
-      <p:sp>
-        <p:nvSpPr>
-          <p:cNvPr id="2" name="Shape 0"/>
-          <p:cNvSpPr/>
-          <p:nvPr/>
-        </p:nvSpPr>
-        <p:spPr>
-          <a:xfrm>
-            <a:off x="0" y="0"/>
-            <a:ext cx="9144000" cy="685800"/>
-          </a:xfrm>
-          <a:prstGeom prst="rect">
-            <a:avLst/>
-          </a:prstGeom>
-          <a:solidFill>
-            <a:srgbClr val="CF3338"/>
-          </a:solidFill>
-          <a:ln/>
-        </p:spPr>
-      </p:sp>
-      <p:sp>
-        <p:nvSpPr>
-          <p:cNvPr id="3" name="Text 1"/>
-          <p:cNvSpPr/>
-          <p:nvPr/>
-        </p:nvSpPr>
-        <p:spPr>
-          <a:xfrm>
-            <a:off x="457200" y="109728"/>
-            <a:ext cx="8229600" cy="457200"/>
-          </a:xfrm>
-          <a:prstGeom prst="rect">
-            <a:avLst/>
-          </a:prstGeom>
-          <a:noFill/>
-          <a:ln/>
-        </p:spPr>
-        <p:txBody>
-          <a:bodyPr wrap="square" rtlCol="0" anchor="ctr"/>
-          <a:lstStyle/>
-          <a:p>
-            <a:pPr indent="0" marL="0">
-              <a:buNone/>
-            </a:pPr>
-            <a:r>
-              <a:rPr lang="en-US" sz="2800" b="1" dirty="0">
-                <a:solidFill>
-                  <a:srgbClr val="FFFFFF"/>
-                </a:solidFill>
-                <a:latin typeface="Arial Black" pitchFamily="34" charset="0"/>
-                <a:ea typeface="Arial Black" pitchFamily="34" charset="-122"/>
-                <a:cs typeface="Arial Black" pitchFamily="34" charset="-120"/>
-              </a:rPr>
-              <a:t>Pick ONE Task. Start THIS WEEK.</a:t>
-            </a:r>
-            <a:endParaRPr lang="en-US" sz="2800" dirty="0"/>
-          </a:p>
-        </p:txBody>
-      </p:sp>
-      <p:sp>
-        <p:nvSpPr>
-          <p:cNvPr id="4" name="Text 2"/>
-          <p:cNvSpPr/>
-          <p:nvPr/>
-        </p:nvSpPr>
-        <p:spPr>
-          <a:xfrm>
-            <a:off x="457200" y="960120"/>
-            <a:ext cx="8229600" cy="365760"/>
-          </a:xfrm>
-          <a:prstGeom prst="rect">
-            <a:avLst/>
-          </a:prstGeom>
-          <a:noFill/>
-          <a:ln/>
-        </p:spPr>
-        <p:txBody>
-          <a:bodyPr wrap="square" rtlCol="0" anchor="ctr"/>
-          <a:lstStyle/>
-          <a:p>
-            <a:pPr indent="0" marL="0">
-              <a:buNone/>
-            </a:pPr>
-            <a:r>
-              <a:rPr lang="en-US" sz="1200" dirty="0">
-                <a:solidFill>
-                  <a:srgbClr val="1F2120"/>
-                </a:solidFill>
-              </a:rPr>
-              <a:t>Don't try to change everything at once. Pick one task from your AI Sweet Spot.</a:t>
-            </a:r>
-            <a:endParaRPr lang="en-US" sz="1200" dirty="0"/>
-          </a:p>
-        </p:txBody>
-      </p:sp>
-      <p:sp>
-        <p:nvSpPr>
-          <p:cNvPr id="5" name="Text 3"/>
-          <p:cNvSpPr/>
-          <p:nvPr/>
-        </p:nvSpPr>
-        <p:spPr>
-          <a:xfrm>
-            <a:off x="457200" y="1417320"/>
-            <a:ext cx="8229600" cy="274320"/>
-          </a:xfrm>
-          <a:prstGeom prst="rect">
-            <a:avLst/>
-          </a:prstGeom>
-          <a:noFill/>
-          <a:ln/>
-        </p:spPr>
-        <p:txBody>
-          <a:bodyPr wrap="square" rtlCol="0" anchor="ctr"/>
-          <a:lstStyle/>
-          <a:p>
-            <a:pPr indent="0" marL="0">
-              <a:buNone/>
-            </a:pPr>
-            <a:r>
-              <a:rPr lang="en-US" sz="1200" b="1" dirty="0">
-                <a:solidFill>
-                  <a:srgbClr val="CF3338"/>
-                </a:solidFill>
-                <a:latin typeface="Arial Black" pitchFamily="34" charset="0"/>
-                <a:ea typeface="Arial Black" pitchFamily="34" charset="-122"/>
-                <a:cs typeface="Arial Black" pitchFamily="34" charset="-120"/>
-              </a:rPr>
-              <a:t>In your workbook, write down:</a:t>
-            </a:r>
-            <a:endParaRPr lang="en-US" sz="1200" dirty="0"/>
-          </a:p>
-        </p:txBody>
-      </p:sp>
-      <p:sp>
-        <p:nvSpPr>
-          <p:cNvPr id="6" name="Text 4"/>
-          <p:cNvSpPr/>
-          <p:nvPr/>
-        </p:nvSpPr>
-        <p:spPr>
-          <a:xfrm>
-            <a:off x="914400" y="1783080"/>
-            <a:ext cx="7772400" cy="320040"/>
-          </a:xfrm>
-          <a:prstGeom prst="rect">
-            <a:avLst/>
-          </a:prstGeom>
-          <a:noFill/>
-          <a:ln/>
-        </p:spPr>
-        <p:txBody>
-          <a:bodyPr wrap="square" rtlCol="0" anchor="ctr"/>
-          <a:lstStyle/>
-          <a:p>
-            <a:pPr indent="0" marL="0">
-              <a:buNone/>
-            </a:pPr>
-            <a:r>
-              <a:rPr lang="en-US" sz="1100" dirty="0">
-                <a:solidFill>
-                  <a:srgbClr val="1F2120"/>
-                </a:solidFill>
-                <a:latin typeface="Arial" pitchFamily="34" charset="0"/>
-                <a:ea typeface="Arial" pitchFamily="34" charset="-122"/>
-                <a:cs typeface="Arial" pitchFamily="34" charset="-120"/>
-              </a:rPr>
-              <a:t>The task: ___________________</a:t>
-            </a:r>
-            <a:endParaRPr lang="en-US" sz="1100" dirty="0"/>
-          </a:p>
-        </p:txBody>
-      </p:sp>
-      <p:sp>
-        <p:nvSpPr>
-          <p:cNvPr id="7" name="Text 5"/>
-          <p:cNvSpPr/>
-          <p:nvPr/>
-        </p:nvSpPr>
-        <p:spPr>
-          <a:xfrm>
-            <a:off x="914400" y="2240280"/>
-            <a:ext cx="7772400" cy="320040"/>
-          </a:xfrm>
-          <a:prstGeom prst="rect">
-            <a:avLst/>
-          </a:prstGeom>
-          <a:noFill/>
-          <a:ln/>
-        </p:spPr>
-        <p:txBody>
-          <a:bodyPr wrap="square" rtlCol="0" anchor="ctr"/>
-          <a:lstStyle/>
-          <a:p>
-            <a:pPr indent="0" marL="0">
-              <a:buNone/>
-            </a:pPr>
-            <a:r>
-              <a:rPr lang="en-US" sz="1100" dirty="0">
-                <a:solidFill>
-                  <a:srgbClr val="1F2120"/>
-                </a:solidFill>
-                <a:latin typeface="Arial" pitchFamily="34" charset="0"/>
-                <a:ea typeface="Arial" pitchFamily="34" charset="-122"/>
-                <a:cs typeface="Arial" pitchFamily="34" charset="-120"/>
-              </a:rPr>
-              <a:t>The tool I'll use: ___ ChatGPT Free ___ Claude Free ___ Gemini ___ Excel Copilot ___ Other</a:t>
-            </a:r>
-            <a:endParaRPr lang="en-US" sz="1100" dirty="0"/>
-          </a:p>
-        </p:txBody>
-      </p:sp>
-      <p:sp>
-        <p:nvSpPr>
-          <p:cNvPr id="8" name="Text 6"/>
-          <p:cNvSpPr/>
-          <p:nvPr/>
-        </p:nvSpPr>
-        <p:spPr>
-          <a:xfrm>
-            <a:off x="914400" y="2697480"/>
-            <a:ext cx="7772400" cy="320040"/>
-          </a:xfrm>
-          <a:prstGeom prst="rect">
-            <a:avLst/>
-          </a:prstGeom>
-          <a:noFill/>
-          <a:ln/>
-        </p:spPr>
-        <p:txBody>
-          <a:bodyPr wrap="square" rtlCol="0" anchor="ctr"/>
-          <a:lstStyle/>
-          <a:p>
-            <a:pPr indent="0" marL="0">
-              <a:buNone/>
-            </a:pPr>
-            <a:r>
-              <a:rPr lang="en-US" sz="1100" dirty="0">
-                <a:solidFill>
-                  <a:srgbClr val="1F2120"/>
-                </a:solidFill>
-                <a:latin typeface="Arial" pitchFamily="34" charset="0"/>
-                <a:ea typeface="Arial" pitchFamily="34" charset="-122"/>
-                <a:cs typeface="Arial" pitchFamily="34" charset="-120"/>
-              </a:rPr>
-              <a:t>When I'll try it: ___ This week ___ Next week</a:t>
-            </a:r>
-            <a:endParaRPr lang="en-US" sz="1100" dirty="0"/>
-          </a:p>
-        </p:txBody>
-      </p:sp>
-      <p:sp>
-        <p:nvSpPr>
-          <p:cNvPr id="9" name="Text 7"/>
-          <p:cNvSpPr/>
-          <p:nvPr/>
-        </p:nvSpPr>
-        <p:spPr>
-          <a:xfrm>
-            <a:off x="914400" y="3154680"/>
-            <a:ext cx="7772400" cy="320040"/>
-          </a:xfrm>
-          <a:prstGeom prst="rect">
-            <a:avLst/>
-          </a:prstGeom>
-          <a:noFill/>
-          <a:ln/>
-        </p:spPr>
-        <p:txBody>
-          <a:bodyPr wrap="square" rtlCol="0" anchor="ctr"/>
-          <a:lstStyle/>
-          <a:p>
-            <a:pPr indent="0" marL="0">
-              <a:buNone/>
-            </a:pPr>
-            <a:r>
-              <a:rPr lang="en-US" sz="1100" dirty="0">
-                <a:solidFill>
-                  <a:srgbClr val="1F2120"/>
-                </a:solidFill>
-                <a:latin typeface="Arial" pitchFamily="34" charset="0"/>
-                <a:ea typeface="Arial" pitchFamily="34" charset="-122"/>
-                <a:cs typeface="Arial" pitchFamily="34" charset="-120"/>
-              </a:rPr>
-              <a:t>What success looks like: ___________________</a:t>
-            </a:r>
-            <a:endParaRPr lang="en-US" sz="1100" dirty="0"/>
-          </a:p>
-        </p:txBody>
-      </p:sp>
-      <p:sp>
-        <p:nvSpPr>
-          <p:cNvPr id="10" name="Text 8"/>
-          <p:cNvSpPr/>
-          <p:nvPr/>
-        </p:nvSpPr>
-        <p:spPr>
-          <a:xfrm>
-            <a:off x="457200" y="4206240"/>
-            <a:ext cx="8229600" cy="548640"/>
-          </a:xfrm>
-          <a:prstGeom prst="rect">
-            <a:avLst/>
-          </a:prstGeom>
-          <a:noFill/>
-          <a:ln/>
-        </p:spPr>
-        <p:txBody>
-          <a:bodyPr wrap="square" rtlCol="0" anchor="ctr"/>
-          <a:lstStyle/>
-          <a:p>
-            <a:pPr algn="ctr" indent="0" marL="0">
-              <a:buNone/>
-            </a:pPr>
-            <a:r>
-              <a:rPr lang="en-US" sz="1200" i="1" dirty="0">
-                <a:solidFill>
-                  <a:srgbClr val="707070"/>
-                </a:solidFill>
-              </a:rPr>
-              <a:t>You don't have to be perfect. You just have to try.</a:t>
-            </a:r>
-            <a:endParaRPr lang="en-US" sz="1200" dirty="0"/>
-          </a:p>
-        </p:txBody>
-      </p:sp>
-      <p:sp>
-        <p:nvSpPr>
-          <p:cNvPr id="11" name="Shape 9"/>
-          <p:cNvSpPr/>
-          <p:nvPr/>
-        </p:nvSpPr>
-        <p:spPr>
-          <a:xfrm>
-            <a:off x="8046720" y="4389120"/>
-            <a:ext cx="274320" cy="274320"/>
-          </a:xfrm>
-          <a:prstGeom prst="triangle">
-            <a:avLst/>
-          </a:prstGeom>
-          <a:solidFill>
-            <a:srgbClr val="CF3338"/>
-          </a:solidFill>
-          <a:ln/>
-        </p:spPr>
-      </p:sp>
-      <p:sp>
-        <p:nvSpPr>
-          <p:cNvPr id="12" name="Shape 10"/>
-          <p:cNvSpPr/>
-          <p:nvPr/>
-        </p:nvSpPr>
-        <p:spPr>
-          <a:xfrm>
-            <a:off x="8275320" y="4617720"/>
-            <a:ext cx="274320" cy="274320"/>
-          </a:xfrm>
-          <a:prstGeom prst="triangle">
-            <a:avLst/>
-          </a:prstGeom>
-          <a:solidFill>
-            <a:srgbClr val="CF3338"/>
-          </a:solidFill>
-          <a:ln/>
-        </p:spPr>
-      </p:sp>
-      <p:sp>
-        <p:nvSpPr>
-          <p:cNvPr id="13" name="Shape 11"/>
-          <p:cNvSpPr/>
-          <p:nvPr/>
-        </p:nvSpPr>
-        <p:spPr>
-          <a:xfrm>
-            <a:off x="8503920" y="4846320"/>
-            <a:ext cx="274320" cy="274320"/>
-          </a:xfrm>
-          <a:prstGeom prst="triangle">
-            <a:avLst/>
-          </a:prstGeom>
-          <a:solidFill>
-            <a:srgbClr val="CF3338"/>
-          </a:solidFill>
-          <a:ln/>
-        </p:spPr>
       </p:sp>
     </p:spTree>
   </p:cSld>
@@ -12528,7 +12662,7 @@
         <p:spPr>
           <a:xfrm>
             <a:off x="0" y="0"/>
-            <a:ext cx="9144000" cy="731520"/>
+            <a:ext cx="9144000" cy="685800"/>
           </a:xfrm>
           <a:prstGeom prst="rect">
             <a:avLst/>
@@ -12547,7 +12681,7 @@
         </p:nvSpPr>
         <p:spPr>
           <a:xfrm>
-            <a:off x="457200" y="137160"/>
+            <a:off x="457200" y="109728"/>
             <a:ext cx="8229600" cy="457200"/>
           </a:xfrm>
           <a:prstGeom prst="rect">
@@ -12560,11 +12694,11 @@
           <a:bodyPr wrap="square" rtlCol="0" anchor="ctr"/>
           <a:lstStyle/>
           <a:p>
-            <a:pPr algn="ctr" indent="0" marL="0">
-              <a:buNone/>
-            </a:pPr>
-            <a:r>
-              <a:rPr lang="en-US" sz="3600" b="1" dirty="0">
+            <a:pPr indent="0" marL="0">
+              <a:buNone/>
+            </a:pPr>
+            <a:r>
+              <a:rPr lang="en-US" sz="2800" b="1" dirty="0">
                 <a:solidFill>
                   <a:srgbClr val="FFFFFF"/>
                 </a:solidFill>
@@ -12572,9 +12706,9 @@
                 <a:ea typeface="Arial Black" pitchFamily="34" charset="-122"/>
                 <a:cs typeface="Arial Black" pitchFamily="34" charset="-120"/>
               </a:rPr>
-              <a:t>Thank You</a:t>
-            </a:r>
-            <a:endParaRPr lang="en-US" sz="3600" dirty="0"/>
+              <a:t>Pick ONE Task. Start THIS WEEK.</a:t>
+            </a:r>
+            <a:endParaRPr lang="en-US" sz="2800" dirty="0"/>
           </a:p>
         </p:txBody>
       </p:sp>
@@ -12586,7 +12720,7 @@
         </p:nvSpPr>
         <p:spPr>
           <a:xfrm>
-            <a:off x="457200" y="1188720"/>
+            <a:off x="457200" y="960120"/>
             <a:ext cx="8229600" cy="365760"/>
           </a:xfrm>
           <a:prstGeom prst="rect">
@@ -12599,77 +12733,247 @@
           <a:bodyPr wrap="square" rtlCol="0" anchor="ctr"/>
           <a:lstStyle/>
           <a:p>
+            <a:pPr indent="0" marL="0">
+              <a:buNone/>
+            </a:pPr>
+            <a:r>
+              <a:rPr lang="en-US" sz="1200" dirty="0">
+                <a:solidFill>
+                  <a:srgbClr val="1F2120"/>
+                </a:solidFill>
+              </a:rPr>
+              <a:t>Don't try to change everything at once. Pick one task from your AI Sweet Spot.</a:t>
+            </a:r>
+            <a:endParaRPr lang="en-US" sz="1200" dirty="0"/>
+          </a:p>
+        </p:txBody>
+      </p:sp>
+      <p:sp>
+        <p:nvSpPr>
+          <p:cNvPr id="5" name="Text 3"/>
+          <p:cNvSpPr/>
+          <p:nvPr/>
+        </p:nvSpPr>
+        <p:spPr>
+          <a:xfrm>
+            <a:off x="457200" y="1417320"/>
+            <a:ext cx="8229600" cy="274320"/>
+          </a:xfrm>
+          <a:prstGeom prst="rect">
+            <a:avLst/>
+          </a:prstGeom>
+          <a:noFill/>
+          <a:ln/>
+        </p:spPr>
+        <p:txBody>
+          <a:bodyPr wrap="square" rtlCol="0" anchor="ctr"/>
+          <a:lstStyle/>
+          <a:p>
+            <a:pPr indent="0" marL="0">
+              <a:buNone/>
+            </a:pPr>
+            <a:r>
+              <a:rPr lang="en-US" sz="1200" b="1" dirty="0">
+                <a:solidFill>
+                  <a:srgbClr val="CF3338"/>
+                </a:solidFill>
+                <a:latin typeface="Arial Black" pitchFamily="34" charset="0"/>
+                <a:ea typeface="Arial Black" pitchFamily="34" charset="-122"/>
+                <a:cs typeface="Arial Black" pitchFamily="34" charset="-120"/>
+              </a:rPr>
+              <a:t>In your workbook, write down:</a:t>
+            </a:r>
+            <a:endParaRPr lang="en-US" sz="1200" dirty="0"/>
+          </a:p>
+        </p:txBody>
+      </p:sp>
+      <p:sp>
+        <p:nvSpPr>
+          <p:cNvPr id="6" name="Text 4"/>
+          <p:cNvSpPr/>
+          <p:nvPr/>
+        </p:nvSpPr>
+        <p:spPr>
+          <a:xfrm>
+            <a:off x="914400" y="1783080"/>
+            <a:ext cx="7772400" cy="320040"/>
+          </a:xfrm>
+          <a:prstGeom prst="rect">
+            <a:avLst/>
+          </a:prstGeom>
+          <a:noFill/>
+          <a:ln/>
+        </p:spPr>
+        <p:txBody>
+          <a:bodyPr wrap="square" rtlCol="0" anchor="ctr"/>
+          <a:lstStyle/>
+          <a:p>
+            <a:pPr indent="0" marL="0">
+              <a:buNone/>
+            </a:pPr>
+            <a:r>
+              <a:rPr lang="en-US" sz="1100" dirty="0">
+                <a:solidFill>
+                  <a:srgbClr val="1F2120"/>
+                </a:solidFill>
+                <a:latin typeface="Arial" pitchFamily="34" charset="0"/>
+                <a:ea typeface="Arial" pitchFamily="34" charset="-122"/>
+                <a:cs typeface="Arial" pitchFamily="34" charset="-120"/>
+              </a:rPr>
+              <a:t>The task: ___________________</a:t>
+            </a:r>
+            <a:endParaRPr lang="en-US" sz="1100" dirty="0"/>
+          </a:p>
+        </p:txBody>
+      </p:sp>
+      <p:sp>
+        <p:nvSpPr>
+          <p:cNvPr id="7" name="Text 5"/>
+          <p:cNvSpPr/>
+          <p:nvPr/>
+        </p:nvSpPr>
+        <p:spPr>
+          <a:xfrm>
+            <a:off x="914400" y="2240280"/>
+            <a:ext cx="7772400" cy="320040"/>
+          </a:xfrm>
+          <a:prstGeom prst="rect">
+            <a:avLst/>
+          </a:prstGeom>
+          <a:noFill/>
+          <a:ln/>
+        </p:spPr>
+        <p:txBody>
+          <a:bodyPr wrap="square" rtlCol="0" anchor="ctr"/>
+          <a:lstStyle/>
+          <a:p>
+            <a:pPr indent="0" marL="0">
+              <a:buNone/>
+            </a:pPr>
+            <a:r>
+              <a:rPr lang="en-US" sz="1100" dirty="0">
+                <a:solidFill>
+                  <a:srgbClr val="1F2120"/>
+                </a:solidFill>
+                <a:latin typeface="Arial" pitchFamily="34" charset="0"/>
+                <a:ea typeface="Arial" pitchFamily="34" charset="-122"/>
+                <a:cs typeface="Arial" pitchFamily="34" charset="-120"/>
+              </a:rPr>
+              <a:t>The tool I'll use: ___ ChatGPT ___ Claude ___ Gemini ___ M365 Copilot ___ Other (check with your IT team)</a:t>
+            </a:r>
+            <a:endParaRPr lang="en-US" sz="1100" dirty="0"/>
+          </a:p>
+        </p:txBody>
+      </p:sp>
+      <p:sp>
+        <p:nvSpPr>
+          <p:cNvPr id="8" name="Text 6"/>
+          <p:cNvSpPr/>
+          <p:nvPr/>
+        </p:nvSpPr>
+        <p:spPr>
+          <a:xfrm>
+            <a:off x="914400" y="2697480"/>
+            <a:ext cx="7772400" cy="320040"/>
+          </a:xfrm>
+          <a:prstGeom prst="rect">
+            <a:avLst/>
+          </a:prstGeom>
+          <a:noFill/>
+          <a:ln/>
+        </p:spPr>
+        <p:txBody>
+          <a:bodyPr wrap="square" rtlCol="0" anchor="ctr"/>
+          <a:lstStyle/>
+          <a:p>
+            <a:pPr indent="0" marL="0">
+              <a:buNone/>
+            </a:pPr>
+            <a:r>
+              <a:rPr lang="en-US" sz="1100" dirty="0">
+                <a:solidFill>
+                  <a:srgbClr val="1F2120"/>
+                </a:solidFill>
+                <a:latin typeface="Arial" pitchFamily="34" charset="0"/>
+                <a:ea typeface="Arial" pitchFamily="34" charset="-122"/>
+                <a:cs typeface="Arial" pitchFamily="34" charset="-120"/>
+              </a:rPr>
+              <a:t>When I'll try it: ___ This week ___ Next week</a:t>
+            </a:r>
+            <a:endParaRPr lang="en-US" sz="1100" dirty="0"/>
+          </a:p>
+        </p:txBody>
+      </p:sp>
+      <p:sp>
+        <p:nvSpPr>
+          <p:cNvPr id="9" name="Text 7"/>
+          <p:cNvSpPr/>
+          <p:nvPr/>
+        </p:nvSpPr>
+        <p:spPr>
+          <a:xfrm>
+            <a:off x="914400" y="3154680"/>
+            <a:ext cx="7772400" cy="320040"/>
+          </a:xfrm>
+          <a:prstGeom prst="rect">
+            <a:avLst/>
+          </a:prstGeom>
+          <a:noFill/>
+          <a:ln/>
+        </p:spPr>
+        <p:txBody>
+          <a:bodyPr wrap="square" rtlCol="0" anchor="ctr"/>
+          <a:lstStyle/>
+          <a:p>
+            <a:pPr indent="0" marL="0">
+              <a:buNone/>
+            </a:pPr>
+            <a:r>
+              <a:rPr lang="en-US" sz="1100" dirty="0">
+                <a:solidFill>
+                  <a:srgbClr val="1F2120"/>
+                </a:solidFill>
+                <a:latin typeface="Arial" pitchFamily="34" charset="0"/>
+                <a:ea typeface="Arial" pitchFamily="34" charset="-122"/>
+                <a:cs typeface="Arial" pitchFamily="34" charset="-120"/>
+              </a:rPr>
+              <a:t>What success looks like: ___________________</a:t>
+            </a:r>
+            <a:endParaRPr lang="en-US" sz="1100" dirty="0"/>
+          </a:p>
+        </p:txBody>
+      </p:sp>
+      <p:sp>
+        <p:nvSpPr>
+          <p:cNvPr id="10" name="Text 8"/>
+          <p:cNvSpPr/>
+          <p:nvPr/>
+        </p:nvSpPr>
+        <p:spPr>
+          <a:xfrm>
+            <a:off x="457200" y="4206240"/>
+            <a:ext cx="8229600" cy="548640"/>
+          </a:xfrm>
+          <a:prstGeom prst="rect">
+            <a:avLst/>
+          </a:prstGeom>
+          <a:noFill/>
+          <a:ln/>
+        </p:spPr>
+        <p:txBody>
+          <a:bodyPr wrap="square" rtlCol="0" anchor="ctr"/>
+          <a:lstStyle/>
+          <a:p>
             <a:pPr algn="ctr" indent="0" marL="0">
               <a:buNone/>
             </a:pPr>
             <a:r>
-              <a:rPr lang="en-US" sz="1600" dirty="0">
-                <a:solidFill>
-                  <a:srgbClr val="1F2120"/>
-                </a:solidFill>
-              </a:rPr>
-              <a:t>You now have a repeatable system.</a:t>
-            </a:r>
-            <a:endParaRPr lang="en-US" sz="1600" dirty="0"/>
-          </a:p>
-        </p:txBody>
-      </p:sp>
-      <p:sp>
-        <p:nvSpPr>
-          <p:cNvPr id="5" name="Shape 3"/>
-          <p:cNvSpPr/>
-          <p:nvPr/>
-        </p:nvSpPr>
-        <p:spPr>
-          <a:xfrm>
-            <a:off x="1371600" y="1737360"/>
-            <a:ext cx="6400800" cy="1828800"/>
-          </a:xfrm>
-          <a:prstGeom prst="rect">
-            <a:avLst/>
-          </a:prstGeom>
-          <a:solidFill>
-            <a:srgbClr val="EEECE1"/>
-          </a:solidFill>
-          <a:ln w="25400">
-            <a:solidFill>
-              <a:srgbClr val="CF3338"/>
-            </a:solidFill>
-            <a:prstDash val="solid"/>
-          </a:ln>
-        </p:spPr>
-      </p:sp>
-      <p:sp>
-        <p:nvSpPr>
-          <p:cNvPr id="6" name="Text 4"/>
-          <p:cNvSpPr/>
-          <p:nvPr/>
-        </p:nvSpPr>
-        <p:spPr>
-          <a:xfrm>
-            <a:off x="1554480" y="1920240"/>
-            <a:ext cx="6035040" cy="1463040"/>
-          </a:xfrm>
-          <a:prstGeom prst="rect">
-            <a:avLst/>
-          </a:prstGeom>
-          <a:noFill/>
-          <a:ln/>
-        </p:spPr>
-        <p:txBody>
-          <a:bodyPr wrap="square" rtlCol="0" anchor="ctr"/>
-          <a:lstStyle/>
-          <a:p>
-            <a:pPr algn="ctr" indent="0" marL="0">
-              <a:buNone/>
-            </a:pPr>
-            <a:r>
-              <a:rPr lang="en-US" sz="1200" dirty="0">
-                <a:solidFill>
-                  <a:srgbClr val="1F2120"/>
-                </a:solidFill>
-              </a:rPr>
-              <a:t>SAFE Framework → 2×2 Matrix → Exposure &amp; Frequency → IA-AI Deployment → Your Commitment</a:t>
+              <a:rPr lang="en-US" sz="1200" i="1" dirty="0">
+                <a:solidFill>
+                  <a:srgbClr val="707070"/>
+                </a:solidFill>
+              </a:rPr>
+              <a:t>You don't have to be perfect. You just have to try.</a:t>
             </a:r>
             <a:endParaRPr lang="en-US" sz="1200" dirty="0"/>
           </a:p>
@@ -12677,86 +12981,14 @@
       </p:sp>
       <p:sp>
         <p:nvSpPr>
-          <p:cNvPr id="7" name="Text 5"/>
-          <p:cNvSpPr/>
-          <p:nvPr/>
-        </p:nvSpPr>
-        <p:spPr>
-          <a:xfrm>
-            <a:off x="457200" y="3840480"/>
-            <a:ext cx="8229600" cy="365760"/>
-          </a:xfrm>
-          <a:prstGeom prst="rect">
-            <a:avLst/>
-          </a:prstGeom>
-          <a:noFill/>
-          <a:ln/>
-        </p:spPr>
-        <p:txBody>
-          <a:bodyPr wrap="square" rtlCol="0" anchor="ctr"/>
-          <a:lstStyle/>
-          <a:p>
-            <a:pPr algn="ctr" indent="0" marL="0">
-              <a:buNone/>
-            </a:pPr>
-            <a:r>
-              <a:rPr lang="en-US" sz="1100" dirty="0">
-                <a:solidFill>
-                  <a:srgbClr val="707070"/>
-                </a:solidFill>
-              </a:rPr>
-              <a:t>Next: Check your email for a follow-up with resources and our community link.</a:t>
-            </a:r>
-            <a:endParaRPr lang="en-US" sz="1100" dirty="0"/>
-          </a:p>
-        </p:txBody>
-      </p:sp>
-      <p:sp>
-        <p:nvSpPr>
-          <p:cNvPr id="8" name="Text 6"/>
-          <p:cNvSpPr/>
-          <p:nvPr/>
-        </p:nvSpPr>
-        <p:spPr>
-          <a:xfrm>
-            <a:off x="457200" y="4572000"/>
-            <a:ext cx="8229600" cy="365760"/>
-          </a:xfrm>
-          <a:prstGeom prst="rect">
-            <a:avLst/>
-          </a:prstGeom>
-          <a:noFill/>
-          <a:ln/>
-        </p:spPr>
-        <p:txBody>
-          <a:bodyPr wrap="square" rtlCol="0" anchor="ctr"/>
-          <a:lstStyle/>
-          <a:p>
-            <a:pPr algn="ctr" indent="0" marL="0">
-              <a:buNone/>
-            </a:pPr>
-            <a:r>
-              <a:rPr lang="en-US" sz="1200" b="1" dirty="0">
-                <a:solidFill>
-                  <a:srgbClr val="707070"/>
-                </a:solidFill>
-              </a:rPr>
-              <a:t>Stringfest Analytics</a:t>
-            </a:r>
-            <a:endParaRPr lang="en-US" sz="1200" dirty="0"/>
-          </a:p>
-        </p:txBody>
-      </p:sp>
-      <p:sp>
-        <p:nvSpPr>
-          <p:cNvPr id="9" name="Shape 7"/>
-          <p:cNvSpPr/>
-          <p:nvPr/>
-        </p:nvSpPr>
-        <p:spPr>
-          <a:xfrm>
-            <a:off x="8046720" y="4389120"/>
-            <a:ext cx="274320" cy="274320"/>
+          <p:cNvPr id="11" name="Shape 9"/>
+          <p:cNvSpPr/>
+          <p:nvPr/>
+        </p:nvSpPr>
+        <p:spPr>
+          <a:xfrm>
+            <a:off x="8503920" y="4572000"/>
+            <a:ext cx="182880" cy="182880"/>
           </a:xfrm>
           <a:prstGeom prst="triangle">
             <a:avLst/>
@@ -12769,14 +13001,14 @@
       </p:sp>
       <p:sp>
         <p:nvSpPr>
-          <p:cNvPr id="10" name="Shape 8"/>
-          <p:cNvSpPr/>
-          <p:nvPr/>
-        </p:nvSpPr>
-        <p:spPr>
-          <a:xfrm>
-            <a:off x="8275320" y="4617720"/>
-            <a:ext cx="274320" cy="274320"/>
+          <p:cNvPr id="12" name="Shape 10"/>
+          <p:cNvSpPr/>
+          <p:nvPr/>
+        </p:nvSpPr>
+        <p:spPr>
+          <a:xfrm>
+            <a:off x="8668512" y="4736592"/>
+            <a:ext cx="182880" cy="182880"/>
           </a:xfrm>
           <a:prstGeom prst="triangle">
             <a:avLst/>
@@ -12789,14 +13021,14 @@
       </p:sp>
       <p:sp>
         <p:nvSpPr>
-          <p:cNvPr id="11" name="Shape 9"/>
-          <p:cNvSpPr/>
-          <p:nvPr/>
-        </p:nvSpPr>
-        <p:spPr>
-          <a:xfrm>
-            <a:off x="8503920" y="4846320"/>
-            <a:ext cx="274320" cy="274320"/>
+          <p:cNvPr id="13" name="Shape 11"/>
+          <p:cNvSpPr/>
+          <p:nvPr/>
+        </p:nvSpPr>
+        <p:spPr>
+          <a:xfrm>
+            <a:off x="8833104" y="4901184"/>
+            <a:ext cx="182880" cy="182880"/>
           </a:xfrm>
           <a:prstGeom prst="triangle">
             <a:avLst/>
@@ -13037,8 +13269,8 @@
         </p:nvSpPr>
         <p:spPr>
           <a:xfrm>
-            <a:off x="8046720" y="4389120"/>
-            <a:ext cx="274320" cy="274320"/>
+            <a:off x="8503920" y="4572000"/>
+            <a:ext cx="182880" cy="182880"/>
           </a:xfrm>
           <a:prstGeom prst="triangle">
             <a:avLst/>
@@ -13057,8 +13289,8 @@
         </p:nvSpPr>
         <p:spPr>
           <a:xfrm>
-            <a:off x="8275320" y="4617720"/>
-            <a:ext cx="274320" cy="274320"/>
+            <a:off x="8668512" y="4736592"/>
+            <a:ext cx="182880" cy="182880"/>
           </a:xfrm>
           <a:prstGeom prst="triangle">
             <a:avLst/>
@@ -13077,8 +13309,8 @@
         </p:nvSpPr>
         <p:spPr>
           <a:xfrm>
-            <a:off x="8503920" y="4846320"/>
-            <a:ext cx="274320" cy="274320"/>
+            <a:off x="8833104" y="4901184"/>
+            <a:ext cx="182880" cy="182880"/>
           </a:xfrm>
           <a:prstGeom prst="triangle">
             <a:avLst/>
@@ -13130,7 +13362,7 @@
         <p:spPr>
           <a:xfrm>
             <a:off x="0" y="0"/>
-            <a:ext cx="9144000" cy="685800"/>
+            <a:ext cx="9144000" cy="731520"/>
           </a:xfrm>
           <a:prstGeom prst="rect">
             <a:avLst/>
@@ -13149,7 +13381,7 @@
         </p:nvSpPr>
         <p:spPr>
           <a:xfrm>
-            <a:off x="457200" y="109728"/>
+            <a:off x="457200" y="137160"/>
             <a:ext cx="8229600" cy="457200"/>
           </a:xfrm>
           <a:prstGeom prst="rect">
@@ -13162,11 +13394,11 @@
           <a:bodyPr wrap="square" rtlCol="0" anchor="ctr"/>
           <a:lstStyle/>
           <a:p>
-            <a:pPr indent="0" marL="0">
-              <a:buNone/>
-            </a:pPr>
-            <a:r>
-              <a:rPr lang="en-US" sz="2800" b="1" dirty="0">
+            <a:pPr algn="ctr" indent="0" marL="0">
+              <a:buNone/>
+            </a:pPr>
+            <a:r>
+              <a:rPr lang="en-US" sz="3600" b="1" dirty="0">
                 <a:solidFill>
                   <a:srgbClr val="FFFFFF"/>
                 </a:solidFill>
@@ -13174,9 +13406,9 @@
                 <a:ea typeface="Arial Black" pitchFamily="34" charset="-122"/>
                 <a:cs typeface="Arial Black" pitchFamily="34" charset="-120"/>
               </a:rPr>
-              <a:t>Resources &amp; Questions</a:t>
-            </a:r>
-            <a:endParaRPr lang="en-US" sz="2800" dirty="0"/>
+              <a:t>Thank You</a:t>
+            </a:r>
+            <a:endParaRPr lang="en-US" sz="3600" dirty="0"/>
           </a:p>
         </p:txBody>
       </p:sp>
@@ -13188,382 +13420,327 @@
         </p:nvSpPr>
         <p:spPr>
           <a:xfrm>
-            <a:off x="457200" y="1005840"/>
-            <a:ext cx="8229600" cy="274320"/>
-          </a:xfrm>
-          <a:prstGeom prst="rect">
-            <a:avLst/>
-          </a:prstGeom>
-          <a:noFill/>
-          <a:ln/>
-        </p:spPr>
-        <p:txBody>
-          <a:bodyPr wrap="square" rtlCol="0" anchor="ctr"/>
-          <a:lstStyle/>
-          <a:p>
-            <a:pPr indent="0" marL="0">
-              <a:buNone/>
-            </a:pPr>
-            <a:r>
-              <a:rPr lang="en-US" sz="1300" b="1" dirty="0">
-                <a:solidFill>
-                  <a:srgbClr val="CF3338"/>
+            <a:off x="457200" y="1188720"/>
+            <a:ext cx="8229600" cy="365760"/>
+          </a:xfrm>
+          <a:prstGeom prst="rect">
+            <a:avLst/>
+          </a:prstGeom>
+          <a:noFill/>
+          <a:ln/>
+        </p:spPr>
+        <p:txBody>
+          <a:bodyPr wrap="square" rtlCol="0" anchor="ctr"/>
+          <a:lstStyle/>
+          <a:p>
+            <a:pPr algn="ctr" indent="0" marL="0">
+              <a:buNone/>
+            </a:pPr>
+            <a:r>
+              <a:rPr lang="en-US" sz="1600" dirty="0">
+                <a:solidFill>
+                  <a:srgbClr val="1F2120"/>
+                </a:solidFill>
+              </a:rPr>
+              <a:t>You now have a repeatable system.</a:t>
+            </a:r>
+            <a:endParaRPr lang="en-US" sz="1600" dirty="0"/>
+          </a:p>
+        </p:txBody>
+      </p:sp>
+      <p:sp>
+        <p:nvSpPr>
+          <p:cNvPr id="5" name="Shape 3"/>
+          <p:cNvSpPr/>
+          <p:nvPr/>
+        </p:nvSpPr>
+        <p:spPr>
+          <a:xfrm>
+            <a:off x="1371600" y="1737360"/>
+            <a:ext cx="6400800" cy="1828800"/>
+          </a:xfrm>
+          <a:prstGeom prst="rect">
+            <a:avLst/>
+          </a:prstGeom>
+          <a:solidFill>
+            <a:srgbClr val="EEECE1"/>
+          </a:solidFill>
+          <a:ln w="25400">
+            <a:solidFill>
+              <a:srgbClr val="CF3338"/>
+            </a:solidFill>
+            <a:prstDash val="solid"/>
+          </a:ln>
+        </p:spPr>
+      </p:sp>
+      <p:sp>
+        <p:nvSpPr>
+          <p:cNvPr id="6" name="Text 4"/>
+          <p:cNvSpPr/>
+          <p:nvPr/>
+        </p:nvSpPr>
+        <p:spPr>
+          <a:xfrm>
+            <a:off x="1554480" y="1920240"/>
+            <a:ext cx="6035040" cy="1463040"/>
+          </a:xfrm>
+          <a:prstGeom prst="rect">
+            <a:avLst/>
+          </a:prstGeom>
+          <a:noFill/>
+          <a:ln/>
+        </p:spPr>
+        <p:txBody>
+          <a:bodyPr wrap="square" rtlCol="0" anchor="ctr"/>
+          <a:lstStyle/>
+          <a:p>
+            <a:pPr algn="ctr" indent="0" marL="0">
+              <a:buNone/>
+            </a:pPr>
+            <a:r>
+              <a:rPr lang="en-US" sz="1200" dirty="0">
+                <a:solidFill>
+                  <a:srgbClr val="1F2120"/>
+                </a:solidFill>
+              </a:rPr>
+              <a:t>SAFE Framework → 2×2 Matrix → Exposure &amp; Frequency → IA-AI Deployment → Your Commitment</a:t>
+            </a:r>
+            <a:endParaRPr lang="en-US" sz="1200" dirty="0"/>
+          </a:p>
+        </p:txBody>
+      </p:sp>
+      <p:sp>
+        <p:nvSpPr>
+          <p:cNvPr id="7" name="Text 5"/>
+          <p:cNvSpPr/>
+          <p:nvPr/>
+        </p:nvSpPr>
+        <p:spPr>
+          <a:xfrm>
+            <a:off x="457200" y="3840480"/>
+            <a:ext cx="8229600" cy="365760"/>
+          </a:xfrm>
+          <a:prstGeom prst="rect">
+            <a:avLst/>
+          </a:prstGeom>
+          <a:noFill/>
+          <a:ln/>
+        </p:spPr>
+        <p:txBody>
+          <a:bodyPr wrap="square" rtlCol="0" anchor="ctr"/>
+          <a:lstStyle/>
+          <a:p>
+            <a:pPr algn="ctr" indent="0" marL="0">
+              <a:buNone/>
+            </a:pPr>
+            <a:r>
+              <a:rPr lang="en-US" sz="1100" dirty="0">
+                <a:solidFill>
+                  <a:srgbClr val="707070"/>
+                </a:solidFill>
+              </a:rPr>
+              <a:t>Next: Check your email for a follow-up with resources and our community link.</a:t>
+            </a:r>
+            <a:endParaRPr lang="en-US" sz="1100" dirty="0"/>
+          </a:p>
+        </p:txBody>
+      </p:sp>
+      <p:sp>
+        <p:nvSpPr>
+          <p:cNvPr id="8" name="Text 6"/>
+          <p:cNvSpPr/>
+          <p:nvPr/>
+        </p:nvSpPr>
+        <p:spPr>
+          <a:xfrm>
+            <a:off x="457200" y="4572000"/>
+            <a:ext cx="8229600" cy="365760"/>
+          </a:xfrm>
+          <a:prstGeom prst="rect">
+            <a:avLst/>
+          </a:prstGeom>
+          <a:noFill/>
+          <a:ln/>
+        </p:spPr>
+        <p:txBody>
+          <a:bodyPr wrap="square" rtlCol="0" anchor="ctr"/>
+          <a:lstStyle/>
+          <a:p>
+            <a:pPr algn="ctr" indent="0" marL="0">
+              <a:buNone/>
+            </a:pPr>
+            <a:r>
+              <a:rPr lang="en-US" sz="1200" b="1" dirty="0">
+                <a:solidFill>
+                  <a:srgbClr val="707070"/>
+                </a:solidFill>
+              </a:rPr>
+              <a:t>Stringfest Analytics</a:t>
+            </a:r>
+            <a:endParaRPr lang="en-US" sz="1200" dirty="0"/>
+          </a:p>
+        </p:txBody>
+      </p:sp>
+      <p:sp>
+        <p:nvSpPr>
+          <p:cNvPr id="9" name="Shape 7"/>
+          <p:cNvSpPr/>
+          <p:nvPr/>
+        </p:nvSpPr>
+        <p:spPr>
+          <a:xfrm>
+            <a:off x="8503920" y="4572000"/>
+            <a:ext cx="182880" cy="182880"/>
+          </a:xfrm>
+          <a:prstGeom prst="triangle">
+            <a:avLst/>
+          </a:prstGeom>
+          <a:solidFill>
+            <a:srgbClr val="CF3338"/>
+          </a:solidFill>
+          <a:ln/>
+        </p:spPr>
+      </p:sp>
+      <p:sp>
+        <p:nvSpPr>
+          <p:cNvPr id="10" name="Shape 8"/>
+          <p:cNvSpPr/>
+          <p:nvPr/>
+        </p:nvSpPr>
+        <p:spPr>
+          <a:xfrm>
+            <a:off x="8668512" y="4736592"/>
+            <a:ext cx="182880" cy="182880"/>
+          </a:xfrm>
+          <a:prstGeom prst="triangle">
+            <a:avLst/>
+          </a:prstGeom>
+          <a:solidFill>
+            <a:srgbClr val="CF3338"/>
+          </a:solidFill>
+          <a:ln/>
+        </p:spPr>
+      </p:sp>
+      <p:sp>
+        <p:nvSpPr>
+          <p:cNvPr id="11" name="Shape 9"/>
+          <p:cNvSpPr/>
+          <p:nvPr/>
+        </p:nvSpPr>
+        <p:spPr>
+          <a:xfrm>
+            <a:off x="8833104" y="4901184"/>
+            <a:ext cx="182880" cy="182880"/>
+          </a:xfrm>
+          <a:prstGeom prst="triangle">
+            <a:avLst/>
+          </a:prstGeom>
+          <a:solidFill>
+            <a:srgbClr val="CF3338"/>
+          </a:solidFill>
+          <a:ln/>
+        </p:spPr>
+      </p:sp>
+    </p:spTree>
+  </p:cSld>
+  <p:clrMapOvr>
+    <a:masterClrMapping/>
+  </p:clrMapOvr>
+</p:sld>
+</file>
+
+<file path=ppt/slides/slide31.xml><?xml version="1.0" encoding="utf-8"?>
+<p:sld xmlns:a="http://schemas.openxmlformats.org/drawingml/2006/main" xmlns:r="http://schemas.openxmlformats.org/officeDocument/2006/relationships" xmlns:p="http://schemas.openxmlformats.org/presentationml/2006/main">
+  <p:cSld name="Slide 31">
+    <p:bg>
+      <p:bgPr>
+        <a:solidFill>
+          <a:srgbClr val="EEECE1"/>
+        </a:solidFill>
+      </p:bgPr>
+    </p:bg>
+    <p:spTree>
+      <p:nvGrpSpPr>
+        <p:cNvPr id="1" name=""/>
+        <p:cNvGrpSpPr/>
+        <p:nvPr/>
+      </p:nvGrpSpPr>
+      <p:grpSpPr>
+        <a:xfrm>
+          <a:off x="0" y="0"/>
+          <a:ext cx="0" cy="0"/>
+          <a:chOff x="0" y="0"/>
+          <a:chExt cx="0" cy="0"/>
+        </a:xfrm>
+      </p:grpSpPr>
+      <p:sp>
+        <p:nvSpPr>
+          <p:cNvPr id="2" name="Shape 0"/>
+          <p:cNvSpPr/>
+          <p:nvPr/>
+        </p:nvSpPr>
+        <p:spPr>
+          <a:xfrm>
+            <a:off x="0" y="0"/>
+            <a:ext cx="9144000" cy="685800"/>
+          </a:xfrm>
+          <a:prstGeom prst="rect">
+            <a:avLst/>
+          </a:prstGeom>
+          <a:solidFill>
+            <a:srgbClr val="CF3338"/>
+          </a:solidFill>
+          <a:ln/>
+        </p:spPr>
+      </p:sp>
+      <p:sp>
+        <p:nvSpPr>
+          <p:cNvPr id="3" name="Text 1"/>
+          <p:cNvSpPr/>
+          <p:nvPr/>
+        </p:nvSpPr>
+        <p:spPr>
+          <a:xfrm>
+            <a:off x="457200" y="109728"/>
+            <a:ext cx="8229600" cy="457200"/>
+          </a:xfrm>
+          <a:prstGeom prst="rect">
+            <a:avLst/>
+          </a:prstGeom>
+          <a:noFill/>
+          <a:ln/>
+        </p:spPr>
+        <p:txBody>
+          <a:bodyPr wrap="square" rtlCol="0" anchor="ctr"/>
+          <a:lstStyle/>
+          <a:p>
+            <a:pPr indent="0" marL="0">
+              <a:buNone/>
+            </a:pPr>
+            <a:r>
+              <a:rPr lang="en-US" sz="2800" b="1" dirty="0">
+                <a:solidFill>
+                  <a:srgbClr val="FFFFFF"/>
                 </a:solidFill>
                 <a:latin typeface="Arial Black" pitchFamily="34" charset="0"/>
                 <a:ea typeface="Arial Black" pitchFamily="34" charset="-122"/>
                 <a:cs typeface="Arial Black" pitchFamily="34" charset="-120"/>
               </a:rPr>
-              <a:t>Free Tools Starter Kit:</a:t>
-            </a:r>
-            <a:endParaRPr lang="en-US" sz="1300" dirty="0"/>
-          </a:p>
-        </p:txBody>
-      </p:sp>
-      <p:sp>
-        <p:nvSpPr>
-          <p:cNvPr id="5" name="Shape 3"/>
-          <p:cNvSpPr/>
-          <p:nvPr/>
-        </p:nvSpPr>
-        <p:spPr>
-          <a:xfrm>
-            <a:off x="640080" y="1444752"/>
-            <a:ext cx="91440" cy="91440"/>
-          </a:xfrm>
-          <a:prstGeom prst="ellipse">
-            <a:avLst/>
-          </a:prstGeom>
-          <a:solidFill>
-            <a:srgbClr val="CF3338"/>
-          </a:solidFill>
-          <a:ln/>
-        </p:spPr>
-      </p:sp>
-      <p:sp>
-        <p:nvSpPr>
-          <p:cNvPr id="6" name="Text 4"/>
-          <p:cNvSpPr/>
-          <p:nvPr/>
-        </p:nvSpPr>
-        <p:spPr>
-          <a:xfrm>
-            <a:off x="1005840" y="1371600"/>
-            <a:ext cx="7680960" cy="274320"/>
-          </a:xfrm>
-          <a:prstGeom prst="rect">
-            <a:avLst/>
-          </a:prstGeom>
-          <a:noFill/>
-          <a:ln/>
-        </p:spPr>
-        <p:txBody>
-          <a:bodyPr wrap="square" rtlCol="0" anchor="ctr"/>
-          <a:lstStyle/>
-          <a:p>
-            <a:pPr indent="0" marL="0">
-              <a:buNone/>
-            </a:pPr>
-            <a:r>
-              <a:rPr lang="en-US" sz="1100" dirty="0">
-                <a:solidFill>
-                  <a:srgbClr val="1F2120"/>
-                </a:solidFill>
-              </a:rPr>
-              <a:t>ChatGPT free: openai.com/chatgpt</a:t>
-            </a:r>
-            <a:endParaRPr lang="en-US" sz="1100" dirty="0"/>
-          </a:p>
-        </p:txBody>
-      </p:sp>
-      <p:sp>
-        <p:nvSpPr>
-          <p:cNvPr id="7" name="Shape 5"/>
-          <p:cNvSpPr/>
-          <p:nvPr/>
-        </p:nvSpPr>
-        <p:spPr>
-          <a:xfrm>
-            <a:off x="640080" y="1764792"/>
-            <a:ext cx="91440" cy="91440"/>
-          </a:xfrm>
-          <a:prstGeom prst="ellipse">
-            <a:avLst/>
-          </a:prstGeom>
-          <a:solidFill>
-            <a:srgbClr val="CF3338"/>
-          </a:solidFill>
-          <a:ln/>
-        </p:spPr>
-      </p:sp>
-      <p:sp>
-        <p:nvSpPr>
-          <p:cNvPr id="8" name="Text 6"/>
-          <p:cNvSpPr/>
-          <p:nvPr/>
-        </p:nvSpPr>
-        <p:spPr>
-          <a:xfrm>
-            <a:off x="1005840" y="1691640"/>
-            <a:ext cx="7680960" cy="274320"/>
-          </a:xfrm>
-          <a:prstGeom prst="rect">
-            <a:avLst/>
-          </a:prstGeom>
-          <a:noFill/>
-          <a:ln/>
-        </p:spPr>
-        <p:txBody>
-          <a:bodyPr wrap="square" rtlCol="0" anchor="ctr"/>
-          <a:lstStyle/>
-          <a:p>
-            <a:pPr indent="0" marL="0">
-              <a:buNone/>
-            </a:pPr>
-            <a:r>
-              <a:rPr lang="en-US" sz="1100" dirty="0">
-                <a:solidFill>
-                  <a:srgbClr val="1F2120"/>
-                </a:solidFill>
-              </a:rPr>
-              <a:t>Claude free: claude.ai</a:t>
-            </a:r>
-            <a:endParaRPr lang="en-US" sz="1100" dirty="0"/>
-          </a:p>
-        </p:txBody>
-      </p:sp>
-      <p:sp>
-        <p:nvSpPr>
-          <p:cNvPr id="9" name="Shape 7"/>
-          <p:cNvSpPr/>
-          <p:nvPr/>
-        </p:nvSpPr>
-        <p:spPr>
-          <a:xfrm>
-            <a:off x="640080" y="2084832"/>
-            <a:ext cx="91440" cy="91440"/>
-          </a:xfrm>
-          <a:prstGeom prst="ellipse">
-            <a:avLst/>
-          </a:prstGeom>
-          <a:solidFill>
-            <a:srgbClr val="CF3338"/>
-          </a:solidFill>
-          <a:ln/>
-        </p:spPr>
-      </p:sp>
-      <p:sp>
-        <p:nvSpPr>
-          <p:cNvPr id="10" name="Text 8"/>
-          <p:cNvSpPr/>
-          <p:nvPr/>
-        </p:nvSpPr>
-        <p:spPr>
-          <a:xfrm>
-            <a:off x="1005840" y="2011680"/>
-            <a:ext cx="7680960" cy="274320"/>
-          </a:xfrm>
-          <a:prstGeom prst="rect">
-            <a:avLst/>
-          </a:prstGeom>
-          <a:noFill/>
-          <a:ln/>
-        </p:spPr>
-        <p:txBody>
-          <a:bodyPr wrap="square" rtlCol="0" anchor="ctr"/>
-          <a:lstStyle/>
-          <a:p>
-            <a:pPr indent="0" marL="0">
-              <a:buNone/>
-            </a:pPr>
-            <a:r>
-              <a:rPr lang="en-US" sz="1100" dirty="0">
-                <a:solidFill>
-                  <a:srgbClr val="1F2120"/>
-                </a:solidFill>
-              </a:rPr>
-              <a:t>Gemini free: google.com/gemini</a:t>
-            </a:r>
-            <a:endParaRPr lang="en-US" sz="1100" dirty="0"/>
-          </a:p>
-        </p:txBody>
-      </p:sp>
-      <p:sp>
-        <p:nvSpPr>
-          <p:cNvPr id="11" name="Shape 9"/>
-          <p:cNvSpPr/>
-          <p:nvPr/>
-        </p:nvSpPr>
-        <p:spPr>
-          <a:xfrm>
-            <a:off x="640080" y="2404872"/>
-            <a:ext cx="91440" cy="91440"/>
-          </a:xfrm>
-          <a:prstGeom prst="ellipse">
-            <a:avLst/>
-          </a:prstGeom>
-          <a:solidFill>
-            <a:srgbClr val="CF3338"/>
-          </a:solidFill>
-          <a:ln/>
-        </p:spPr>
-      </p:sp>
-      <p:sp>
-        <p:nvSpPr>
-          <p:cNvPr id="12" name="Text 10"/>
-          <p:cNvSpPr/>
-          <p:nvPr/>
-        </p:nvSpPr>
-        <p:spPr>
-          <a:xfrm>
-            <a:off x="1005840" y="2331720"/>
-            <a:ext cx="7680960" cy="274320"/>
-          </a:xfrm>
-          <a:prstGeom prst="rect">
-            <a:avLst/>
-          </a:prstGeom>
-          <a:noFill/>
-          <a:ln/>
-        </p:spPr>
-        <p:txBody>
-          <a:bodyPr wrap="square" rtlCol="0" anchor="ctr"/>
-          <a:lstStyle/>
-          <a:p>
-            <a:pPr indent="0" marL="0">
-              <a:buNone/>
-            </a:pPr>
-            <a:r>
-              <a:rPr lang="en-US" sz="1100" dirty="0">
-                <a:solidFill>
-                  <a:srgbClr val="1F2120"/>
-                </a:solidFill>
-              </a:rPr>
-              <a:t>Excel Copilot: microsoft.com/copilot</a:t>
-            </a:r>
-            <a:endParaRPr lang="en-US" sz="1100" dirty="0"/>
-          </a:p>
-        </p:txBody>
-      </p:sp>
-      <p:sp>
-        <p:nvSpPr>
-          <p:cNvPr id="13" name="Shape 11"/>
-          <p:cNvSpPr/>
-          <p:nvPr/>
-        </p:nvSpPr>
-        <p:spPr>
-          <a:xfrm>
-            <a:off x="640080" y="2724912"/>
-            <a:ext cx="91440" cy="91440"/>
-          </a:xfrm>
-          <a:prstGeom prst="ellipse">
-            <a:avLst/>
-          </a:prstGeom>
-          <a:solidFill>
-            <a:srgbClr val="CF3338"/>
-          </a:solidFill>
-          <a:ln/>
-        </p:spPr>
-      </p:sp>
-      <p:sp>
-        <p:nvSpPr>
-          <p:cNvPr id="14" name="Text 12"/>
-          <p:cNvSpPr/>
-          <p:nvPr/>
-        </p:nvSpPr>
-        <p:spPr>
-          <a:xfrm>
-            <a:off x="1005840" y="2651760"/>
-            <a:ext cx="7680960" cy="274320"/>
-          </a:xfrm>
-          <a:prstGeom prst="rect">
-            <a:avLst/>
-          </a:prstGeom>
-          <a:noFill/>
-          <a:ln/>
-        </p:spPr>
-        <p:txBody>
-          <a:bodyPr wrap="square" rtlCol="0" anchor="ctr"/>
-          <a:lstStyle/>
-          <a:p>
-            <a:pPr indent="0" marL="0">
-              <a:buNone/>
-            </a:pPr>
-            <a:r>
-              <a:rPr lang="en-US" sz="1100" dirty="0">
-                <a:solidFill>
-                  <a:srgbClr val="1F2120"/>
-                </a:solidFill>
-              </a:rPr>
-              <a:t>Zapier: zapier.com (first 100 tasks free)</a:t>
-            </a:r>
-            <a:endParaRPr lang="en-US" sz="1100" dirty="0"/>
-          </a:p>
-        </p:txBody>
-      </p:sp>
-      <p:sp>
-        <p:nvSpPr>
-          <p:cNvPr id="15" name="Shape 13"/>
-          <p:cNvSpPr/>
-          <p:nvPr/>
-        </p:nvSpPr>
-        <p:spPr>
-          <a:xfrm>
-            <a:off x="640080" y="3044952"/>
-            <a:ext cx="91440" cy="91440"/>
-          </a:xfrm>
-          <a:prstGeom prst="ellipse">
-            <a:avLst/>
-          </a:prstGeom>
-          <a:solidFill>
-            <a:srgbClr val="CF3338"/>
-          </a:solidFill>
-          <a:ln/>
-        </p:spPr>
-      </p:sp>
-      <p:sp>
-        <p:nvSpPr>
-          <p:cNvPr id="16" name="Text 14"/>
-          <p:cNvSpPr/>
-          <p:nvPr/>
-        </p:nvSpPr>
-        <p:spPr>
-          <a:xfrm>
-            <a:off x="1005840" y="2971800"/>
-            <a:ext cx="7680960" cy="274320"/>
-          </a:xfrm>
-          <a:prstGeom prst="rect">
-            <a:avLst/>
-          </a:prstGeom>
-          <a:noFill/>
-          <a:ln/>
-        </p:spPr>
-        <p:txBody>
-          <a:bodyPr wrap="square" rtlCol="0" anchor="ctr"/>
-          <a:lstStyle/>
-          <a:p>
-            <a:pPr indent="0" marL="0">
-              <a:buNone/>
-            </a:pPr>
-            <a:r>
-              <a:rPr lang="en-US" sz="1100" dirty="0">
-                <a:solidFill>
-                  <a:srgbClr val="1F2120"/>
-                </a:solidFill>
-              </a:rPr>
-              <a:t>Make: make.com (free trials available)</a:t>
-            </a:r>
-            <a:endParaRPr lang="en-US" sz="1100" dirty="0"/>
-          </a:p>
-        </p:txBody>
-      </p:sp>
-      <p:sp>
-        <p:nvSpPr>
-          <p:cNvPr id="17" name="Text 15"/>
-          <p:cNvSpPr/>
-          <p:nvPr/>
-        </p:nvSpPr>
-        <p:spPr>
-          <a:xfrm>
-            <a:off x="457200" y="3108960"/>
+              <a:t>Resources &amp; Questions</a:t>
+            </a:r>
+            <a:endParaRPr lang="en-US" sz="2800" dirty="0"/>
+          </a:p>
+        </p:txBody>
+      </p:sp>
+      <p:sp>
+        <p:nvSpPr>
+          <p:cNvPr id="4" name="Text 2"/>
+          <p:cNvSpPr/>
+          <p:nvPr/>
+        </p:nvSpPr>
+        <p:spPr>
+          <a:xfrm>
+            <a:off x="457200" y="1005840"/>
             <a:ext cx="8229600" cy="274320"/>
           </a:xfrm>
           <a:prstGeom prst="rect">
@@ -13588,7 +13765,7 @@
                 <a:ea typeface="Arial Black" pitchFamily="34" charset="-122"/>
                 <a:cs typeface="Arial Black" pitchFamily="34" charset="-120"/>
               </a:rPr>
-              <a:t>Recommended Reading:</a:t>
+              <a:t>Common AI Tools by Category:</a:t>
             </a:r>
             <a:endParaRPr lang="en-US" sz="1300" dirty="0"/>
           </a:p>
@@ -13596,66 +13773,402 @@
       </p:sp>
       <p:sp>
         <p:nvSpPr>
+          <p:cNvPr id="5" name="Shape 3"/>
+          <p:cNvSpPr/>
+          <p:nvPr/>
+        </p:nvSpPr>
+        <p:spPr>
+          <a:xfrm>
+            <a:off x="640080" y="1444752"/>
+            <a:ext cx="91440" cy="91440"/>
+          </a:xfrm>
+          <a:prstGeom prst="ellipse">
+            <a:avLst/>
+          </a:prstGeom>
+          <a:solidFill>
+            <a:srgbClr val="CF3338"/>
+          </a:solidFill>
+          <a:ln/>
+        </p:spPr>
+      </p:sp>
+      <p:sp>
+        <p:nvSpPr>
+          <p:cNvPr id="6" name="Text 4"/>
+          <p:cNvSpPr/>
+          <p:nvPr/>
+        </p:nvSpPr>
+        <p:spPr>
+          <a:xfrm>
+            <a:off x="1005840" y="1371600"/>
+            <a:ext cx="7680960" cy="274320"/>
+          </a:xfrm>
+          <a:prstGeom prst="rect">
+            <a:avLst/>
+          </a:prstGeom>
+          <a:noFill/>
+          <a:ln/>
+        </p:spPr>
+        <p:txBody>
+          <a:bodyPr wrap="square" rtlCol="0" anchor="ctr"/>
+          <a:lstStyle/>
+          <a:p>
+            <a:pPr indent="0" marL="0">
+              <a:buNone/>
+            </a:pPr>
+            <a:r>
+              <a:rPr lang="en-US" sz="1100" dirty="0">
+                <a:solidFill>
+                  <a:srgbClr val="1F2120"/>
+                </a:solidFill>
+              </a:rPr>
+              <a:t>ChatGPT: openai.com/chatgpt</a:t>
+            </a:r>
+            <a:endParaRPr lang="en-US" sz="1100" dirty="0"/>
+          </a:p>
+        </p:txBody>
+      </p:sp>
+      <p:sp>
+        <p:nvSpPr>
+          <p:cNvPr id="7" name="Shape 5"/>
+          <p:cNvSpPr/>
+          <p:nvPr/>
+        </p:nvSpPr>
+        <p:spPr>
+          <a:xfrm>
+            <a:off x="640080" y="1764792"/>
+            <a:ext cx="91440" cy="91440"/>
+          </a:xfrm>
+          <a:prstGeom prst="ellipse">
+            <a:avLst/>
+          </a:prstGeom>
+          <a:solidFill>
+            <a:srgbClr val="CF3338"/>
+          </a:solidFill>
+          <a:ln/>
+        </p:spPr>
+      </p:sp>
+      <p:sp>
+        <p:nvSpPr>
+          <p:cNvPr id="8" name="Text 6"/>
+          <p:cNvSpPr/>
+          <p:nvPr/>
+        </p:nvSpPr>
+        <p:spPr>
+          <a:xfrm>
+            <a:off x="1005840" y="1691640"/>
+            <a:ext cx="7680960" cy="274320"/>
+          </a:xfrm>
+          <a:prstGeom prst="rect">
+            <a:avLst/>
+          </a:prstGeom>
+          <a:noFill/>
+          <a:ln/>
+        </p:spPr>
+        <p:txBody>
+          <a:bodyPr wrap="square" rtlCol="0" anchor="ctr"/>
+          <a:lstStyle/>
+          <a:p>
+            <a:pPr indent="0" marL="0">
+              <a:buNone/>
+            </a:pPr>
+            <a:r>
+              <a:rPr lang="en-US" sz="1100" dirty="0">
+                <a:solidFill>
+                  <a:srgbClr val="1F2120"/>
+                </a:solidFill>
+              </a:rPr>
+              <a:t>Claude: claude.ai</a:t>
+            </a:r>
+            <a:endParaRPr lang="en-US" sz="1100" dirty="0"/>
+          </a:p>
+        </p:txBody>
+      </p:sp>
+      <p:sp>
+        <p:nvSpPr>
+          <p:cNvPr id="9" name="Shape 7"/>
+          <p:cNvSpPr/>
+          <p:nvPr/>
+        </p:nvSpPr>
+        <p:spPr>
+          <a:xfrm>
+            <a:off x="640080" y="2084832"/>
+            <a:ext cx="91440" cy="91440"/>
+          </a:xfrm>
+          <a:prstGeom prst="ellipse">
+            <a:avLst/>
+          </a:prstGeom>
+          <a:solidFill>
+            <a:srgbClr val="CF3338"/>
+          </a:solidFill>
+          <a:ln/>
+        </p:spPr>
+      </p:sp>
+      <p:sp>
+        <p:nvSpPr>
+          <p:cNvPr id="10" name="Text 8"/>
+          <p:cNvSpPr/>
+          <p:nvPr/>
+        </p:nvSpPr>
+        <p:spPr>
+          <a:xfrm>
+            <a:off x="1005840" y="2011680"/>
+            <a:ext cx="7680960" cy="274320"/>
+          </a:xfrm>
+          <a:prstGeom prst="rect">
+            <a:avLst/>
+          </a:prstGeom>
+          <a:noFill/>
+          <a:ln/>
+        </p:spPr>
+        <p:txBody>
+          <a:bodyPr wrap="square" rtlCol="0" anchor="ctr"/>
+          <a:lstStyle/>
+          <a:p>
+            <a:pPr indent="0" marL="0">
+              <a:buNone/>
+            </a:pPr>
+            <a:r>
+              <a:rPr lang="en-US" sz="1100" dirty="0">
+                <a:solidFill>
+                  <a:srgbClr val="1F2120"/>
+                </a:solidFill>
+              </a:rPr>
+              <a:t>Gemini: google.com/gemini</a:t>
+            </a:r>
+            <a:endParaRPr lang="en-US" sz="1100" dirty="0"/>
+          </a:p>
+        </p:txBody>
+      </p:sp>
+      <p:sp>
+        <p:nvSpPr>
+          <p:cNvPr id="11" name="Shape 9"/>
+          <p:cNvSpPr/>
+          <p:nvPr/>
+        </p:nvSpPr>
+        <p:spPr>
+          <a:xfrm>
+            <a:off x="640080" y="2404872"/>
+            <a:ext cx="91440" cy="91440"/>
+          </a:xfrm>
+          <a:prstGeom prst="ellipse">
+            <a:avLst/>
+          </a:prstGeom>
+          <a:solidFill>
+            <a:srgbClr val="CF3338"/>
+          </a:solidFill>
+          <a:ln/>
+        </p:spPr>
+      </p:sp>
+      <p:sp>
+        <p:nvSpPr>
+          <p:cNvPr id="12" name="Text 10"/>
+          <p:cNvSpPr/>
+          <p:nvPr/>
+        </p:nvSpPr>
+        <p:spPr>
+          <a:xfrm>
+            <a:off x="1005840" y="2331720"/>
+            <a:ext cx="7680960" cy="274320"/>
+          </a:xfrm>
+          <a:prstGeom prst="rect">
+            <a:avLst/>
+          </a:prstGeom>
+          <a:noFill/>
+          <a:ln/>
+        </p:spPr>
+        <p:txBody>
+          <a:bodyPr wrap="square" rtlCol="0" anchor="ctr"/>
+          <a:lstStyle/>
+          <a:p>
+            <a:pPr indent="0" marL="0">
+              <a:buNone/>
+            </a:pPr>
+            <a:r>
+              <a:rPr lang="en-US" sz="1100" dirty="0">
+                <a:solidFill>
+                  <a:srgbClr val="1F2120"/>
+                </a:solidFill>
+              </a:rPr>
+              <a:t>Excel Copilot: microsoft.com/copilot</a:t>
+            </a:r>
+            <a:endParaRPr lang="en-US" sz="1100" dirty="0"/>
+          </a:p>
+        </p:txBody>
+      </p:sp>
+      <p:sp>
+        <p:nvSpPr>
+          <p:cNvPr id="13" name="Shape 11"/>
+          <p:cNvSpPr/>
+          <p:nvPr/>
+        </p:nvSpPr>
+        <p:spPr>
+          <a:xfrm>
+            <a:off x="640080" y="2724912"/>
+            <a:ext cx="91440" cy="91440"/>
+          </a:xfrm>
+          <a:prstGeom prst="ellipse">
+            <a:avLst/>
+          </a:prstGeom>
+          <a:solidFill>
+            <a:srgbClr val="CF3338"/>
+          </a:solidFill>
+          <a:ln/>
+        </p:spPr>
+      </p:sp>
+      <p:sp>
+        <p:nvSpPr>
+          <p:cNvPr id="14" name="Text 12"/>
+          <p:cNvSpPr/>
+          <p:nvPr/>
+        </p:nvSpPr>
+        <p:spPr>
+          <a:xfrm>
+            <a:off x="1005840" y="2651760"/>
+            <a:ext cx="7680960" cy="274320"/>
+          </a:xfrm>
+          <a:prstGeom prst="rect">
+            <a:avLst/>
+          </a:prstGeom>
+          <a:noFill/>
+          <a:ln/>
+        </p:spPr>
+        <p:txBody>
+          <a:bodyPr wrap="square" rtlCol="0" anchor="ctr"/>
+          <a:lstStyle/>
+          <a:p>
+            <a:pPr indent="0" marL="0">
+              <a:buNone/>
+            </a:pPr>
+            <a:r>
+              <a:rPr lang="en-US" sz="1100" dirty="0">
+                <a:solidFill>
+                  <a:srgbClr val="1F2120"/>
+                </a:solidFill>
+              </a:rPr>
+              <a:t>Zapier: zapier.com</a:t>
+            </a:r>
+            <a:endParaRPr lang="en-US" sz="1100" dirty="0"/>
+          </a:p>
+        </p:txBody>
+      </p:sp>
+      <p:sp>
+        <p:nvSpPr>
+          <p:cNvPr id="15" name="Shape 13"/>
+          <p:cNvSpPr/>
+          <p:nvPr/>
+        </p:nvSpPr>
+        <p:spPr>
+          <a:xfrm>
+            <a:off x="640080" y="3044952"/>
+            <a:ext cx="91440" cy="91440"/>
+          </a:xfrm>
+          <a:prstGeom prst="ellipse">
+            <a:avLst/>
+          </a:prstGeom>
+          <a:solidFill>
+            <a:srgbClr val="CF3338"/>
+          </a:solidFill>
+          <a:ln/>
+        </p:spPr>
+      </p:sp>
+      <p:sp>
+        <p:nvSpPr>
+          <p:cNvPr id="16" name="Text 14"/>
+          <p:cNvSpPr/>
+          <p:nvPr/>
+        </p:nvSpPr>
+        <p:spPr>
+          <a:xfrm>
+            <a:off x="1005840" y="2971800"/>
+            <a:ext cx="7680960" cy="274320"/>
+          </a:xfrm>
+          <a:prstGeom prst="rect">
+            <a:avLst/>
+          </a:prstGeom>
+          <a:noFill/>
+          <a:ln/>
+        </p:spPr>
+        <p:txBody>
+          <a:bodyPr wrap="square" rtlCol="0" anchor="ctr"/>
+          <a:lstStyle/>
+          <a:p>
+            <a:pPr indent="0" marL="0">
+              <a:buNone/>
+            </a:pPr>
+            <a:r>
+              <a:rPr lang="en-US" sz="1100" dirty="0">
+                <a:solidFill>
+                  <a:srgbClr val="1F2120"/>
+                </a:solidFill>
+              </a:rPr>
+              <a:t>Make: make.com</a:t>
+            </a:r>
+            <a:endParaRPr lang="en-US" sz="1100" dirty="0"/>
+          </a:p>
+        </p:txBody>
+      </p:sp>
+      <p:sp>
+        <p:nvSpPr>
+          <p:cNvPr id="17" name="Text 15"/>
+          <p:cNvSpPr/>
+          <p:nvPr/>
+        </p:nvSpPr>
+        <p:spPr>
+          <a:xfrm>
+            <a:off x="457200" y="2971800"/>
+            <a:ext cx="8229600" cy="365760"/>
+          </a:xfrm>
+          <a:prstGeom prst="rect">
+            <a:avLst/>
+          </a:prstGeom>
+          <a:noFill/>
+          <a:ln/>
+        </p:spPr>
+        <p:txBody>
+          <a:bodyPr wrap="square" rtlCol="0" anchor="ctr"/>
+          <a:lstStyle/>
+          <a:p>
+            <a:pPr indent="0" marL="0">
+              <a:buNone/>
+            </a:pPr>
+            <a:r>
+              <a:rPr lang="en-US" sz="1100" i="1" dirty="0">
+                <a:solidFill>
+                  <a:srgbClr val="707070"/>
+                </a:solidFill>
+              </a:rPr>
+              <a:t>Always verify tool approvals with your IT/security team before using on work data.</a:t>
+            </a:r>
+            <a:endParaRPr lang="en-US" sz="1100" dirty="0"/>
+          </a:p>
+        </p:txBody>
+      </p:sp>
+      <p:sp>
+        <p:nvSpPr>
           <p:cNvPr id="18" name="Text 16"/>
           <p:cNvSpPr/>
           <p:nvPr/>
         </p:nvSpPr>
         <p:spPr>
           <a:xfrm>
-            <a:off x="1005840" y="3429000"/>
-            <a:ext cx="7680960" cy="274320"/>
-          </a:xfrm>
-          <a:prstGeom prst="rect">
-            <a:avLst/>
-          </a:prstGeom>
-          <a:noFill/>
-          <a:ln/>
-        </p:spPr>
-        <p:txBody>
-          <a:bodyPr wrap="square" rtlCol="0" anchor="ctr"/>
-          <a:lstStyle/>
-          <a:p>
-            <a:pPr indent="0" marL="0">
-              <a:buNone/>
-            </a:pPr>
-            <a:r>
-              <a:rPr lang="en-US" sz="1100" dirty="0">
-                <a:solidFill>
-                  <a:srgbClr val="1F2120"/>
-                </a:solidFill>
-              </a:rPr>
-              <a:t>The Profitable AI Advantage by Tobias Zwingmann (Wiley, 2025)</a:t>
-            </a:r>
-            <a:endParaRPr lang="en-US" sz="1100" dirty="0"/>
-          </a:p>
-        </p:txBody>
-      </p:sp>
-      <p:sp>
-        <p:nvSpPr>
-          <p:cNvPr id="19" name="Text 17"/>
-          <p:cNvSpPr/>
-          <p:nvPr/>
-        </p:nvSpPr>
-        <p:spPr>
-          <a:xfrm>
-            <a:off x="457200" y="3474720"/>
-            <a:ext cx="8229600" cy="320040"/>
-          </a:xfrm>
-          <a:prstGeom prst="rect">
-            <a:avLst/>
-          </a:prstGeom>
-          <a:noFill/>
-          <a:ln/>
-        </p:spPr>
-        <p:txBody>
-          <a:bodyPr wrap="square" rtlCol="0" anchor="ctr"/>
-          <a:lstStyle/>
-          <a:p>
-            <a:pPr indent="0" marL="0">
-              <a:buNone/>
-            </a:pPr>
-            <a:r>
-              <a:rPr lang="en-US" sz="1600" b="1" dirty="0">
+            <a:off x="457200" y="3429000"/>
+            <a:ext cx="8229600" cy="274320"/>
+          </a:xfrm>
+          <a:prstGeom prst="rect">
+            <a:avLst/>
+          </a:prstGeom>
+          <a:noFill/>
+          <a:ln/>
+        </p:spPr>
+        <p:txBody>
+          <a:bodyPr wrap="square" rtlCol="0" anchor="ctr"/>
+          <a:lstStyle/>
+          <a:p>
+            <a:pPr indent="0" marL="0">
+              <a:buNone/>
+            </a:pPr>
+            <a:r>
+              <a:rPr lang="en-US" sz="1300" b="1" dirty="0">
                 <a:solidFill>
                   <a:srgbClr val="CF3338"/>
                 </a:solidFill>
@@ -13663,9 +14176,45 @@
                 <a:ea typeface="Arial Black" pitchFamily="34" charset="-122"/>
                 <a:cs typeface="Arial Black" pitchFamily="34" charset="-120"/>
               </a:rPr>
-              <a:t>Questions?</a:t>
-            </a:r>
-            <a:endParaRPr lang="en-US" sz="1600" dirty="0"/>
+              <a:t>Recommended Reading:</a:t>
+            </a:r>
+            <a:endParaRPr lang="en-US" sz="1300" dirty="0"/>
+          </a:p>
+        </p:txBody>
+      </p:sp>
+      <p:sp>
+        <p:nvSpPr>
+          <p:cNvPr id="19" name="Text 17"/>
+          <p:cNvSpPr/>
+          <p:nvPr/>
+        </p:nvSpPr>
+        <p:spPr>
+          <a:xfrm>
+            <a:off x="1005840" y="3749040"/>
+            <a:ext cx="7680960" cy="274320"/>
+          </a:xfrm>
+          <a:prstGeom prst="rect">
+            <a:avLst/>
+          </a:prstGeom>
+          <a:noFill/>
+          <a:ln/>
+        </p:spPr>
+        <p:txBody>
+          <a:bodyPr wrap="square" rtlCol="0" anchor="ctr"/>
+          <a:lstStyle/>
+          <a:p>
+            <a:pPr indent="0" marL="0">
+              <a:buNone/>
+            </a:pPr>
+            <a:r>
+              <a:rPr lang="en-US" sz="1100" dirty="0">
+                <a:solidFill>
+                  <a:srgbClr val="1F2120"/>
+                </a:solidFill>
+              </a:rPr>
+              <a:t>The Profitable AI Advantage by Tobias Zwingmann (Packt, 2025)</a:t>
+            </a:r>
+            <a:endParaRPr lang="en-US" sz="1100" dirty="0"/>
           </a:p>
         </p:txBody>
       </p:sp>
@@ -13677,44 +14226,116 @@
         </p:nvSpPr>
         <p:spPr>
           <a:xfrm>
-            <a:off x="457200" y="3931920"/>
-            <a:ext cx="8229600" cy="640080"/>
-          </a:xfrm>
-          <a:prstGeom prst="rect">
-            <a:avLst/>
-          </a:prstGeom>
-          <a:noFill/>
-          <a:ln/>
-        </p:spPr>
-        <p:txBody>
-          <a:bodyPr wrap="square" rtlCol="0" anchor="ctr"/>
-          <a:lstStyle/>
-          <a:p>
-            <a:pPr indent="0" marL="0">
-              <a:buNone/>
-            </a:pPr>
-            <a:r>
-              <a:rPr lang="en-US" sz="1200" dirty="0">
+            <a:off x="1005840" y="4023360"/>
+            <a:ext cx="7680960" cy="228600"/>
+          </a:xfrm>
+          <a:prstGeom prst="rect">
+            <a:avLst/>
+          </a:prstGeom>
+          <a:noFill/>
+          <a:ln/>
+        </p:spPr>
+        <p:txBody>
+          <a:bodyPr wrap="square" rtlCol="0" anchor="ctr"/>
+          <a:lstStyle/>
+          <a:p>
+            <a:pPr indent="0" marL="0">
+              <a:buNone/>
+            </a:pPr>
+            <a:r>
+              <a:rPr lang="en-US" sz="1000" i="1" dirty="0">
+                <a:solidFill>
+                  <a:srgbClr val="707070"/>
+                </a:solidFill>
+              </a:rPr>
+              <a:t>Key concepts from this workshop adapted from Zwingmann's book:</a:t>
+            </a:r>
+            <a:endParaRPr lang="en-US" sz="1000" dirty="0"/>
+          </a:p>
+        </p:txBody>
+      </p:sp>
+      <p:sp>
+        <p:nvSpPr>
+          <p:cNvPr id="21" name="Text 19"/>
+          <p:cNvSpPr/>
+          <p:nvPr/>
+        </p:nvSpPr>
+        <p:spPr>
+          <a:xfrm>
+            <a:off x="1097280" y="4251960"/>
+            <a:ext cx="7589520" cy="320040"/>
+          </a:xfrm>
+          <a:prstGeom prst="rect">
+            <a:avLst/>
+          </a:prstGeom>
+          <a:noFill/>
+          <a:ln/>
+        </p:spPr>
+        <p:txBody>
+          <a:bodyPr wrap="square" rtlCol="0" anchor="ctr"/>
+          <a:lstStyle/>
+          <a:p>
+            <a:pPr indent="0" marL="0">
+              <a:buNone/>
+            </a:pPr>
+            <a:r>
+              <a:rPr lang="en-US" sz="900" dirty="0">
+                <a:solidFill>
+                  <a:srgbClr val="707070"/>
+                </a:solidFill>
+              </a:rPr>
+              <a:t>The IA-AI Framework (Assistants, Copilots, Autopilots, Agents) • The value threshold concept • AI value levers (Cost, Quality, Speed, Scalability)</a:t>
+            </a:r>
+            <a:endParaRPr lang="en-US" sz="900" dirty="0"/>
+          </a:p>
+        </p:txBody>
+      </p:sp>
+      <p:sp>
+        <p:nvSpPr>
+          <p:cNvPr id="22" name="Text 20"/>
+          <p:cNvSpPr/>
+          <p:nvPr/>
+        </p:nvSpPr>
+        <p:spPr>
+          <a:xfrm>
+            <a:off x="1005840" y="4617720"/>
+            <a:ext cx="7680960" cy="274320"/>
+          </a:xfrm>
+          <a:prstGeom prst="rect">
+            <a:avLst/>
+          </a:prstGeom>
+          <a:noFill/>
+          <a:ln/>
+        </p:spPr>
+        <p:txBody>
+          <a:bodyPr wrap="square" rtlCol="0" anchor="ctr"/>
+          <a:lstStyle/>
+          <a:p>
+            <a:pPr indent="0" marL="0">
+              <a:buNone/>
+            </a:pPr>
+            <a:r>
+              <a:rPr lang="en-US" sz="1100" dirty="0">
                 <a:solidFill>
                   <a:srgbClr val="1F2120"/>
                 </a:solidFill>
               </a:rPr>
-              <a:t>Let's stay for a few minutes if you have questions. Otherwise, you're good to go. Thank you.</a:t>
-            </a:r>
-            <a:endParaRPr lang="en-US" sz="1200" dirty="0"/>
-          </a:p>
-        </p:txBody>
-      </p:sp>
-      <p:sp>
-        <p:nvSpPr>
-          <p:cNvPr id="21" name="Shape 19"/>
-          <p:cNvSpPr/>
-          <p:nvPr/>
-        </p:nvSpPr>
-        <p:spPr>
-          <a:xfrm>
-            <a:off x="8046720" y="4389120"/>
-            <a:ext cx="274320" cy="274320"/>
+              <a:t>SAFE Framework: stringfestanalytics.com/when-to-use-ai-in-excel-and-when-you-absolutely-shouldnt/</a:t>
+            </a:r>
+            <a:endParaRPr lang="en-US" sz="1100" dirty="0"/>
+          </a:p>
+        </p:txBody>
+      </p:sp>
+      <p:sp>
+        <p:nvSpPr>
+          <p:cNvPr id="23" name="Shape 21"/>
+          <p:cNvSpPr/>
+          <p:nvPr/>
+        </p:nvSpPr>
+        <p:spPr>
+          <a:xfrm>
+            <a:off x="8503920" y="4572000"/>
+            <a:ext cx="182880" cy="182880"/>
           </a:xfrm>
           <a:prstGeom prst="triangle">
             <a:avLst/>
@@ -13727,14 +14348,14 @@
       </p:sp>
       <p:sp>
         <p:nvSpPr>
-          <p:cNvPr id="22" name="Shape 20"/>
-          <p:cNvSpPr/>
-          <p:nvPr/>
-        </p:nvSpPr>
-        <p:spPr>
-          <a:xfrm>
-            <a:off x="8275320" y="4617720"/>
-            <a:ext cx="274320" cy="274320"/>
+          <p:cNvPr id="24" name="Shape 22"/>
+          <p:cNvSpPr/>
+          <p:nvPr/>
+        </p:nvSpPr>
+        <p:spPr>
+          <a:xfrm>
+            <a:off x="8668512" y="4736592"/>
+            <a:ext cx="182880" cy="182880"/>
           </a:xfrm>
           <a:prstGeom prst="triangle">
             <a:avLst/>
@@ -13747,14 +14368,14 @@
       </p:sp>
       <p:sp>
         <p:nvSpPr>
-          <p:cNvPr id="23" name="Shape 21"/>
-          <p:cNvSpPr/>
-          <p:nvPr/>
-        </p:nvSpPr>
-        <p:spPr>
-          <a:xfrm>
-            <a:off x="8503920" y="4846320"/>
-            <a:ext cx="274320" cy="274320"/>
+          <p:cNvPr id="25" name="Shape 23"/>
+          <p:cNvSpPr/>
+          <p:nvPr/>
+        </p:nvSpPr>
+        <p:spPr>
+          <a:xfrm>
+            <a:off x="8833104" y="4901184"/>
+            <a:ext cx="182880" cy="182880"/>
           </a:xfrm>
           <a:prstGeom prst="triangle">
             <a:avLst/>
@@ -14168,8 +14789,8 @@
         </p:nvSpPr>
         <p:spPr>
           <a:xfrm>
-            <a:off x="8046720" y="4389120"/>
-            <a:ext cx="274320" cy="274320"/>
+            <a:off x="8503920" y="4572000"/>
+            <a:ext cx="182880" cy="182880"/>
           </a:xfrm>
           <a:prstGeom prst="triangle">
             <a:avLst/>
@@ -14188,8 +14809,8 @@
         </p:nvSpPr>
         <p:spPr>
           <a:xfrm>
-            <a:off x="8275320" y="4617720"/>
-            <a:ext cx="274320" cy="274320"/>
+            <a:off x="8668512" y="4736592"/>
+            <a:ext cx="182880" cy="182880"/>
           </a:xfrm>
           <a:prstGeom prst="triangle">
             <a:avLst/>
@@ -14208,8 +14829,8 @@
         </p:nvSpPr>
         <p:spPr>
           <a:xfrm>
-            <a:off x="8503920" y="4846320"/>
-            <a:ext cx="274320" cy="274320"/>
+            <a:off x="8833104" y="4901184"/>
+            <a:ext cx="182880" cy="182880"/>
           </a:xfrm>
           <a:prstGeom prst="triangle">
             <a:avLst/>
@@ -14946,8 +15567,8 @@
         </p:nvSpPr>
         <p:spPr>
           <a:xfrm>
-            <a:off x="8046720" y="4389120"/>
-            <a:ext cx="274320" cy="274320"/>
+            <a:off x="8503920" y="4572000"/>
+            <a:ext cx="182880" cy="182880"/>
           </a:xfrm>
           <a:prstGeom prst="triangle">
             <a:avLst/>
@@ -14966,8 +15587,8 @@
         </p:nvSpPr>
         <p:spPr>
           <a:xfrm>
-            <a:off x="8275320" y="4617720"/>
-            <a:ext cx="274320" cy="274320"/>
+            <a:off x="8668512" y="4736592"/>
+            <a:ext cx="182880" cy="182880"/>
           </a:xfrm>
           <a:prstGeom prst="triangle">
             <a:avLst/>
@@ -14986,8 +15607,8 @@
         </p:nvSpPr>
         <p:spPr>
           <a:xfrm>
-            <a:off x="8503920" y="4846320"/>
-            <a:ext cx="274320" cy="274320"/>
+            <a:off x="8833104" y="4901184"/>
+            <a:ext cx="182880" cy="182880"/>
           </a:xfrm>
           <a:prstGeom prst="triangle">
             <a:avLst/>
@@ -15633,8 +16254,8 @@
         </p:nvSpPr>
         <p:spPr>
           <a:xfrm>
-            <a:off x="8046720" y="4389120"/>
-            <a:ext cx="274320" cy="274320"/>
+            <a:off x="8503920" y="4572000"/>
+            <a:ext cx="182880" cy="182880"/>
           </a:xfrm>
           <a:prstGeom prst="triangle">
             <a:avLst/>
@@ -15653,8 +16274,8 @@
         </p:nvSpPr>
         <p:spPr>
           <a:xfrm>
-            <a:off x="8275320" y="4617720"/>
-            <a:ext cx="274320" cy="274320"/>
+            <a:off x="8668512" y="4736592"/>
+            <a:ext cx="182880" cy="182880"/>
           </a:xfrm>
           <a:prstGeom prst="triangle">
             <a:avLst/>
@@ -15673,8 +16294,8 @@
         </p:nvSpPr>
         <p:spPr>
           <a:xfrm>
-            <a:off x="8503920" y="4846320"/>
-            <a:ext cx="274320" cy="274320"/>
+            <a:off x="8833104" y="4901184"/>
+            <a:ext cx="182880" cy="182880"/>
           </a:xfrm>
           <a:prstGeom prst="triangle">
             <a:avLst/>
@@ -16106,7 +16727,7 @@
                   <a:srgbClr val="1F2120"/>
                 </a:solidFill>
               </a:rPr>
-              <a:t>Notice the pattern: the first two tasks are AI-ready in different ways. The third is almost perfect for AI. Why? High stability means the rules stay the same. Low ambiguity means there's a clear right way to do it. High frequency means the payoff is big. And low exposure means you don't have security concerns.</a:t>
+              <a:t>Notice the pattern: the first two tasks are AI-ready in different ways. The third is almost perfect for AI. Why? High stability means the rules stay the same. Low ambiguity means there's a clear right way to do it. High frequency means the payoff is big. And low exposure means the data sensitivity is manageable.</a:t>
             </a:r>
             <a:endParaRPr lang="en-US" sz="1200" dirty="0"/>
           </a:p>
@@ -16120,8 +16741,8 @@
         </p:nvSpPr>
         <p:spPr>
           <a:xfrm>
-            <a:off x="8046720" y="4389120"/>
-            <a:ext cx="274320" cy="274320"/>
+            <a:off x="8503920" y="4572000"/>
+            <a:ext cx="182880" cy="182880"/>
           </a:xfrm>
           <a:prstGeom prst="triangle">
             <a:avLst/>
@@ -16140,8 +16761,8 @@
         </p:nvSpPr>
         <p:spPr>
           <a:xfrm>
-            <a:off x="8275320" y="4617720"/>
-            <a:ext cx="274320" cy="274320"/>
+            <a:off x="8668512" y="4736592"/>
+            <a:ext cx="182880" cy="182880"/>
           </a:xfrm>
           <a:prstGeom prst="triangle">
             <a:avLst/>
@@ -16160,8 +16781,8 @@
         </p:nvSpPr>
         <p:spPr>
           <a:xfrm>
-            <a:off x="8503920" y="4846320"/>
-            <a:ext cx="274320" cy="274320"/>
+            <a:off x="8833104" y="4901184"/>
+            <a:ext cx="182880" cy="182880"/>
           </a:xfrm>
           <a:prstGeom prst="triangle">
             <a:avLst/>
